--- a/projets/projet 12/files/Presentation_P12_Detection_Faux_Billets.pptx
+++ b/projets/projet 12/files/Presentation_P12_Detection_Faux_Billets.pptx
@@ -7627,7 +7627,7 @@
         <p:spPr>
           <a:xfrm>
             <a:off x="91440" y="640080"/>
-            <a:ext cx="8961120" cy="3383280"/>
+            <a:ext cx="8961120" cy="2896723"/>
           </a:xfrm>
           <a:prstGeom prst="rect">
             <a:avLst/>
@@ -7643,13 +7643,13 @@
           <p:nvPr>
             <p:extLst>
               <p:ext uri="{D42A27DB-BD31-4B8C-83A1-F6EECF244321}">
-                <p14:modId xmlns:p14="http://schemas.microsoft.com/office/powerpoint/2010/main" val="1579011935"/>
+                <p14:modId xmlns:p14="http://schemas.microsoft.com/office/powerpoint/2010/main" val="790836968"/>
               </p:ext>
             </p:extLst>
           </p:nvPr>
         </p:nvGraphicFramePr>
         <p:xfrm>
-          <a:off x="457200" y="4206240"/>
+          <a:off x="403059" y="3674123"/>
           <a:ext cx="8229600" cy="1295400"/>
         </p:xfrm>
         <a:graphic>
@@ -12697,17 +12697,6 @@
             <a:pPr marL="0" indent="0" algn="ctr">
               <a:buNone/>
             </a:pPr>
-            <a:r>
-              <a:rPr lang="en-US" sz="1600" dirty="0">
-                <a:solidFill>
-                  <a:srgbClr val="FFFFFF"/>
-                </a:solidFill>
-                <a:latin typeface="Calibri" pitchFamily="34" charset="0"/>
-                <a:ea typeface="Calibri" pitchFamily="34" charset="-122"/>
-                <a:cs typeface="Calibri" pitchFamily="34" charset="-120"/>
-              </a:rPr>
-              <a:t>✅</a:t>
-            </a:r>
             <a:endParaRPr lang="en-US" sz="1600" dirty="0"/>
           </a:p>
         </p:txBody>
@@ -12802,17 +12791,6 @@
             <a:pPr marL="0" indent="0" algn="ctr">
               <a:buNone/>
             </a:pPr>
-            <a:r>
-              <a:rPr lang="en-US" sz="1600" dirty="0">
-                <a:solidFill>
-                  <a:srgbClr val="FFFFFF"/>
-                </a:solidFill>
-                <a:latin typeface="Calibri" pitchFamily="34" charset="0"/>
-                <a:ea typeface="Calibri" pitchFamily="34" charset="-122"/>
-                <a:cs typeface="Calibri" pitchFamily="34" charset="-120"/>
-              </a:rPr>
-              <a:t>🏆</a:t>
-            </a:r>
             <a:endParaRPr lang="en-US" sz="1600" dirty="0"/>
           </a:p>
         </p:txBody>
@@ -12907,17 +12885,6 @@
             <a:pPr marL="0" indent="0" algn="ctr">
               <a:buNone/>
             </a:pPr>
-            <a:r>
-              <a:rPr lang="en-US" sz="1600" dirty="0">
-                <a:solidFill>
-                  <a:srgbClr val="FFFFFF"/>
-                </a:solidFill>
-                <a:latin typeface="Calibri" pitchFamily="34" charset="0"/>
-                <a:ea typeface="Calibri" pitchFamily="34" charset="-122"/>
-                <a:cs typeface="Calibri" pitchFamily="34" charset="-120"/>
-              </a:rPr>
-              <a:t>🔍</a:t>
-            </a:r>
             <a:endParaRPr lang="en-US" sz="1600" dirty="0"/>
           </a:p>
         </p:txBody>
@@ -13012,17 +12979,6 @@
             <a:pPr marL="0" indent="0" algn="ctr">
               <a:buNone/>
             </a:pPr>
-            <a:r>
-              <a:rPr lang="en-US" sz="1600" dirty="0">
-                <a:solidFill>
-                  <a:srgbClr val="FFFFFF"/>
-                </a:solidFill>
-                <a:latin typeface="Calibri" pitchFamily="34" charset="0"/>
-                <a:ea typeface="Calibri" pitchFamily="34" charset="-122"/>
-                <a:cs typeface="Calibri" pitchFamily="34" charset="-120"/>
-              </a:rPr>
-              <a:t>🚀</a:t>
-            </a:r>
             <a:endParaRPr lang="en-US" sz="1600" dirty="0"/>
           </a:p>
         </p:txBody>

--- a/projets/projet 12/files/Presentation_P12_Detection_Faux_Billets.pptx
+++ b/projets/projet 12/files/Presentation_P12_Detection_Faux_Billets.pptx
@@ -4,9 +4,6 @@
   <p:sldMasterIdLst>
     <p:sldMasterId id="2147483648" r:id="rId1"/>
   </p:sldMasterIdLst>
-  <p:notesMasterIdLst>
-    <p:notesMasterId r:id="rId20"/>
-  </p:notesMasterIdLst>
   <p:sldIdLst>
     <p:sldId id="256" r:id="rId2"/>
     <p:sldId id="257" r:id="rId3"/>
@@ -27,7 +24,10 @@
     <p:sldId id="272" r:id="rId18"/>
     <p:sldId id="273" r:id="rId19"/>
   </p:sldIdLst>
-  <p:sldSz cx="9144000" cy="5143500" type="screen16x9"/>
+  <p:notesMasterIdLst>
+    <p:notesMasterId r:id="rId20"/>
+  </p:notesMasterIdLst>
+  <p:sldSz cx="9144000" cy="5143500"/>
   <p:notesSz cx="5143500" cy="9144000"/>
   <p:defaultTextStyle>
     <a:lvl1pPr marL="0" algn="l" defTabSz="914400" rtl="0" eaLnBrk="1" latinLnBrk="0" hangingPunct="1">
@@ -121,11 +121,6 @@
       </a:defRPr>
     </a:lvl9pPr>
   </p:defaultTextStyle>
-  <p:extLst>
-    <p:ext uri="{EFAFB233-063F-42B5-8137-9DF3F51BA10A}">
-      <p15:sldGuideLst xmlns:p15="http://schemas.microsoft.com/office/powerpoint/2012/main"/>
-    </p:ext>
-  </p:extLst>
 </p:presentation>
 </file>
 
@@ -151,10 +146,234 @@
           <a:chExt cx="0" cy="0"/>
         </a:xfrm>
       </p:grpSpPr>
+      <p:sp>
+        <p:nvSpPr>
+          <p:cNvPr id="2" name="Header Placeholder 1"/>
+          <p:cNvSpPr>
+            <a:spLocks noGrp="1"/>
+          </p:cNvSpPr>
+          <p:nvPr>
+            <p:ph type="hdr" sz="quarter"/>
+          </p:nvPr>
+        </p:nvSpPr>
+        <p:spPr>
+          <a:xfrm>
+            <a:off x="0" y="0"/>
+            <a:ext cx="2971800" cy="458788"/>
+          </a:xfrm>
+          <a:prstGeom prst="rect">
+            <a:avLst/>
+          </a:prstGeom>
+        </p:spPr>
+        <p:txBody>
+          <a:bodyPr vert="horz" lIns="91440" tIns="45720" rIns="91440" bIns="45720" rtlCol="0"/>
+          <a:lstStyle>
+            <a:lvl1pPr algn="l">
+              <a:defRPr sz="1200"/>
+            </a:lvl1pPr>
+          </a:lstStyle>
+          <a:p>
+            <a:endParaRPr lang="en-US"/>
+          </a:p>
+        </p:txBody>
+      </p:sp>
+      <p:sp>
+        <p:nvSpPr>
+          <p:cNvPr id="3" name="Date Placeholder 2"/>
+          <p:cNvSpPr>
+            <a:spLocks noGrp="1"/>
+          </p:cNvSpPr>
+          <p:nvPr>
+            <p:ph type="dt" idx="1"/>
+          </p:nvPr>
+        </p:nvSpPr>
+        <p:spPr>
+          <a:xfrm>
+            <a:off x="3884613" y="0"/>
+            <a:ext cx="2971800" cy="458788"/>
+          </a:xfrm>
+          <a:prstGeom prst="rect">
+            <a:avLst/>
+          </a:prstGeom>
+        </p:spPr>
+        <p:txBody>
+          <a:bodyPr vert="horz" lIns="91440" tIns="45720" rIns="91440" bIns="45720" rtlCol="0"/>
+          <a:lstStyle>
+            <a:lvl1pPr algn="r">
+              <a:defRPr sz="1200"/>
+            </a:lvl1pPr>
+          </a:lstStyle>
+          <a:p>
+            <a:fld id="{5282F153-3F37-0F45-9E97-73ACFA13230C}" type="datetimeFigureOut">
+              <a:rPr lang="en-US"/>
+              <a:t>7/23/19</a:t>
+            </a:fld>
+            <a:endParaRPr lang="en-US"/>
+          </a:p>
+        </p:txBody>
+      </p:sp>
+      <p:sp>
+        <p:nvSpPr>
+          <p:cNvPr id="4" name="Slide Image Placeholder 3"/>
+          <p:cNvSpPr>
+            <a:spLocks noGrp="1" noRot="1" noChangeAspect="1"/>
+          </p:cNvSpPr>
+          <p:nvPr>
+            <p:ph type="sldImg" idx="2"/>
+          </p:nvPr>
+        </p:nvSpPr>
+        <p:spPr>
+          <a:xfrm>
+            <a:off x="685800" y="1143000"/>
+            <a:ext cx="5486400" cy="3086100"/>
+          </a:xfrm>
+          <a:prstGeom prst="rect">
+            <a:avLst/>
+          </a:prstGeom>
+          <a:noFill/>
+          <a:ln w="12700">
+            <a:solidFill>
+              <a:prstClr val="black"/>
+            </a:solidFill>
+          </a:ln>
+        </p:spPr>
+        <p:txBody>
+          <a:bodyPr vert="horz" lIns="91440" tIns="45720" rIns="91440" bIns="45720" rtlCol="0" anchor="ctr"/>
+          <a:lstStyle/>
+          <a:p>
+            <a:endParaRPr lang="en-US"/>
+          </a:p>
+        </p:txBody>
+      </p:sp>
+      <p:sp>
+        <p:nvSpPr>
+          <p:cNvPr id="5" name="Notes Placeholder 4"/>
+          <p:cNvSpPr>
+            <a:spLocks noGrp="1"/>
+          </p:cNvSpPr>
+          <p:nvPr>
+            <p:ph type="body" sz="quarter" idx="3"/>
+          </p:nvPr>
+        </p:nvSpPr>
+        <p:spPr>
+          <a:xfrm>
+            <a:off x="685800" y="4400550"/>
+            <a:ext cx="5486400" cy="3600450"/>
+          </a:xfrm>
+          <a:prstGeom prst="rect">
+            <a:avLst/>
+          </a:prstGeom>
+        </p:spPr>
+        <p:txBody>
+          <a:bodyPr vert="horz" lIns="91440" tIns="45720" rIns="91440" bIns="45720" rtlCol="0"/>
+          <a:lstStyle/>
+          <a:p>
+            <a:pPr lvl="0"/>
+            <a:r>
+              <a:rPr lang="en-US"/>
+              <a:t>Click to edit Master text styles</a:t>
+            </a:r>
+          </a:p>
+          <a:p>
+            <a:pPr lvl="1"/>
+            <a:r>
+              <a:rPr lang="en-US"/>
+              <a:t>Second level</a:t>
+            </a:r>
+          </a:p>
+          <a:p>
+            <a:pPr lvl="2"/>
+            <a:r>
+              <a:rPr lang="en-US"/>
+              <a:t>Third level</a:t>
+            </a:r>
+          </a:p>
+          <a:p>
+            <a:pPr lvl="3"/>
+            <a:r>
+              <a:rPr lang="en-US"/>
+              <a:t>Fourth level</a:t>
+            </a:r>
+          </a:p>
+          <a:p>
+            <a:pPr lvl="4"/>
+            <a:r>
+              <a:rPr lang="en-US"/>
+              <a:t>Fifth level</a:t>
+            </a:r>
+          </a:p>
+        </p:txBody>
+      </p:sp>
+      <p:sp>
+        <p:nvSpPr>
+          <p:cNvPr id="6" name="Footer Placeholder 5"/>
+          <p:cNvSpPr>
+            <a:spLocks noGrp="1"/>
+          </p:cNvSpPr>
+          <p:nvPr>
+            <p:ph type="ftr" sz="quarter" idx="4"/>
+          </p:nvPr>
+        </p:nvSpPr>
+        <p:spPr>
+          <a:xfrm>
+            <a:off x="0" y="8685213"/>
+            <a:ext cx="2971800" cy="458787"/>
+          </a:xfrm>
+          <a:prstGeom prst="rect">
+            <a:avLst/>
+          </a:prstGeom>
+        </p:spPr>
+        <p:txBody>
+          <a:bodyPr vert="horz" lIns="91440" tIns="45720" rIns="91440" bIns="45720" rtlCol="0" anchor="b"/>
+          <a:lstStyle>
+            <a:lvl1pPr algn="l">
+              <a:defRPr sz="1200"/>
+            </a:lvl1pPr>
+          </a:lstStyle>
+          <a:p>
+            <a:endParaRPr lang="en-US"/>
+          </a:p>
+        </p:txBody>
+      </p:sp>
+      <p:sp>
+        <p:nvSpPr>
+          <p:cNvPr id="7" name="Slide Number Placeholder 6"/>
+          <p:cNvSpPr>
+            <a:spLocks noGrp="1"/>
+          </p:cNvSpPr>
+          <p:nvPr>
+            <p:ph type="sldNum" sz="quarter" idx="5"/>
+          </p:nvPr>
+        </p:nvSpPr>
+        <p:spPr>
+          <a:xfrm>
+            <a:off x="3884613" y="8685213"/>
+            <a:ext cx="2971800" cy="458787"/>
+          </a:xfrm>
+          <a:prstGeom prst="rect">
+            <a:avLst/>
+          </a:prstGeom>
+        </p:spPr>
+        <p:txBody>
+          <a:bodyPr vert="horz" lIns="91440" tIns="45720" rIns="91440" bIns="45720" rtlCol="0" anchor="b"/>
+          <a:lstStyle>
+            <a:lvl1pPr algn="r">
+              <a:defRPr sz="1200"/>
+            </a:lvl1pPr>
+          </a:lstStyle>
+          <a:p>
+            <a:fld id="{CE5E9CC1-C706-0F49-92D6-E571CC5EEA8F}" type="slidenum">
+              <a:rPr lang="en-US"/>
+              <a:t>‹#›</a:t>
+            </a:fld>
+            <a:endParaRPr lang="en-US"/>
+          </a:p>
+        </p:txBody>
+      </p:sp>
     </p:spTree>
     <p:extLst>
       <p:ext uri="{BB962C8B-B14F-4D97-AF65-F5344CB8AC3E}">
-        <p14:creationId xmlns:p14="http://schemas.microsoft.com/office/powerpoint/2010/main" val="369914450"/>
+        <p14:creationId xmlns:p14="http://schemas.microsoft.com/office/powerpoint/2010/main" val="1024086991"/>
       </p:ext>
     </p:extLst>
   </p:cSld>
@@ -298,6 +517,10 @@
           <a:bodyPr/>
           <a:lstStyle/>
           <a:p>
+            <a:r>
+              <a:rPr lang="en-US" dirty="0"/>
+              <a:t/>
+            </a:r>
             <a:endParaRPr lang="en-US" dirty="0"/>
           </a:p>
         </p:txBody>
@@ -382,6 +605,10 @@
           <a:bodyPr/>
           <a:lstStyle/>
           <a:p>
+            <a:r>
+              <a:rPr lang="en-US" dirty="0"/>
+              <a:t/>
+            </a:r>
             <a:endParaRPr lang="en-US" dirty="0"/>
           </a:p>
         </p:txBody>
@@ -466,6 +693,10 @@
           <a:bodyPr/>
           <a:lstStyle/>
           <a:p>
+            <a:r>
+              <a:rPr lang="en-US" dirty="0"/>
+              <a:t/>
+            </a:r>
             <a:endParaRPr lang="en-US" dirty="0"/>
           </a:p>
         </p:txBody>
@@ -550,6 +781,10 @@
           <a:bodyPr/>
           <a:lstStyle/>
           <a:p>
+            <a:r>
+              <a:rPr lang="en-US" dirty="0"/>
+              <a:t/>
+            </a:r>
             <a:endParaRPr lang="en-US" dirty="0"/>
           </a:p>
         </p:txBody>
@@ -634,6 +869,10 @@
           <a:bodyPr/>
           <a:lstStyle/>
           <a:p>
+            <a:r>
+              <a:rPr lang="en-US" dirty="0"/>
+              <a:t/>
+            </a:r>
             <a:endParaRPr lang="en-US" dirty="0"/>
           </a:p>
         </p:txBody>
@@ -718,6 +957,10 @@
           <a:bodyPr/>
           <a:lstStyle/>
           <a:p>
+            <a:r>
+              <a:rPr lang="en-US" dirty="0"/>
+              <a:t/>
+            </a:r>
             <a:endParaRPr lang="en-US" dirty="0"/>
           </a:p>
         </p:txBody>
@@ -802,6 +1045,10 @@
           <a:bodyPr/>
           <a:lstStyle/>
           <a:p>
+            <a:r>
+              <a:rPr lang="en-US" dirty="0"/>
+              <a:t/>
+            </a:r>
             <a:endParaRPr lang="en-US" dirty="0"/>
           </a:p>
         </p:txBody>
@@ -886,6 +1133,10 @@
           <a:bodyPr/>
           <a:lstStyle/>
           <a:p>
+            <a:r>
+              <a:rPr lang="en-US" dirty="0"/>
+              <a:t/>
+            </a:r>
             <a:endParaRPr lang="en-US" dirty="0"/>
           </a:p>
         </p:txBody>
@@ -970,6 +1221,10 @@
           <a:bodyPr/>
           <a:lstStyle/>
           <a:p>
+            <a:r>
+              <a:rPr lang="en-US" dirty="0"/>
+              <a:t/>
+            </a:r>
             <a:endParaRPr lang="en-US" dirty="0"/>
           </a:p>
         </p:txBody>
@@ -1054,6 +1309,10 @@
           <a:bodyPr/>
           <a:lstStyle/>
           <a:p>
+            <a:r>
+              <a:rPr lang="en-US" dirty="0"/>
+              <a:t/>
+            </a:r>
             <a:endParaRPr lang="en-US" dirty="0"/>
           </a:p>
         </p:txBody>
@@ -1138,6 +1397,10 @@
           <a:bodyPr/>
           <a:lstStyle/>
           <a:p>
+            <a:r>
+              <a:rPr lang="en-US" dirty="0"/>
+              <a:t/>
+            </a:r>
             <a:endParaRPr lang="en-US" dirty="0"/>
           </a:p>
         </p:txBody>
@@ -1222,6 +1485,10 @@
           <a:bodyPr/>
           <a:lstStyle/>
           <a:p>
+            <a:r>
+              <a:rPr lang="en-US" dirty="0"/>
+              <a:t/>
+            </a:r>
             <a:endParaRPr lang="en-US" dirty="0"/>
           </a:p>
         </p:txBody>
@@ -1306,6 +1573,10 @@
           <a:bodyPr/>
           <a:lstStyle/>
           <a:p>
+            <a:r>
+              <a:rPr lang="en-US" dirty="0"/>
+              <a:t/>
+            </a:r>
             <a:endParaRPr lang="en-US" dirty="0"/>
           </a:p>
         </p:txBody>
@@ -1390,6 +1661,10 @@
           <a:bodyPr/>
           <a:lstStyle/>
           <a:p>
+            <a:r>
+              <a:rPr lang="en-US" dirty="0"/>
+              <a:t/>
+            </a:r>
             <a:endParaRPr lang="en-US" dirty="0"/>
           </a:p>
         </p:txBody>
@@ -1474,6 +1749,10 @@
           <a:bodyPr/>
           <a:lstStyle/>
           <a:p>
+            <a:r>
+              <a:rPr lang="en-US" dirty="0"/>
+              <a:t/>
+            </a:r>
             <a:endParaRPr lang="en-US" dirty="0"/>
           </a:p>
         </p:txBody>
@@ -1558,6 +1837,10 @@
           <a:bodyPr/>
           <a:lstStyle/>
           <a:p>
+            <a:r>
+              <a:rPr lang="en-US" dirty="0"/>
+              <a:t/>
+            </a:r>
             <a:endParaRPr lang="en-US" dirty="0"/>
           </a:p>
         </p:txBody>
@@ -1642,6 +1925,10 @@
           <a:bodyPr/>
           <a:lstStyle/>
           <a:p>
+            <a:r>
+              <a:rPr lang="en-US" dirty="0"/>
+              <a:t/>
+            </a:r>
             <a:endParaRPr lang="en-US" dirty="0"/>
           </a:p>
         </p:txBody>
@@ -1726,6 +2013,10 @@
           <a:bodyPr/>
           <a:lstStyle/>
           <a:p>
+            <a:r>
+              <a:rPr lang="en-US" dirty="0"/>
+              <a:t/>
+            </a:r>
             <a:endParaRPr lang="en-US" dirty="0"/>
           </a:p>
         </p:txBody>
@@ -1799,11 +2090,6 @@
 <file path=ppt/slideMasters/slideMaster1.xml><?xml version="1.0" encoding="utf-8"?>
 <p:sldMaster xmlns:a="http://schemas.openxmlformats.org/drawingml/2006/main" xmlns:r="http://schemas.openxmlformats.org/officeDocument/2006/relationships" xmlns:p="http://schemas.openxmlformats.org/presentationml/2006/main">
   <p:cSld>
-    <p:bg>
-      <p:bgRef idx="1001">
-        <a:schemeClr val="bg1"/>
-      </p:bgRef>
-    </p:bg>
     <p:spTree>
       <p:nvGrpSpPr>
         <p:cNvPr id="1" name=""/>
@@ -2086,7 +2372,6 @@
         <a:solidFill>
           <a:srgbClr val="0A1628"/>
         </a:solidFill>
-        <a:effectLst/>
       </p:bgPr>
     </p:bg>
     <p:spTree>
@@ -2127,13 +2412,6 @@
             <a:prstDash val="solid"/>
           </a:ln>
         </p:spPr>
-        <p:txBody>
-          <a:bodyPr/>
-          <a:lstStyle/>
-          <a:p>
-            <a:endParaRPr lang="fr-FR"/>
-          </a:p>
-        </p:txBody>
       </p:sp>
       <p:sp>
         <p:nvSpPr>
@@ -2156,13 +2434,6 @@
           </a:solidFill>
           <a:ln/>
         </p:spPr>
-        <p:txBody>
-          <a:bodyPr/>
-          <a:lstStyle/>
-          <a:p>
-            <a:endParaRPr lang="fr-FR"/>
-          </a:p>
-        </p:txBody>
       </p:sp>
       <p:sp>
         <p:nvSpPr>
@@ -2185,7 +2456,7 @@
           <a:bodyPr wrap="square" rtlCol="0" anchor="ctr"/>
           <a:lstStyle/>
           <a:p>
-            <a:pPr marL="0" indent="0">
+            <a:pPr indent="0" marL="0">
               <a:buNone/>
             </a:pPr>
             <a:r>
@@ -2202,7 +2473,7 @@
             <a:endParaRPr lang="en-US" sz="4000" dirty="0"/>
           </a:p>
           <a:p>
-            <a:pPr marL="0" indent="0">
+            <a:pPr indent="0" marL="0">
               <a:buNone/>
             </a:pPr>
             <a:r>
@@ -2239,13 +2510,6 @@
           </a:solidFill>
           <a:ln/>
         </p:spPr>
-        <p:txBody>
-          <a:bodyPr/>
-          <a:lstStyle/>
-          <a:p>
-            <a:endParaRPr lang="fr-FR"/>
-          </a:p>
-        </p:txBody>
       </p:sp>
       <p:sp>
         <p:nvSpPr>
@@ -2268,7 +2532,7 @@
           <a:bodyPr wrap="square" rtlCol="0" anchor="ctr"/>
           <a:lstStyle/>
           <a:p>
-            <a:pPr marL="0" indent="0">
+            <a:pPr indent="0" marL="0">
               <a:buNone/>
             </a:pPr>
             <a:r>
@@ -2307,7 +2571,7 @@
           <a:bodyPr wrap="square" rtlCol="0" anchor="ctr"/>
           <a:lstStyle/>
           <a:p>
-            <a:pPr marL="0" indent="0">
+            <a:pPr indent="0" marL="0">
               <a:buNone/>
             </a:pPr>
             <a:r>
@@ -2344,13 +2608,6 @@
           </a:solidFill>
           <a:ln/>
         </p:spPr>
-        <p:txBody>
-          <a:bodyPr/>
-          <a:lstStyle/>
-          <a:p>
-            <a:endParaRPr lang="fr-FR"/>
-          </a:p>
-        </p:txBody>
       </p:sp>
     </p:spTree>
   </p:cSld>
@@ -2368,7 +2625,6 @@
         <a:solidFill>
           <a:srgbClr val="F0F4F8"/>
         </a:solidFill>
-        <a:effectLst/>
       </p:bgPr>
     </p:bg>
     <p:spTree>
@@ -2406,7 +2662,7 @@
           <a:bodyPr wrap="square" rtlCol="0" anchor="ctr"/>
           <a:lstStyle/>
           <a:p>
-            <a:pPr marL="0" indent="0">
+            <a:pPr indent="0" marL="0">
               <a:buNone/>
             </a:pPr>
             <a:r>
@@ -2443,13 +2699,6 @@
           </a:solidFill>
           <a:ln/>
         </p:spPr>
-        <p:txBody>
-          <a:bodyPr/>
-          <a:lstStyle/>
-          <a:p>
-            <a:endParaRPr lang="fr-FR"/>
-          </a:p>
-        </p:txBody>
       </p:sp>
       <p:sp>
         <p:nvSpPr>
@@ -2475,13 +2724,6 @@
             <a:prstDash val="solid"/>
           </a:ln>
         </p:spPr>
-        <p:txBody>
-          <a:bodyPr/>
-          <a:lstStyle/>
-          <a:p>
-            <a:endParaRPr lang="fr-FR"/>
-          </a:p>
-        </p:txBody>
       </p:sp>
       <p:sp>
         <p:nvSpPr>
@@ -2504,20 +2746,9 @@
           <a:bodyPr wrap="square" rtlCol="0" anchor="ctr"/>
           <a:lstStyle/>
           <a:p>
-            <a:pPr marL="0" indent="0">
+            <a:pPr indent="0" marL="0">
               <a:buNone/>
             </a:pPr>
-            <a:r>
-              <a:rPr lang="en-US" sz="1300" b="1" dirty="0" err="1">
-                <a:solidFill>
-                  <a:srgbClr val="1A2332"/>
-                </a:solidFill>
-                <a:latin typeface="Calibri" pitchFamily="34" charset="0"/>
-                <a:ea typeface="Calibri" pitchFamily="34" charset="-122"/>
-                <a:cs typeface="Calibri" pitchFamily="34" charset="-120"/>
-              </a:rPr>
-              <a:t>Séparation</a:t>
-            </a:r>
             <a:r>
               <a:rPr lang="en-US" sz="1300" b="1" dirty="0">
                 <a:solidFill>
@@ -2527,7 +2758,7 @@
                 <a:ea typeface="Calibri" pitchFamily="34" charset="-122"/>
                 <a:cs typeface="Calibri" pitchFamily="34" charset="-120"/>
               </a:rPr>
-              <a:t> Train/Test</a:t>
+              <a:t>📊 Séparation Train/Test</a:t>
             </a:r>
             <a:endParaRPr lang="en-US" sz="1300" dirty="0"/>
           </a:p>
@@ -2633,13 +2864,6 @@
             <a:prstDash val="solid"/>
           </a:ln>
         </p:spPr>
-        <p:txBody>
-          <a:bodyPr/>
-          <a:lstStyle/>
-          <a:p>
-            <a:endParaRPr lang="fr-FR"/>
-          </a:p>
-        </p:txBody>
       </p:sp>
       <p:sp>
         <p:nvSpPr>
@@ -2662,11 +2886,11 @@
           <a:bodyPr wrap="square" rtlCol="0" anchor="ctr"/>
           <a:lstStyle/>
           <a:p>
-            <a:pPr marL="0" indent="0">
+            <a:pPr indent="0" marL="0">
               <a:buNone/>
             </a:pPr>
             <a:r>
-              <a:rPr lang="en-US" sz="1300" b="1" dirty="0" err="1">
+              <a:rPr lang="en-US" sz="1300" b="1" dirty="0">
                 <a:solidFill>
                   <a:srgbClr val="3498DB"/>
                 </a:solidFill>
@@ -2674,7 +2898,7 @@
                 <a:ea typeface="Calibri" pitchFamily="34" charset="-122"/>
                 <a:cs typeface="Calibri" pitchFamily="34" charset="-120"/>
               </a:rPr>
-              <a:t>Résultats</a:t>
+              <a:t>🏆 Résultats</a:t>
             </a:r>
             <a:endParaRPr lang="en-US" sz="1300" dirty="0"/>
           </a:p>
@@ -2780,13 +3004,6 @@
             <a:prstDash val="solid"/>
           </a:ln>
         </p:spPr>
-        <p:txBody>
-          <a:bodyPr/>
-          <a:lstStyle/>
-          <a:p>
-            <a:endParaRPr lang="fr-FR"/>
-          </a:p>
-        </p:txBody>
       </p:sp>
       <p:sp>
         <p:nvSpPr>
@@ -2809,7 +3026,7 @@
           <a:bodyPr wrap="square" rtlCol="0" anchor="ctr"/>
           <a:lstStyle/>
           <a:p>
-            <a:pPr marL="0" indent="0">
+            <a:pPr indent="0" marL="0">
               <a:buNone/>
             </a:pPr>
             <a:r>
@@ -2848,7 +3065,7 @@
           <a:bodyPr wrap="square" rtlCol="0" anchor="ctr"/>
           <a:lstStyle/>
           <a:p>
-            <a:pPr marL="0" indent="0">
+            <a:pPr indent="0" marL="0">
               <a:buNone/>
             </a:pPr>
             <a:r>
@@ -2887,7 +3104,7 @@
           <a:bodyPr wrap="square" rtlCol="0" anchor="ctr"/>
           <a:lstStyle/>
           <a:p>
-            <a:pPr marL="0" indent="0">
+            <a:pPr indent="0" marL="0">
               <a:buNone/>
             </a:pPr>
             <a:r>
@@ -2907,7 +3124,7 @@
       </p:sp>
       <p:graphicFrame>
         <p:nvGraphicFramePr>
-          <p:cNvPr id="14" name="Table 0"/>
+          <p:cNvPr id="11" name="Table 0"/>
           <p:cNvGraphicFramePr>
             <a:graphicFrameLocks noGrp="1"/>
           </p:cNvGraphicFramePr>
@@ -2921,48 +3138,18 @@
         </p:nvGraphicFramePr>
         <p:xfrm>
           <a:off x="457200" y="3977640"/>
-          <a:ext cx="8229600" cy="975360"/>
+          <a:ext cx="8229600" cy="914400"/>
         </p:xfrm>
         <a:graphic>
           <a:graphicData uri="http://schemas.openxmlformats.org/drawingml/2006/table">
             <a:tbl>
               <a:tblPr/>
               <a:tblGrid>
-                <a:gridCol w="1097280">
-                  <a:extLst>
-                    <a:ext uri="{9D8B030D-6E8A-4147-A177-3AD203B41FA5}">
-                      <a16:colId xmlns:a16="http://schemas.microsoft.com/office/drawing/2014/main" val="20000"/>
-                    </a:ext>
-                  </a:extLst>
-                </a:gridCol>
-                <a:gridCol w="1645920">
-                  <a:extLst>
-                    <a:ext uri="{9D8B030D-6E8A-4147-A177-3AD203B41FA5}">
-                      <a16:colId xmlns:a16="http://schemas.microsoft.com/office/drawing/2014/main" val="20001"/>
-                    </a:ext>
-                  </a:extLst>
-                </a:gridCol>
-                <a:gridCol w="1645920">
-                  <a:extLst>
-                    <a:ext uri="{9D8B030D-6E8A-4147-A177-3AD203B41FA5}">
-                      <a16:colId xmlns:a16="http://schemas.microsoft.com/office/drawing/2014/main" val="20002"/>
-                    </a:ext>
-                  </a:extLst>
-                </a:gridCol>
-                <a:gridCol w="1920240">
-                  <a:extLst>
-                    <a:ext uri="{9D8B030D-6E8A-4147-A177-3AD203B41FA5}">
-                      <a16:colId xmlns:a16="http://schemas.microsoft.com/office/drawing/2014/main" val="20003"/>
-                    </a:ext>
-                  </a:extLst>
-                </a:gridCol>
-                <a:gridCol w="1920240">
-                  <a:extLst>
-                    <a:ext uri="{9D8B030D-6E8A-4147-A177-3AD203B41FA5}">
-                      <a16:colId xmlns:a16="http://schemas.microsoft.com/office/drawing/2014/main" val="20004"/>
-                    </a:ext>
-                  </a:extLst>
-                </a:gridCol>
+                <a:gridCol w="1097280"/>
+                <a:gridCol w="1645920"/>
+                <a:gridCol w="1645920"/>
+                <a:gridCol w="1920240"/>
+                <a:gridCol w="1920240"/>
               </a:tblGrid>
               <a:tr h="228600">
                 <a:tc>
@@ -2970,7 +3157,7 @@
                     <a:bodyPr/>
                     <a:lstStyle/>
                     <a:p>
-                      <a:pPr marL="0" indent="0" algn="ctr">
+                      <a:pPr algn="ctr" indent="0" marL="0">
                         <a:buNone/>
                       </a:pPr>
                       <a:r>
@@ -2991,7 +3178,7 @@
                       </a:endParaRPr>
                     </a:p>
                   </a:txBody>
-                  <a:tcPr anchor="ctr">
+                  <a:tcPr marL="91440" marR="91440" marT="45720" marB="45720" anchor="ctr">
                     <a:lnL w="6350" cap="flat" cmpd="sng" algn="ctr">
                       <a:solidFill>
                         <a:srgbClr val="E0E8F0"/>
@@ -3038,7 +3225,7 @@
                     <a:bodyPr/>
                     <a:lstStyle/>
                     <a:p>
-                      <a:pPr marL="0" indent="0" algn="ctr">
+                      <a:pPr algn="ctr" indent="0" marL="0">
                         <a:buNone/>
                       </a:pPr>
                       <a:r>
@@ -3059,7 +3246,7 @@
                       </a:endParaRPr>
                     </a:p>
                   </a:txBody>
-                  <a:tcPr anchor="ctr">
+                  <a:tcPr marL="91440" marR="91440" marT="45720" marB="45720" anchor="ctr">
                     <a:lnL w="6350" cap="flat" cmpd="sng" algn="ctr">
                       <a:solidFill>
                         <a:srgbClr val="E0E8F0"/>
@@ -3106,7 +3293,7 @@
                     <a:bodyPr/>
                     <a:lstStyle/>
                     <a:p>
-                      <a:pPr marL="0" indent="0" algn="ctr">
+                      <a:pPr algn="ctr" indent="0" marL="0">
                         <a:buNone/>
                       </a:pPr>
                       <a:r>
@@ -3127,7 +3314,7 @@
                       </a:endParaRPr>
                     </a:p>
                   </a:txBody>
-                  <a:tcPr anchor="ctr">
+                  <a:tcPr marL="91440" marR="91440" marT="45720" marB="45720" anchor="ctr">
                     <a:lnL w="6350" cap="flat" cmpd="sng" algn="ctr">
                       <a:solidFill>
                         <a:srgbClr val="E0E8F0"/>
@@ -3174,7 +3361,7 @@
                     <a:bodyPr/>
                     <a:lstStyle/>
                     <a:p>
-                      <a:pPr marL="0" indent="0" algn="ctr">
+                      <a:pPr algn="ctr" indent="0" marL="0">
                         <a:buNone/>
                       </a:pPr>
                       <a:r>
@@ -3195,7 +3382,7 @@
                       </a:endParaRPr>
                     </a:p>
                   </a:txBody>
-                  <a:tcPr anchor="ctr">
+                  <a:tcPr marL="91440" marR="91440" marT="45720" marB="45720" anchor="ctr">
                     <a:lnL w="6350" cap="flat" cmpd="sng" algn="ctr">
                       <a:solidFill>
                         <a:srgbClr val="E0E8F0"/>
@@ -3242,7 +3429,7 @@
                     <a:bodyPr/>
                     <a:lstStyle/>
                     <a:p>
-                      <a:pPr marL="0" indent="0" algn="ctr">
+                      <a:pPr algn="ctr" indent="0" marL="0">
                         <a:buNone/>
                       </a:pPr>
                       <a:r>
@@ -3263,7 +3450,7 @@
                       </a:endParaRPr>
                     </a:p>
                   </a:txBody>
-                  <a:tcPr anchor="ctr">
+                  <a:tcPr marL="91440" marR="91440" marT="45720" marB="45720" anchor="ctr">
                     <a:lnL w="6350" cap="flat" cmpd="sng" algn="ctr">
                       <a:solidFill>
                         <a:srgbClr val="E0E8F0"/>
@@ -3305,11 +3492,6 @@
                     </a:solidFill>
                   </a:tcPr>
                 </a:tc>
-                <a:extLst>
-                  <a:ext uri="{0D108BD9-81ED-4DB2-BD59-A6C34878D82A}">
-                    <a16:rowId xmlns:a16="http://schemas.microsoft.com/office/drawing/2014/main" val="10000"/>
-                  </a:ext>
-                </a:extLst>
               </a:tr>
               <a:tr h="228600">
                 <a:tc>
@@ -3317,7 +3499,7 @@
                     <a:bodyPr/>
                     <a:lstStyle/>
                     <a:p>
-                      <a:pPr marL="0" indent="0" algn="ctr">
+                      <a:pPr algn="ctr" indent="0" marL="0">
                         <a:buNone/>
                       </a:pPr>
                       <a:r>
@@ -3338,7 +3520,7 @@
                       </a:endParaRPr>
                     </a:p>
                   </a:txBody>
-                  <a:tcPr anchor="ctr">
+                  <a:tcPr marL="91440" marR="91440" marT="45720" marB="45720" anchor="ctr">
                     <a:lnL w="6350" cap="flat" cmpd="sng" algn="ctr">
                       <a:solidFill>
                         <a:srgbClr val="E0E8F0"/>
@@ -3382,7 +3564,7 @@
                     <a:bodyPr/>
                     <a:lstStyle/>
                     <a:p>
-                      <a:pPr marL="0" indent="0" algn="ctr">
+                      <a:pPr algn="ctr" indent="0" marL="0">
                         <a:buNone/>
                       </a:pPr>
                       <a:r>
@@ -3403,7 +3585,7 @@
                       </a:endParaRPr>
                     </a:p>
                   </a:txBody>
-                  <a:tcPr anchor="ctr">
+                  <a:tcPr marL="91440" marR="91440" marT="45720" marB="45720" anchor="ctr">
                     <a:lnL w="6350" cap="flat" cmpd="sng" algn="ctr">
                       <a:solidFill>
                         <a:srgbClr val="E0E8F0"/>
@@ -3447,7 +3629,7 @@
                     <a:bodyPr/>
                     <a:lstStyle/>
                     <a:p>
-                      <a:pPr marL="0" indent="0" algn="ctr">
+                      <a:pPr algn="ctr" indent="0" marL="0">
                         <a:buNone/>
                       </a:pPr>
                       <a:r>
@@ -3468,7 +3650,7 @@
                       </a:endParaRPr>
                     </a:p>
                   </a:txBody>
-                  <a:tcPr anchor="ctr">
+                  <a:tcPr marL="91440" marR="91440" marT="45720" marB="45720" anchor="ctr">
                     <a:lnL w="6350" cap="flat" cmpd="sng" algn="ctr">
                       <a:solidFill>
                         <a:srgbClr val="E0E8F0"/>
@@ -3512,7 +3694,7 @@
                     <a:bodyPr/>
                     <a:lstStyle/>
                     <a:p>
-                      <a:pPr marL="0" indent="0" algn="ctr">
+                      <a:pPr algn="ctr" indent="0" marL="0">
                         <a:buNone/>
                       </a:pPr>
                       <a:r>
@@ -3533,7 +3715,7 @@
                       </a:endParaRPr>
                     </a:p>
                   </a:txBody>
-                  <a:tcPr anchor="ctr">
+                  <a:tcPr marL="91440" marR="91440" marT="45720" marB="45720" anchor="ctr">
                     <a:lnL w="6350" cap="flat" cmpd="sng" algn="ctr">
                       <a:solidFill>
                         <a:srgbClr val="E0E8F0"/>
@@ -3577,7 +3759,7 @@
                     <a:bodyPr/>
                     <a:lstStyle/>
                     <a:p>
-                      <a:pPr marL="0" indent="0" algn="ctr">
+                      <a:pPr algn="ctr" indent="0" marL="0">
                         <a:buNone/>
                       </a:pPr>
                       <a:r>
@@ -3598,7 +3780,7 @@
                       </a:endParaRPr>
                     </a:p>
                   </a:txBody>
-                  <a:tcPr anchor="ctr">
+                  <a:tcPr marL="91440" marR="91440" marT="45720" marB="45720" anchor="ctr">
                     <a:lnL w="6350" cap="flat" cmpd="sng" algn="ctr">
                       <a:solidFill>
                         <a:srgbClr val="E0E8F0"/>
@@ -3637,11 +3819,6 @@
                     </a:lnB>
                   </a:tcPr>
                 </a:tc>
-                <a:extLst>
-                  <a:ext uri="{0D108BD9-81ED-4DB2-BD59-A6C34878D82A}">
-                    <a16:rowId xmlns:a16="http://schemas.microsoft.com/office/drawing/2014/main" val="10001"/>
-                  </a:ext>
-                </a:extLst>
               </a:tr>
               <a:tr h="228600">
                 <a:tc>
@@ -3649,7 +3826,7 @@
                     <a:bodyPr/>
                     <a:lstStyle/>
                     <a:p>
-                      <a:pPr marL="0" indent="0" algn="ctr">
+                      <a:pPr algn="ctr" indent="0" marL="0">
                         <a:buNone/>
                       </a:pPr>
                       <a:r>
@@ -3670,7 +3847,7 @@
                       </a:endParaRPr>
                     </a:p>
                   </a:txBody>
-                  <a:tcPr anchor="ctr">
+                  <a:tcPr marL="91440" marR="91440" marT="45720" marB="45720" anchor="ctr">
                     <a:lnL w="6350" cap="flat" cmpd="sng" algn="ctr">
                       <a:solidFill>
                         <a:srgbClr val="E0E8F0"/>
@@ -3714,7 +3891,7 @@
                     <a:bodyPr/>
                     <a:lstStyle/>
                     <a:p>
-                      <a:pPr marL="0" indent="0" algn="ctr">
+                      <a:pPr algn="ctr" indent="0" marL="0">
                         <a:buNone/>
                       </a:pPr>
                       <a:r>
@@ -3735,7 +3912,7 @@
                       </a:endParaRPr>
                     </a:p>
                   </a:txBody>
-                  <a:tcPr anchor="ctr">
+                  <a:tcPr marL="91440" marR="91440" marT="45720" marB="45720" anchor="ctr">
                     <a:lnL w="6350" cap="flat" cmpd="sng" algn="ctr">
                       <a:solidFill>
                         <a:srgbClr val="E0E8F0"/>
@@ -3779,7 +3956,7 @@
                     <a:bodyPr/>
                     <a:lstStyle/>
                     <a:p>
-                      <a:pPr marL="0" indent="0" algn="ctr">
+                      <a:pPr algn="ctr" indent="0" marL="0">
                         <a:buNone/>
                       </a:pPr>
                       <a:r>
@@ -3800,7 +3977,7 @@
                       </a:endParaRPr>
                     </a:p>
                   </a:txBody>
-                  <a:tcPr anchor="ctr">
+                  <a:tcPr marL="91440" marR="91440" marT="45720" marB="45720" anchor="ctr">
                     <a:lnL w="6350" cap="flat" cmpd="sng" algn="ctr">
                       <a:solidFill>
                         <a:srgbClr val="E0E8F0"/>
@@ -3844,7 +4021,7 @@
                     <a:bodyPr/>
                     <a:lstStyle/>
                     <a:p>
-                      <a:pPr marL="0" indent="0" algn="ctr">
+                      <a:pPr algn="ctr" indent="0" marL="0">
                         <a:buNone/>
                       </a:pPr>
                       <a:r>
@@ -3865,7 +4042,7 @@
                       </a:endParaRPr>
                     </a:p>
                   </a:txBody>
-                  <a:tcPr anchor="ctr">
+                  <a:tcPr marL="91440" marR="91440" marT="45720" marB="45720" anchor="ctr">
                     <a:lnL w="6350" cap="flat" cmpd="sng" algn="ctr">
                       <a:solidFill>
                         <a:srgbClr val="E0E8F0"/>
@@ -3909,7 +4086,7 @@
                     <a:bodyPr/>
                     <a:lstStyle/>
                     <a:p>
-                      <a:pPr marL="0" indent="0" algn="ctr">
+                      <a:pPr algn="ctr" indent="0" marL="0">
                         <a:buNone/>
                       </a:pPr>
                       <a:r>
@@ -3930,7 +4107,7 @@
                       </a:endParaRPr>
                     </a:p>
                   </a:txBody>
-                  <a:tcPr anchor="ctr">
+                  <a:tcPr marL="91440" marR="91440" marT="45720" marB="45720" anchor="ctr">
                     <a:lnL w="6350" cap="flat" cmpd="sng" algn="ctr">
                       <a:solidFill>
                         <a:srgbClr val="E0E8F0"/>
@@ -3969,11 +4146,6 @@
                     </a:lnB>
                   </a:tcPr>
                 </a:tc>
-                <a:extLst>
-                  <a:ext uri="{0D108BD9-81ED-4DB2-BD59-A6C34878D82A}">
-                    <a16:rowId xmlns:a16="http://schemas.microsoft.com/office/drawing/2014/main" val="10002"/>
-                  </a:ext>
-                </a:extLst>
               </a:tr>
               <a:tr h="228600">
                 <a:tc>
@@ -3981,7 +4153,7 @@
                     <a:bodyPr/>
                     <a:lstStyle/>
                     <a:p>
-                      <a:pPr marL="0" indent="0" algn="ctr">
+                      <a:pPr algn="ctr" indent="0" marL="0">
                         <a:buNone/>
                       </a:pPr>
                       <a:r>
@@ -4002,7 +4174,7 @@
                       </a:endParaRPr>
                     </a:p>
                   </a:txBody>
-                  <a:tcPr anchor="ctr">
+                  <a:tcPr marL="91440" marR="91440" marT="45720" marB="45720" anchor="ctr">
                     <a:lnL w="6350" cap="flat" cmpd="sng" algn="ctr">
                       <a:solidFill>
                         <a:srgbClr val="E0E8F0"/>
@@ -4046,7 +4218,7 @@
                     <a:bodyPr/>
                     <a:lstStyle/>
                     <a:p>
-                      <a:pPr marL="0" indent="0" algn="ctr">
+                      <a:pPr algn="ctr" indent="0" marL="0">
                         <a:buNone/>
                       </a:pPr>
                       <a:r>
@@ -4067,7 +4239,7 @@
                       </a:endParaRPr>
                     </a:p>
                   </a:txBody>
-                  <a:tcPr anchor="ctr">
+                  <a:tcPr marL="91440" marR="91440" marT="45720" marB="45720" anchor="ctr">
                     <a:lnL w="6350" cap="flat" cmpd="sng" algn="ctr">
                       <a:solidFill>
                         <a:srgbClr val="E0E8F0"/>
@@ -4111,7 +4283,7 @@
                     <a:bodyPr/>
                     <a:lstStyle/>
                     <a:p>
-                      <a:pPr marL="0" indent="0" algn="ctr">
+                      <a:pPr algn="ctr" indent="0" marL="0">
                         <a:buNone/>
                       </a:pPr>
                       <a:r>
@@ -4132,7 +4304,7 @@
                       </a:endParaRPr>
                     </a:p>
                   </a:txBody>
-                  <a:tcPr anchor="ctr">
+                  <a:tcPr marL="91440" marR="91440" marT="45720" marB="45720" anchor="ctr">
                     <a:lnL w="6350" cap="flat" cmpd="sng" algn="ctr">
                       <a:solidFill>
                         <a:srgbClr val="E0E8F0"/>
@@ -4176,7 +4348,7 @@
                     <a:bodyPr/>
                     <a:lstStyle/>
                     <a:p>
-                      <a:pPr marL="0" indent="0" algn="ctr">
+                      <a:pPr algn="ctr" indent="0" marL="0">
                         <a:buNone/>
                       </a:pPr>
                       <a:r>
@@ -4197,7 +4369,7 @@
                       </a:endParaRPr>
                     </a:p>
                   </a:txBody>
-                  <a:tcPr anchor="ctr">
+                  <a:tcPr marL="91440" marR="91440" marT="45720" marB="45720" anchor="ctr">
                     <a:lnL w="6350" cap="flat" cmpd="sng" algn="ctr">
                       <a:solidFill>
                         <a:srgbClr val="E0E8F0"/>
@@ -4241,7 +4413,7 @@
                     <a:bodyPr/>
                     <a:lstStyle/>
                     <a:p>
-                      <a:pPr marL="0" indent="0" algn="ctr">
+                      <a:pPr algn="ctr" indent="0" marL="0">
                         <a:buNone/>
                       </a:pPr>
                       <a:r>
@@ -4262,7 +4434,7 @@
                       </a:endParaRPr>
                     </a:p>
                   </a:txBody>
-                  <a:tcPr anchor="ctr">
+                  <a:tcPr marL="91440" marR="91440" marT="45720" marB="45720" anchor="ctr">
                     <a:lnL w="6350" cap="flat" cmpd="sng" algn="ctr">
                       <a:solidFill>
                         <a:srgbClr val="E0E8F0"/>
@@ -4301,11 +4473,6 @@
                     </a:lnB>
                   </a:tcPr>
                 </a:tc>
-                <a:extLst>
-                  <a:ext uri="{0D108BD9-81ED-4DB2-BD59-A6C34878D82A}">
-                    <a16:rowId xmlns:a16="http://schemas.microsoft.com/office/drawing/2014/main" val="10003"/>
-                  </a:ext>
-                </a:extLst>
               </a:tr>
             </a:tbl>
           </a:graphicData>
@@ -4330,13 +4497,6 @@
           </a:solidFill>
           <a:ln/>
         </p:spPr>
-        <p:txBody>
-          <a:bodyPr/>
-          <a:lstStyle/>
-          <a:p>
-            <a:endParaRPr lang="fr-FR"/>
-          </a:p>
-        </p:txBody>
       </p:sp>
       <p:sp>
         <p:nvSpPr>
@@ -4359,7 +4519,7 @@
           <a:bodyPr wrap="square" rtlCol="0" anchor="ctr"/>
           <a:lstStyle/>
           <a:p>
-            <a:pPr marL="0" indent="0" algn="r">
+            <a:pPr algn="r" indent="0" marL="0">
               <a:buNone/>
             </a:pPr>
             <a:r>
@@ -4393,7 +4553,6 @@
         <a:solidFill>
           <a:srgbClr val="F0F4F8"/>
         </a:solidFill>
-        <a:effectLst/>
       </p:bgPr>
     </p:bg>
     <p:spTree>
@@ -4431,7 +4590,7 @@
           <a:bodyPr wrap="square" rtlCol="0" anchor="ctr"/>
           <a:lstStyle/>
           <a:p>
-            <a:pPr marL="0" indent="0">
+            <a:pPr indent="0" marL="0">
               <a:buNone/>
             </a:pPr>
             <a:r>
@@ -4468,13 +4627,6 @@
           </a:solidFill>
           <a:ln/>
         </p:spPr>
-        <p:txBody>
-          <a:bodyPr/>
-          <a:lstStyle/>
-          <a:p>
-            <a:endParaRPr lang="fr-FR"/>
-          </a:p>
-        </p:txBody>
       </p:sp>
       <p:sp>
         <p:nvSpPr>
@@ -4500,13 +4652,6 @@
             <a:prstDash val="solid"/>
           </a:ln>
         </p:spPr>
-        <p:txBody>
-          <a:bodyPr/>
-          <a:lstStyle/>
-          <a:p>
-            <a:endParaRPr lang="fr-FR"/>
-          </a:p>
-        </p:txBody>
       </p:sp>
       <p:sp>
         <p:nvSpPr>
@@ -4529,7 +4674,7 @@
           <a:bodyPr wrap="square" rtlCol="0" anchor="ctr"/>
           <a:lstStyle/>
           <a:p>
-            <a:pPr marL="0" indent="0">
+            <a:pPr indent="0" marL="0">
               <a:buNone/>
             </a:pPr>
             <a:r>
@@ -4541,7 +4686,7 @@
                 <a:ea typeface="Calibri" pitchFamily="34" charset="-122"/>
                 <a:cs typeface="Calibri" pitchFamily="34" charset="-120"/>
               </a:rPr>
-              <a:t>Principe</a:t>
+              <a:t>📖 Principe</a:t>
             </a:r>
             <a:endParaRPr lang="en-US" sz="1400" dirty="0"/>
           </a:p>
@@ -4568,7 +4713,7 @@
           <a:bodyPr wrap="square" rtlCol="0" anchor="t"/>
           <a:lstStyle/>
           <a:p>
-            <a:pPr marL="0" indent="0">
+            <a:pPr indent="0" marL="0">
               <a:buNone/>
             </a:pPr>
             <a:r>
@@ -4610,13 +4755,6 @@
             <a:prstDash val="solid"/>
           </a:ln>
         </p:spPr>
-        <p:txBody>
-          <a:bodyPr/>
-          <a:lstStyle/>
-          <a:p>
-            <a:endParaRPr lang="fr-FR"/>
-          </a:p>
-        </p:txBody>
       </p:sp>
       <p:sp>
         <p:nvSpPr>
@@ -4639,11 +4777,11 @@
           <a:bodyPr wrap="square" rtlCol="0" anchor="ctr"/>
           <a:lstStyle/>
           <a:p>
-            <a:pPr marL="0" indent="0">
+            <a:pPr indent="0" marL="0">
               <a:buNone/>
             </a:pPr>
             <a:r>
-              <a:rPr lang="en-US" sz="1400" b="1" dirty="0" err="1">
+              <a:rPr lang="en-US" sz="1400" b="1" dirty="0">
                 <a:solidFill>
                   <a:srgbClr val="1A2332"/>
                 </a:solidFill>
@@ -4651,7 +4789,7 @@
                 <a:ea typeface="Calibri" pitchFamily="34" charset="-122"/>
                 <a:cs typeface="Calibri" pitchFamily="34" charset="-120"/>
               </a:rPr>
-              <a:t>Résultats</a:t>
+              <a:t>📊 Résultats</a:t>
             </a:r>
             <a:endParaRPr lang="en-US" sz="1400" dirty="0"/>
           </a:p>
@@ -4772,7 +4910,7 @@
           <a:bodyPr wrap="square" rtlCol="0" anchor="ctr"/>
           <a:lstStyle/>
           <a:p>
-            <a:pPr marL="0" indent="0">
+            <a:pPr indent="0" marL="0">
               <a:buNone/>
             </a:pPr>
             <a:r>
@@ -4806,41 +4944,17 @@
         </p:nvGraphicFramePr>
         <p:xfrm>
           <a:off x="457200" y="3108960"/>
-          <a:ext cx="8229600" cy="1036320"/>
+          <a:ext cx="8229600" cy="914400"/>
         </p:xfrm>
         <a:graphic>
           <a:graphicData uri="http://schemas.openxmlformats.org/drawingml/2006/table">
             <a:tbl>
               <a:tblPr/>
               <a:tblGrid>
-                <a:gridCol w="2057400">
-                  <a:extLst>
-                    <a:ext uri="{9D8B030D-6E8A-4147-A177-3AD203B41FA5}">
-                      <a16:colId xmlns:a16="http://schemas.microsoft.com/office/drawing/2014/main" val="20000"/>
-                    </a:ext>
-                  </a:extLst>
-                </a:gridCol>
-                <a:gridCol w="2057400">
-                  <a:extLst>
-                    <a:ext uri="{9D8B030D-6E8A-4147-A177-3AD203B41FA5}">
-                      <a16:colId xmlns:a16="http://schemas.microsoft.com/office/drawing/2014/main" val="20001"/>
-                    </a:ext>
-                  </a:extLst>
-                </a:gridCol>
-                <a:gridCol w="2057400">
-                  <a:extLst>
-                    <a:ext uri="{9D8B030D-6E8A-4147-A177-3AD203B41FA5}">
-                      <a16:colId xmlns:a16="http://schemas.microsoft.com/office/drawing/2014/main" val="20002"/>
-                    </a:ext>
-                  </a:extLst>
-                </a:gridCol>
-                <a:gridCol w="2057400">
-                  <a:extLst>
-                    <a:ext uri="{9D8B030D-6E8A-4147-A177-3AD203B41FA5}">
-                      <a16:colId xmlns:a16="http://schemas.microsoft.com/office/drawing/2014/main" val="20003"/>
-                    </a:ext>
-                  </a:extLst>
-                </a:gridCol>
+                <a:gridCol w="2057400"/>
+                <a:gridCol w="2057400"/>
+                <a:gridCol w="2057400"/>
+                <a:gridCol w="2057400"/>
               </a:tblGrid>
               <a:tr h="228600">
                 <a:tc>
@@ -4848,7 +4962,7 @@
                     <a:bodyPr/>
                     <a:lstStyle/>
                     <a:p>
-                      <a:pPr marL="0" indent="0" algn="ctr">
+                      <a:pPr algn="ctr" indent="0" marL="0">
                         <a:buNone/>
                       </a:pPr>
                       <a:r>
@@ -4869,7 +4983,7 @@
                       </a:endParaRPr>
                     </a:p>
                   </a:txBody>
-                  <a:tcPr anchor="ctr">
+                  <a:tcPr marL="91440" marR="91440" marT="45720" marB="45720" anchor="ctr">
                     <a:lnL w="6350" cap="flat" cmpd="sng" algn="ctr">
                       <a:solidFill>
                         <a:srgbClr val="E0E8F0"/>
@@ -4916,7 +5030,7 @@
                     <a:bodyPr/>
                     <a:lstStyle/>
                     <a:p>
-                      <a:pPr marL="0" indent="0" algn="ctr">
+                      <a:pPr algn="ctr" indent="0" marL="0">
                         <a:buNone/>
                       </a:pPr>
                       <a:r>
@@ -4937,7 +5051,7 @@
                       </a:endParaRPr>
                     </a:p>
                   </a:txBody>
-                  <a:tcPr anchor="ctr">
+                  <a:tcPr marL="91440" marR="91440" marT="45720" marB="45720" anchor="ctr">
                     <a:lnL w="6350" cap="flat" cmpd="sng" algn="ctr">
                       <a:solidFill>
                         <a:srgbClr val="E0E8F0"/>
@@ -4984,7 +5098,7 @@
                     <a:bodyPr/>
                     <a:lstStyle/>
                     <a:p>
-                      <a:pPr marL="0" indent="0" algn="ctr">
+                      <a:pPr algn="ctr" indent="0" marL="0">
                         <a:buNone/>
                       </a:pPr>
                       <a:r>
@@ -5005,7 +5119,7 @@
                       </a:endParaRPr>
                     </a:p>
                   </a:txBody>
-                  <a:tcPr anchor="ctr">
+                  <a:tcPr marL="91440" marR="91440" marT="45720" marB="45720" anchor="ctr">
                     <a:lnL w="6350" cap="flat" cmpd="sng" algn="ctr">
                       <a:solidFill>
                         <a:srgbClr val="E0E8F0"/>
@@ -5052,7 +5166,7 @@
                     <a:bodyPr/>
                     <a:lstStyle/>
                     <a:p>
-                      <a:pPr marL="0" indent="0" algn="ctr">
+                      <a:pPr algn="ctr" indent="0" marL="0">
                         <a:buNone/>
                       </a:pPr>
                       <a:r>
@@ -5073,7 +5187,7 @@
                       </a:endParaRPr>
                     </a:p>
                   </a:txBody>
-                  <a:tcPr anchor="ctr">
+                  <a:tcPr marL="91440" marR="91440" marT="45720" marB="45720" anchor="ctr">
                     <a:lnL w="6350" cap="flat" cmpd="sng" algn="ctr">
                       <a:solidFill>
                         <a:srgbClr val="E0E8F0"/>
@@ -5115,11 +5229,6 @@
                     </a:solidFill>
                   </a:tcPr>
                 </a:tc>
-                <a:extLst>
-                  <a:ext uri="{0D108BD9-81ED-4DB2-BD59-A6C34878D82A}">
-                    <a16:rowId xmlns:a16="http://schemas.microsoft.com/office/drawing/2014/main" val="10000"/>
-                  </a:ext>
-                </a:extLst>
               </a:tr>
               <a:tr h="228600">
                 <a:tc>
@@ -5127,7 +5236,7 @@
                     <a:bodyPr/>
                     <a:lstStyle/>
                     <a:p>
-                      <a:pPr marL="0" indent="0" algn="ctr">
+                      <a:pPr algn="ctr" indent="0" marL="0">
                         <a:buNone/>
                       </a:pPr>
                       <a:r>
@@ -5148,7 +5257,7 @@
                       </a:endParaRPr>
                     </a:p>
                   </a:txBody>
-                  <a:tcPr anchor="ctr">
+                  <a:tcPr marL="91440" marR="91440" marT="45720" marB="45720" anchor="ctr">
                     <a:lnL w="6350" cap="flat" cmpd="sng" algn="ctr">
                       <a:solidFill>
                         <a:srgbClr val="E0E8F0"/>
@@ -5192,7 +5301,7 @@
                     <a:bodyPr/>
                     <a:lstStyle/>
                     <a:p>
-                      <a:pPr marL="0" indent="0" algn="ctr">
+                      <a:pPr algn="ctr" indent="0" marL="0">
                         <a:buNone/>
                       </a:pPr>
                       <a:r>
@@ -5213,7 +5322,7 @@
                       </a:endParaRPr>
                     </a:p>
                   </a:txBody>
-                  <a:tcPr anchor="ctr">
+                  <a:tcPr marL="91440" marR="91440" marT="45720" marB="45720" anchor="ctr">
                     <a:lnL w="6350" cap="flat" cmpd="sng" algn="ctr">
                       <a:solidFill>
                         <a:srgbClr val="E0E8F0"/>
@@ -5257,7 +5366,7 @@
                     <a:bodyPr/>
                     <a:lstStyle/>
                     <a:p>
-                      <a:pPr marL="0" indent="0" algn="ctr">
+                      <a:pPr algn="ctr" indent="0" marL="0">
                         <a:buNone/>
                       </a:pPr>
                       <a:r>
@@ -5278,7 +5387,7 @@
                       </a:endParaRPr>
                     </a:p>
                   </a:txBody>
-                  <a:tcPr anchor="ctr">
+                  <a:tcPr marL="91440" marR="91440" marT="45720" marB="45720" anchor="ctr">
                     <a:lnL w="6350" cap="flat" cmpd="sng" algn="ctr">
                       <a:solidFill>
                         <a:srgbClr val="E0E8F0"/>
@@ -5322,7 +5431,7 @@
                     <a:bodyPr/>
                     <a:lstStyle/>
                     <a:p>
-                      <a:pPr marL="0" indent="0" algn="ctr">
+                      <a:pPr algn="ctr" indent="0" marL="0">
                         <a:buNone/>
                       </a:pPr>
                       <a:r>
@@ -5343,7 +5452,7 @@
                       </a:endParaRPr>
                     </a:p>
                   </a:txBody>
-                  <a:tcPr anchor="ctr">
+                  <a:tcPr marL="91440" marR="91440" marT="45720" marB="45720" anchor="ctr">
                     <a:lnL w="6350" cap="flat" cmpd="sng" algn="ctr">
                       <a:solidFill>
                         <a:srgbClr val="E0E8F0"/>
@@ -5382,11 +5491,6 @@
                     </a:lnB>
                   </a:tcPr>
                 </a:tc>
-                <a:extLst>
-                  <a:ext uri="{0D108BD9-81ED-4DB2-BD59-A6C34878D82A}">
-                    <a16:rowId xmlns:a16="http://schemas.microsoft.com/office/drawing/2014/main" val="10001"/>
-                  </a:ext>
-                </a:extLst>
               </a:tr>
               <a:tr h="228600">
                 <a:tc>
@@ -5394,7 +5498,7 @@
                     <a:bodyPr/>
                     <a:lstStyle/>
                     <a:p>
-                      <a:pPr marL="0" indent="0" algn="ctr">
+                      <a:pPr algn="ctr" indent="0" marL="0">
                         <a:buNone/>
                       </a:pPr>
                       <a:r>
@@ -5415,7 +5519,7 @@
                       </a:endParaRPr>
                     </a:p>
                   </a:txBody>
-                  <a:tcPr anchor="ctr">
+                  <a:tcPr marL="91440" marR="91440" marT="45720" marB="45720" anchor="ctr">
                     <a:lnL w="6350" cap="flat" cmpd="sng" algn="ctr">
                       <a:solidFill>
                         <a:srgbClr val="E0E8F0"/>
@@ -5459,7 +5563,7 @@
                     <a:bodyPr/>
                     <a:lstStyle/>
                     <a:p>
-                      <a:pPr marL="0" indent="0" algn="ctr">
+                      <a:pPr algn="ctr" indent="0" marL="0">
                         <a:buNone/>
                       </a:pPr>
                       <a:r>
@@ -5480,7 +5584,7 @@
                       </a:endParaRPr>
                     </a:p>
                   </a:txBody>
-                  <a:tcPr anchor="ctr">
+                  <a:tcPr marL="91440" marR="91440" marT="45720" marB="45720" anchor="ctr">
                     <a:lnL w="6350" cap="flat" cmpd="sng" algn="ctr">
                       <a:solidFill>
                         <a:srgbClr val="E0E8F0"/>
@@ -5524,7 +5628,7 @@
                     <a:bodyPr/>
                     <a:lstStyle/>
                     <a:p>
-                      <a:pPr marL="0" indent="0" algn="ctr">
+                      <a:pPr algn="ctr" indent="0" marL="0">
                         <a:buNone/>
                       </a:pPr>
                       <a:r>
@@ -5545,7 +5649,7 @@
                       </a:endParaRPr>
                     </a:p>
                   </a:txBody>
-                  <a:tcPr anchor="ctr">
+                  <a:tcPr marL="91440" marR="91440" marT="45720" marB="45720" anchor="ctr">
                     <a:lnL w="6350" cap="flat" cmpd="sng" algn="ctr">
                       <a:solidFill>
                         <a:srgbClr val="E0E8F0"/>
@@ -5589,7 +5693,7 @@
                     <a:bodyPr/>
                     <a:lstStyle/>
                     <a:p>
-                      <a:pPr marL="0" indent="0" algn="ctr">
+                      <a:pPr algn="ctr" indent="0" marL="0">
                         <a:buNone/>
                       </a:pPr>
                       <a:r>
@@ -5610,7 +5714,7 @@
                       </a:endParaRPr>
                     </a:p>
                   </a:txBody>
-                  <a:tcPr anchor="ctr">
+                  <a:tcPr marL="91440" marR="91440" marT="45720" marB="45720" anchor="ctr">
                     <a:lnL w="6350" cap="flat" cmpd="sng" algn="ctr">
                       <a:solidFill>
                         <a:srgbClr val="E0E8F0"/>
@@ -5649,11 +5753,6 @@
                     </a:lnB>
                   </a:tcPr>
                 </a:tc>
-                <a:extLst>
-                  <a:ext uri="{0D108BD9-81ED-4DB2-BD59-A6C34878D82A}">
-                    <a16:rowId xmlns:a16="http://schemas.microsoft.com/office/drawing/2014/main" val="10002"/>
-                  </a:ext>
-                </a:extLst>
               </a:tr>
               <a:tr h="228600">
                 <a:tc>
@@ -5661,7 +5760,7 @@
                     <a:bodyPr/>
                     <a:lstStyle/>
                     <a:p>
-                      <a:pPr marL="0" indent="0" algn="ctr">
+                      <a:pPr algn="ctr" indent="0" marL="0">
                         <a:buNone/>
                       </a:pPr>
                       <a:r>
@@ -5682,7 +5781,7 @@
                       </a:endParaRPr>
                     </a:p>
                   </a:txBody>
-                  <a:tcPr anchor="ctr">
+                  <a:tcPr marL="91440" marR="91440" marT="45720" marB="45720" anchor="ctr">
                     <a:lnL w="6350" cap="flat" cmpd="sng" algn="ctr">
                       <a:solidFill>
                         <a:srgbClr val="E0E8F0"/>
@@ -5726,7 +5825,7 @@
                     <a:bodyPr/>
                     <a:lstStyle/>
                     <a:p>
-                      <a:pPr marL="0" indent="0" algn="ctr">
+                      <a:pPr algn="ctr" indent="0" marL="0">
                         <a:buNone/>
                       </a:pPr>
                       <a:r>
@@ -5747,7 +5846,7 @@
                       </a:endParaRPr>
                     </a:p>
                   </a:txBody>
-                  <a:tcPr anchor="ctr">
+                  <a:tcPr marL="91440" marR="91440" marT="45720" marB="45720" anchor="ctr">
                     <a:lnL w="6350" cap="flat" cmpd="sng" algn="ctr">
                       <a:solidFill>
                         <a:srgbClr val="E0E8F0"/>
@@ -5791,7 +5890,7 @@
                     <a:bodyPr/>
                     <a:lstStyle/>
                     <a:p>
-                      <a:pPr marL="0" indent="0" algn="ctr">
+                      <a:pPr algn="ctr" indent="0" marL="0">
                         <a:buNone/>
                       </a:pPr>
                       <a:r>
@@ -5812,7 +5911,7 @@
                       </a:endParaRPr>
                     </a:p>
                   </a:txBody>
-                  <a:tcPr anchor="ctr">
+                  <a:tcPr marL="91440" marR="91440" marT="45720" marB="45720" anchor="ctr">
                     <a:lnL w="6350" cap="flat" cmpd="sng" algn="ctr">
                       <a:solidFill>
                         <a:srgbClr val="E0E8F0"/>
@@ -5856,7 +5955,7 @@
                     <a:bodyPr/>
                     <a:lstStyle/>
                     <a:p>
-                      <a:pPr marL="0" indent="0" algn="ctr">
+                      <a:pPr algn="ctr" indent="0" marL="0">
                         <a:buNone/>
                       </a:pPr>
                       <a:r>
@@ -5877,7 +5976,7 @@
                       </a:endParaRPr>
                     </a:p>
                   </a:txBody>
-                  <a:tcPr anchor="ctr">
+                  <a:tcPr marL="91440" marR="91440" marT="45720" marB="45720" anchor="ctr">
                     <a:lnL w="6350" cap="flat" cmpd="sng" algn="ctr">
                       <a:solidFill>
                         <a:srgbClr val="E0E8F0"/>
@@ -5916,11 +6015,6 @@
                     </a:lnB>
                   </a:tcPr>
                 </a:tc>
-                <a:extLst>
-                  <a:ext uri="{0D108BD9-81ED-4DB2-BD59-A6C34878D82A}">
-                    <a16:rowId xmlns:a16="http://schemas.microsoft.com/office/drawing/2014/main" val="10003"/>
-                  </a:ext>
-                </a:extLst>
               </a:tr>
             </a:tbl>
           </a:graphicData>
@@ -5928,7 +6022,7 @@
       </p:graphicFrame>
       <p:sp>
         <p:nvSpPr>
-          <p:cNvPr id="11" name="Text 9"/>
+          <p:cNvPr id="12" name="Text 9"/>
           <p:cNvSpPr/>
           <p:nvPr/>
         </p:nvSpPr>
@@ -5947,7 +6041,7 @@
           <a:bodyPr wrap="square" rtlCol="0" anchor="ctr"/>
           <a:lstStyle/>
           <a:p>
-            <a:pPr marL="0" indent="0">
+            <a:pPr indent="0" marL="0">
               <a:buNone/>
             </a:pPr>
             <a:r>
@@ -5984,13 +6078,6 @@
           </a:solidFill>
           <a:ln/>
         </p:spPr>
-        <p:txBody>
-          <a:bodyPr/>
-          <a:lstStyle/>
-          <a:p>
-            <a:endParaRPr lang="fr-FR"/>
-          </a:p>
-        </p:txBody>
       </p:sp>
       <p:sp>
         <p:nvSpPr>
@@ -6013,7 +6100,7 @@
           <a:bodyPr wrap="square" rtlCol="0" anchor="ctr"/>
           <a:lstStyle/>
           <a:p>
-            <a:pPr marL="0" indent="0" algn="r">
+            <a:pPr algn="r" indent="0" marL="0">
               <a:buNone/>
             </a:pPr>
             <a:r>
@@ -6047,7 +6134,6 @@
         <a:solidFill>
           <a:srgbClr val="F0F4F8"/>
         </a:solidFill>
-        <a:effectLst/>
       </p:bgPr>
     </p:bg>
     <p:spTree>
@@ -6085,7 +6171,7 @@
           <a:bodyPr wrap="square" rtlCol="0" anchor="ctr"/>
           <a:lstStyle/>
           <a:p>
-            <a:pPr marL="0" indent="0">
+            <a:pPr indent="0" marL="0">
               <a:buNone/>
             </a:pPr>
             <a:r>
@@ -6122,13 +6208,6 @@
           </a:solidFill>
           <a:ln/>
         </p:spPr>
-        <p:txBody>
-          <a:bodyPr/>
-          <a:lstStyle/>
-          <a:p>
-            <a:endParaRPr lang="fr-FR"/>
-          </a:p>
-        </p:txBody>
       </p:sp>
       <p:sp>
         <p:nvSpPr>
@@ -6154,13 +6233,6 @@
             <a:prstDash val="solid"/>
           </a:ln>
         </p:spPr>
-        <p:txBody>
-          <a:bodyPr/>
-          <a:lstStyle/>
-          <a:p>
-            <a:endParaRPr lang="fr-FR"/>
-          </a:p>
-        </p:txBody>
       </p:sp>
       <p:sp>
         <p:nvSpPr>
@@ -6183,7 +6255,7 @@
           <a:bodyPr wrap="square" rtlCol="0" anchor="ctr"/>
           <a:lstStyle/>
           <a:p>
-            <a:pPr marL="0" indent="0">
+            <a:pPr indent="0" marL="0">
               <a:buNone/>
             </a:pPr>
             <a:r>
@@ -6195,7 +6267,7 @@
                 <a:ea typeface="Calibri" pitchFamily="34" charset="-122"/>
                 <a:cs typeface="Calibri" pitchFamily="34" charset="-120"/>
               </a:rPr>
-              <a:t>Random Forest</a:t>
+              <a:t>🌳 Random Forest</a:t>
             </a:r>
             <a:endParaRPr lang="en-US" sz="1300" dirty="0"/>
           </a:p>
@@ -6301,13 +6373,6 @@
             <a:prstDash val="solid"/>
           </a:ln>
         </p:spPr>
-        <p:txBody>
-          <a:bodyPr/>
-          <a:lstStyle/>
-          <a:p>
-            <a:endParaRPr lang="fr-FR"/>
-          </a:p>
-        </p:txBody>
       </p:sp>
       <p:sp>
         <p:nvSpPr>
@@ -6330,7 +6395,7 @@
           <a:bodyPr wrap="square" rtlCol="0" anchor="ctr"/>
           <a:lstStyle/>
           <a:p>
-            <a:pPr marL="0" indent="0">
+            <a:pPr indent="0" marL="0">
               <a:buNone/>
             </a:pPr>
             <a:r>
@@ -6342,7 +6407,7 @@
                 <a:ea typeface="Calibri" pitchFamily="34" charset="-122"/>
                 <a:cs typeface="Calibri" pitchFamily="34" charset="-120"/>
               </a:rPr>
-              <a:t>Variables clés (par importance)</a:t>
+              <a:t>🔍 Variables clés (par importance)</a:t>
             </a:r>
             <a:endParaRPr lang="en-US" sz="1200" dirty="0"/>
           </a:p>
@@ -6369,7 +6434,7 @@
           <a:bodyPr wrap="square" rtlCol="0" anchor="ctr"/>
           <a:lstStyle/>
           <a:p>
-            <a:pPr marL="0" indent="0">
+            <a:pPr indent="0" marL="0">
               <a:buNone/>
             </a:pPr>
             <a:r>
@@ -6386,7 +6451,7 @@
             <a:endParaRPr lang="en-US" sz="1150" dirty="0"/>
           </a:p>
           <a:p>
-            <a:pPr marL="0" indent="0">
+            <a:pPr indent="0" marL="0">
               <a:buNone/>
             </a:pPr>
             <a:r>
@@ -6406,14 +6471,14 @@
       </p:sp>
       <p:pic>
         <p:nvPicPr>
-          <p:cNvPr id="10" name="Image 0" descr="preencoded.png"/>
+          <p:cNvPr id="10" name="Image 0" descr="preencoded.png">    </p:cNvPr>
           <p:cNvPicPr>
             <a:picLocks noChangeAspect="1"/>
           </p:cNvPicPr>
           <p:nvPr/>
         </p:nvPicPr>
         <p:blipFill>
-          <a:blip r:embed="rId3"/>
+          <a:blip r:embed="rId1"/>
           <a:stretch>
             <a:fillRect/>
           </a:stretch>
@@ -6452,13 +6517,6 @@
             <a:prstDash val="solid"/>
           </a:ln>
         </p:spPr>
-        <p:txBody>
-          <a:bodyPr/>
-          <a:lstStyle/>
-          <a:p>
-            <a:endParaRPr lang="fr-FR"/>
-          </a:p>
-        </p:txBody>
       </p:sp>
       <p:sp>
         <p:nvSpPr>
@@ -6481,7 +6539,7 @@
           <a:bodyPr wrap="square" rtlCol="0" anchor="ctr"/>
           <a:lstStyle/>
           <a:p>
-            <a:pPr marL="0" indent="0">
+            <a:pPr indent="0" marL="0">
               <a:buNone/>
             </a:pPr>
             <a:r>
@@ -6493,7 +6551,7 @@
                 <a:ea typeface="Calibri" pitchFamily="34" charset="-122"/>
                 <a:cs typeface="Calibri" pitchFamily="34" charset="-120"/>
               </a:rPr>
-              <a:t> Les variables margin_low et length sont de loin les plus discriminantes — elles permettent à elles seules de séparer la grande majorité des vrais et faux billets.</a:t>
+              <a:t>💡 Les variables margin_low et length sont de loin les plus discriminantes — elles permettent à elles seules de séparer la grande majorité des vrais et faux billets.</a:t>
             </a:r>
             <a:endParaRPr lang="en-US" sz="1150" dirty="0"/>
           </a:p>
@@ -6518,13 +6576,6 @@
           </a:solidFill>
           <a:ln/>
         </p:spPr>
-        <p:txBody>
-          <a:bodyPr/>
-          <a:lstStyle/>
-          <a:p>
-            <a:endParaRPr lang="fr-FR"/>
-          </a:p>
-        </p:txBody>
       </p:sp>
       <p:sp>
         <p:nvSpPr>
@@ -6547,7 +6598,7 @@
           <a:bodyPr wrap="square" rtlCol="0" anchor="ctr"/>
           <a:lstStyle/>
           <a:p>
-            <a:pPr marL="0" indent="0" algn="r">
+            <a:pPr algn="r" indent="0" marL="0">
               <a:buNone/>
             </a:pPr>
             <a:r>
@@ -6581,7 +6632,6 @@
         <a:solidFill>
           <a:srgbClr val="0A1628"/>
         </a:solidFill>
-        <a:effectLst/>
       </p:bgPr>
     </p:bg>
     <p:spTree>
@@ -6619,7 +6669,7 @@
           <a:bodyPr wrap="square" rtlCol="0" anchor="ctr"/>
           <a:lstStyle/>
           <a:p>
-            <a:pPr marL="0" indent="0">
+            <a:pPr indent="0" marL="0">
               <a:buNone/>
             </a:pPr>
             <a:r>
@@ -6656,13 +6706,6 @@
           </a:solidFill>
           <a:ln/>
         </p:spPr>
-        <p:txBody>
-          <a:bodyPr/>
-          <a:lstStyle/>
-          <a:p>
-            <a:endParaRPr lang="fr-FR"/>
-          </a:p>
-        </p:txBody>
       </p:sp>
       <p:sp>
         <p:nvSpPr>
@@ -6688,13 +6731,6 @@
             <a:prstDash val="solid"/>
           </a:ln>
         </p:spPr>
-        <p:txBody>
-          <a:bodyPr/>
-          <a:lstStyle/>
-          <a:p>
-            <a:endParaRPr lang="fr-FR"/>
-          </a:p>
-        </p:txBody>
       </p:sp>
       <p:sp>
         <p:nvSpPr>
@@ -6717,7 +6753,7 @@
           <a:bodyPr wrap="square" rtlCol="0" anchor="ctr"/>
           <a:lstStyle/>
           <a:p>
-            <a:pPr marL="0" indent="0">
+            <a:pPr indent="0" marL="0">
               <a:buNone/>
             </a:pPr>
             <a:r>
@@ -6729,7 +6765,7 @@
                 <a:ea typeface="Calibri" pitchFamily="34" charset="-122"/>
                 <a:cs typeface="Calibri" pitchFamily="34" charset="-120"/>
               </a:rPr>
-              <a:t> Méthode</a:t>
+              <a:t>📖 Méthode</a:t>
             </a:r>
             <a:endParaRPr lang="en-US" sz="1300" dirty="0"/>
           </a:p>
@@ -6756,7 +6792,7 @@
           <a:bodyPr wrap="square" rtlCol="0" anchor="t"/>
           <a:lstStyle/>
           <a:p>
-            <a:pPr marL="0" indent="0">
+            <a:pPr indent="0" marL="0">
               <a:buNone/>
             </a:pPr>
             <a:r>
@@ -6798,13 +6834,6 @@
             <a:prstDash val="solid"/>
           </a:ln>
         </p:spPr>
-        <p:txBody>
-          <a:bodyPr/>
-          <a:lstStyle/>
-          <a:p>
-            <a:endParaRPr lang="fr-FR"/>
-          </a:p>
-        </p:txBody>
       </p:sp>
       <p:sp>
         <p:nvSpPr>
@@ -6827,11 +6856,11 @@
           <a:bodyPr wrap="square" rtlCol="0" anchor="ctr"/>
           <a:lstStyle/>
           <a:p>
-            <a:pPr marL="0" indent="0">
+            <a:pPr indent="0" marL="0">
               <a:buNone/>
             </a:pPr>
             <a:r>
-              <a:rPr lang="en-US" sz="1300" b="1" dirty="0" err="1">
+              <a:rPr lang="en-US" sz="1300" b="1" dirty="0">
                 <a:solidFill>
                   <a:srgbClr val="F39C12"/>
                 </a:solidFill>
@@ -6839,7 +6868,7 @@
                 <a:ea typeface="Calibri" pitchFamily="34" charset="-122"/>
                 <a:cs typeface="Calibri" pitchFamily="34" charset="-120"/>
               </a:rPr>
-              <a:t>Résultats</a:t>
+              <a:t>📊 Résultats</a:t>
             </a:r>
             <a:endParaRPr lang="en-US" sz="1300" dirty="0"/>
           </a:p>
@@ -6941,14 +6970,14 @@
       </p:sp>
       <p:pic>
         <p:nvPicPr>
-          <p:cNvPr id="10" name="Image 0" descr="preencoded.png"/>
+          <p:cNvPr id="10" name="Image 0" descr="preencoded.png">    </p:cNvPr>
           <p:cNvPicPr>
             <a:picLocks noChangeAspect="1"/>
           </p:cNvPicPr>
           <p:nvPr/>
         </p:nvPicPr>
         <p:blipFill>
-          <a:blip r:embed="rId3"/>
+          <a:blip r:embed="rId1"/>
           <a:stretch>
             <a:fillRect/>
           </a:stretch>
@@ -6982,13 +7011,6 @@
           </a:solidFill>
           <a:ln/>
         </p:spPr>
-        <p:txBody>
-          <a:bodyPr/>
-          <a:lstStyle/>
-          <a:p>
-            <a:endParaRPr lang="fr-FR"/>
-          </a:p>
-        </p:txBody>
       </p:sp>
       <p:sp>
         <p:nvSpPr>
@@ -7011,7 +7033,7 @@
           <a:bodyPr wrap="square" rtlCol="0" anchor="ctr"/>
           <a:lstStyle/>
           <a:p>
-            <a:pPr marL="0" indent="0" algn="r">
+            <a:pPr algn="r" indent="0" marL="0">
               <a:buNone/>
             </a:pPr>
             <a:r>
@@ -7045,7 +7067,6 @@
         <a:solidFill>
           <a:srgbClr val="F0F4F8"/>
         </a:solidFill>
-        <a:effectLst/>
       </p:bgPr>
     </p:bg>
     <p:spTree>
@@ -7083,7 +7104,7 @@
           <a:bodyPr wrap="square" rtlCol="0" anchor="ctr"/>
           <a:lstStyle/>
           <a:p>
-            <a:pPr marL="0" indent="0">
+            <a:pPr indent="0" marL="0">
               <a:buNone/>
             </a:pPr>
             <a:r>
@@ -7120,13 +7141,6 @@
           </a:solidFill>
           <a:ln/>
         </p:spPr>
-        <p:txBody>
-          <a:bodyPr/>
-          <a:lstStyle/>
-          <a:p>
-            <a:endParaRPr lang="fr-FR"/>
-          </a:p>
-        </p:txBody>
       </p:sp>
       <p:sp>
         <p:nvSpPr>
@@ -7149,7 +7163,7 @@
           <a:bodyPr wrap="square" rtlCol="0" anchor="ctr"/>
           <a:lstStyle/>
           <a:p>
-            <a:pPr marL="0" indent="0">
+            <a:pPr indent="0" marL="0">
               <a:buNone/>
             </a:pPr>
             <a:r>
@@ -7169,14 +7183,14 @@
       </p:sp>
       <p:pic>
         <p:nvPicPr>
-          <p:cNvPr id="5" name="Image 0" descr="preencoded.png"/>
+          <p:cNvPr id="5" name="Image 0" descr="preencoded.png">    </p:cNvPr>
           <p:cNvPicPr>
             <a:picLocks noChangeAspect="1"/>
           </p:cNvPicPr>
           <p:nvPr/>
         </p:nvPicPr>
         <p:blipFill>
-          <a:blip r:embed="rId3"/>
+          <a:blip r:embed="rId1"/>
           <a:stretch>
             <a:fillRect/>
           </a:stretch>
@@ -7215,13 +7229,6 @@
             <a:prstDash val="solid"/>
           </a:ln>
         </p:spPr>
-        <p:txBody>
-          <a:bodyPr/>
-          <a:lstStyle/>
-          <a:p>
-            <a:endParaRPr lang="fr-FR"/>
-          </a:p>
-        </p:txBody>
       </p:sp>
       <p:sp>
         <p:nvSpPr>
@@ -7244,7 +7251,7 @@
           <a:bodyPr wrap="square" rtlCol="0" anchor="ctr"/>
           <a:lstStyle/>
           <a:p>
-            <a:pPr marL="0" indent="0">
+            <a:pPr indent="0" marL="0">
               <a:buNone/>
             </a:pPr>
             <a:r>
@@ -7256,7 +7263,7 @@
                 <a:ea typeface="Calibri" pitchFamily="34" charset="-122"/>
                 <a:cs typeface="Calibri" pitchFamily="34" charset="-120"/>
               </a:rPr>
-              <a:t>Faux Négatifs (FN)</a:t>
+              <a:t>⚠️ Faux Négatifs (FN)</a:t>
             </a:r>
             <a:endParaRPr lang="en-US" sz="1300" dirty="0"/>
           </a:p>
@@ -7283,7 +7290,7 @@
           <a:bodyPr wrap="square" rtlCol="0" anchor="ctr"/>
           <a:lstStyle/>
           <a:p>
-            <a:pPr marL="0" indent="0">
+            <a:pPr indent="0" marL="0">
               <a:buNone/>
             </a:pPr>
             <a:r>
@@ -7300,7 +7307,7 @@
             <a:endParaRPr lang="en-US" sz="1100" dirty="0"/>
           </a:p>
           <a:p>
-            <a:pPr marL="0" indent="0">
+            <a:pPr indent="0" marL="0">
               <a:buNone/>
             </a:pPr>
             <a:r>
@@ -7342,13 +7349,6 @@
             <a:prstDash val="solid"/>
           </a:ln>
         </p:spPr>
-        <p:txBody>
-          <a:bodyPr/>
-          <a:lstStyle/>
-          <a:p>
-            <a:endParaRPr lang="fr-FR"/>
-          </a:p>
-        </p:txBody>
       </p:sp>
       <p:sp>
         <p:nvSpPr>
@@ -7371,7 +7371,7 @@
           <a:bodyPr wrap="square" rtlCol="0" anchor="ctr"/>
           <a:lstStyle/>
           <a:p>
-            <a:pPr marL="0" indent="0">
+            <a:pPr indent="0" marL="0">
               <a:buNone/>
             </a:pPr>
             <a:r>
@@ -7383,7 +7383,7 @@
                 <a:ea typeface="Calibri" pitchFamily="34" charset="-122"/>
                 <a:cs typeface="Calibri" pitchFamily="34" charset="-120"/>
               </a:rPr>
-              <a:t>Faux Positifs (FP)</a:t>
+              <a:t>⚠️ Faux Positifs (FP)</a:t>
             </a:r>
             <a:endParaRPr lang="en-US" sz="1300" dirty="0"/>
           </a:p>
@@ -7410,7 +7410,7 @@
           <a:bodyPr wrap="square" rtlCol="0" anchor="ctr"/>
           <a:lstStyle/>
           <a:p>
-            <a:pPr marL="0" indent="0">
+            <a:pPr indent="0" marL="0">
               <a:buNone/>
             </a:pPr>
             <a:r>
@@ -7427,7 +7427,7 @@
             <a:endParaRPr lang="en-US" sz="1100" dirty="0"/>
           </a:p>
           <a:p>
-            <a:pPr marL="0" indent="0">
+            <a:pPr indent="0" marL="0">
               <a:buNone/>
             </a:pPr>
             <a:r>
@@ -7464,13 +7464,6 @@
           </a:solidFill>
           <a:ln/>
         </p:spPr>
-        <p:txBody>
-          <a:bodyPr/>
-          <a:lstStyle/>
-          <a:p>
-            <a:endParaRPr lang="fr-FR"/>
-          </a:p>
-        </p:txBody>
       </p:sp>
       <p:sp>
         <p:nvSpPr>
@@ -7493,7 +7486,7 @@
           <a:bodyPr wrap="square" rtlCol="0" anchor="ctr"/>
           <a:lstStyle/>
           <a:p>
-            <a:pPr marL="0" indent="0" algn="r">
+            <a:pPr algn="r" indent="0" marL="0">
               <a:buNone/>
             </a:pPr>
             <a:r>
@@ -7527,7 +7520,6 @@
         <a:solidFill>
           <a:srgbClr val="F0F4F8"/>
         </a:solidFill>
-        <a:effectLst/>
       </p:bgPr>
     </p:bg>
     <p:spTree>
@@ -7565,7 +7557,7 @@
           <a:bodyPr wrap="square" rtlCol="0" anchor="ctr"/>
           <a:lstStyle/>
           <a:p>
-            <a:pPr marL="0" indent="0">
+            <a:pPr indent="0" marL="0">
               <a:buNone/>
             </a:pPr>
             <a:r>
@@ -7602,24 +7594,17 @@
           </a:solidFill>
           <a:ln/>
         </p:spPr>
-        <p:txBody>
-          <a:bodyPr/>
-          <a:lstStyle/>
-          <a:p>
-            <a:endParaRPr lang="fr-FR"/>
-          </a:p>
-        </p:txBody>
       </p:sp>
       <p:pic>
         <p:nvPicPr>
-          <p:cNvPr id="4" name="Image 0" descr="preencoded.png"/>
+          <p:cNvPr id="4" name="Image 0" descr="preencoded.png">    </p:cNvPr>
           <p:cNvPicPr>
             <a:picLocks noChangeAspect="1"/>
           </p:cNvPicPr>
           <p:nvPr/>
         </p:nvPicPr>
         <p:blipFill>
-          <a:blip r:embed="rId3"/>
+          <a:blip r:embed="rId1"/>
           <a:stretch>
             <a:fillRect/>
           </a:stretch>
@@ -7627,7 +7612,7 @@
         <p:spPr>
           <a:xfrm>
             <a:off x="91440" y="640080"/>
-            <a:ext cx="8961120" cy="2896723"/>
+            <a:ext cx="8961120" cy="3383280"/>
           </a:xfrm>
           <a:prstGeom prst="rect">
             <a:avLst/>
@@ -7643,55 +7628,25 @@
           <p:nvPr>
             <p:extLst>
               <p:ext uri="{D42A27DB-BD31-4B8C-83A1-F6EECF244321}">
-                <p14:modId xmlns:p14="http://schemas.microsoft.com/office/powerpoint/2010/main" val="790836968"/>
+                <p14:modId xmlns:p14="http://schemas.microsoft.com/office/powerpoint/2010/main" val="1579011935"/>
               </p:ext>
             </p:extLst>
           </p:nvPr>
         </p:nvGraphicFramePr>
         <p:xfrm>
-          <a:off x="403059" y="3674123"/>
-          <a:ext cx="8229600" cy="1295400"/>
+          <a:off x="457200" y="4206240"/>
+          <a:ext cx="8229600" cy="777240"/>
         </p:xfrm>
         <a:graphic>
           <a:graphicData uri="http://schemas.openxmlformats.org/drawingml/2006/table">
             <a:tbl>
               <a:tblPr/>
               <a:tblGrid>
-                <a:gridCol w="3200400">
-                  <a:extLst>
-                    <a:ext uri="{9D8B030D-6E8A-4147-A177-3AD203B41FA5}">
-                      <a16:colId xmlns:a16="http://schemas.microsoft.com/office/drawing/2014/main" val="20000"/>
-                    </a:ext>
-                  </a:extLst>
-                </a:gridCol>
-                <a:gridCol w="1371600">
-                  <a:extLst>
-                    <a:ext uri="{9D8B030D-6E8A-4147-A177-3AD203B41FA5}">
-                      <a16:colId xmlns:a16="http://schemas.microsoft.com/office/drawing/2014/main" val="20001"/>
-                    </a:ext>
-                  </a:extLst>
-                </a:gridCol>
-                <a:gridCol w="1188720">
-                  <a:extLst>
-                    <a:ext uri="{9D8B030D-6E8A-4147-A177-3AD203B41FA5}">
-                      <a16:colId xmlns:a16="http://schemas.microsoft.com/office/drawing/2014/main" val="20002"/>
-                    </a:ext>
-                  </a:extLst>
-                </a:gridCol>
-                <a:gridCol w="1188720">
-                  <a:extLst>
-                    <a:ext uri="{9D8B030D-6E8A-4147-A177-3AD203B41FA5}">
-                      <a16:colId xmlns:a16="http://schemas.microsoft.com/office/drawing/2014/main" val="20003"/>
-                    </a:ext>
-                  </a:extLst>
-                </a:gridCol>
-                <a:gridCol w="1280160">
-                  <a:extLst>
-                    <a:ext uri="{9D8B030D-6E8A-4147-A177-3AD203B41FA5}">
-                      <a16:colId xmlns:a16="http://schemas.microsoft.com/office/drawing/2014/main" val="20004"/>
-                    </a:ext>
-                  </a:extLst>
-                </a:gridCol>
+                <a:gridCol w="3200400"/>
+                <a:gridCol w="1371600"/>
+                <a:gridCol w="1188720"/>
+                <a:gridCol w="1188720"/>
+                <a:gridCol w="1280160"/>
               </a:tblGrid>
               <a:tr h="155448">
                 <a:tc>
@@ -7699,7 +7654,7 @@
                     <a:bodyPr/>
                     <a:lstStyle/>
                     <a:p>
-                      <a:pPr marL="0" indent="0" algn="ctr">
+                      <a:pPr algn="ctr" indent="0" marL="0">
                         <a:buNone/>
                       </a:pPr>
                       <a:r>
@@ -7720,7 +7675,7 @@
                       </a:endParaRPr>
                     </a:p>
                   </a:txBody>
-                  <a:tcPr anchor="ctr">
+                  <a:tcPr marL="91440" marR="91440" marT="45720" marB="45720" anchor="ctr">
                     <a:lnL w="6350" cap="flat" cmpd="sng" algn="ctr">
                       <a:solidFill>
                         <a:srgbClr val="E0E8F0"/>
@@ -7767,7 +7722,7 @@
                     <a:bodyPr/>
                     <a:lstStyle/>
                     <a:p>
-                      <a:pPr marL="0" indent="0" algn="ctr">
+                      <a:pPr algn="ctr" indent="0" marL="0">
                         <a:buNone/>
                       </a:pPr>
                       <a:r>
@@ -7788,7 +7743,7 @@
                       </a:endParaRPr>
                     </a:p>
                   </a:txBody>
-                  <a:tcPr anchor="ctr">
+                  <a:tcPr marL="91440" marR="91440" marT="45720" marB="45720" anchor="ctr">
                     <a:lnL w="6350" cap="flat" cmpd="sng" algn="ctr">
                       <a:solidFill>
                         <a:srgbClr val="E0E8F0"/>
@@ -7835,7 +7790,7 @@
                     <a:bodyPr/>
                     <a:lstStyle/>
                     <a:p>
-                      <a:pPr marL="0" indent="0" algn="ctr">
+                      <a:pPr algn="ctr" indent="0" marL="0">
                         <a:buNone/>
                       </a:pPr>
                       <a:r>
@@ -7856,7 +7811,7 @@
                       </a:endParaRPr>
                     </a:p>
                   </a:txBody>
-                  <a:tcPr anchor="ctr">
+                  <a:tcPr marL="91440" marR="91440" marT="45720" marB="45720" anchor="ctr">
                     <a:lnL w="6350" cap="flat" cmpd="sng" algn="ctr">
                       <a:solidFill>
                         <a:srgbClr val="E0E8F0"/>
@@ -7903,7 +7858,7 @@
                     <a:bodyPr/>
                     <a:lstStyle/>
                     <a:p>
-                      <a:pPr marL="0" indent="0" algn="ctr">
+                      <a:pPr algn="ctr" indent="0" marL="0">
                         <a:buNone/>
                       </a:pPr>
                       <a:r>
@@ -7924,7 +7879,7 @@
                       </a:endParaRPr>
                     </a:p>
                   </a:txBody>
-                  <a:tcPr anchor="ctr">
+                  <a:tcPr marL="91440" marR="91440" marT="45720" marB="45720" anchor="ctr">
                     <a:lnL w="6350" cap="flat" cmpd="sng" algn="ctr">
                       <a:solidFill>
                         <a:srgbClr val="E0E8F0"/>
@@ -7971,7 +7926,7 @@
                     <a:bodyPr/>
                     <a:lstStyle/>
                     <a:p>
-                      <a:pPr marL="0" indent="0" algn="ctr">
+                      <a:pPr algn="ctr" indent="0" marL="0">
                         <a:buNone/>
                       </a:pPr>
                       <a:r>
@@ -7992,7 +7947,7 @@
                       </a:endParaRPr>
                     </a:p>
                   </a:txBody>
-                  <a:tcPr anchor="ctr">
+                  <a:tcPr marL="91440" marR="91440" marT="45720" marB="45720" anchor="ctr">
                     <a:lnL w="6350" cap="flat" cmpd="sng" algn="ctr">
                       <a:solidFill>
                         <a:srgbClr val="E0E8F0"/>
@@ -8034,11 +7989,6 @@
                     </a:solidFill>
                   </a:tcPr>
                 </a:tc>
-                <a:extLst>
-                  <a:ext uri="{0D108BD9-81ED-4DB2-BD59-A6C34878D82A}">
-                    <a16:rowId xmlns:a16="http://schemas.microsoft.com/office/drawing/2014/main" val="10000"/>
-                  </a:ext>
-                </a:extLst>
               </a:tr>
               <a:tr h="155448">
                 <a:tc>
@@ -8046,7 +7996,7 @@
                     <a:bodyPr/>
                     <a:lstStyle/>
                     <a:p>
-                      <a:pPr marL="0" indent="0" algn="ctr">
+                      <a:pPr algn="ctr" indent="0" marL="0">
                         <a:buNone/>
                       </a:pPr>
                       <a:r>
@@ -8067,7 +8017,7 @@
                       </a:endParaRPr>
                     </a:p>
                   </a:txBody>
-                  <a:tcPr anchor="ctr">
+                  <a:tcPr marL="91440" marR="91440" marT="45720" marB="45720" anchor="ctr">
                     <a:lnL w="6350" cap="flat" cmpd="sng" algn="ctr">
                       <a:solidFill>
                         <a:srgbClr val="E0E8F0"/>
@@ -8111,7 +8061,7 @@
                     <a:bodyPr/>
                     <a:lstStyle/>
                     <a:p>
-                      <a:pPr marL="0" indent="0" algn="ctr">
+                      <a:pPr algn="ctr" indent="0" marL="0">
                         <a:buNone/>
                       </a:pPr>
                       <a:r>
@@ -8132,7 +8082,7 @@
                       </a:endParaRPr>
                     </a:p>
                   </a:txBody>
-                  <a:tcPr anchor="ctr">
+                  <a:tcPr marL="91440" marR="91440" marT="45720" marB="45720" anchor="ctr">
                     <a:lnL w="6350" cap="flat" cmpd="sng" algn="ctr">
                       <a:solidFill>
                         <a:srgbClr val="E0E8F0"/>
@@ -8176,7 +8126,7 @@
                     <a:bodyPr/>
                     <a:lstStyle/>
                     <a:p>
-                      <a:pPr marL="0" indent="0" algn="ctr">
+                      <a:pPr algn="ctr" indent="0" marL="0">
                         <a:buNone/>
                       </a:pPr>
                       <a:r>
@@ -8197,7 +8147,7 @@
                       </a:endParaRPr>
                     </a:p>
                   </a:txBody>
-                  <a:tcPr anchor="ctr">
+                  <a:tcPr marL="91440" marR="91440" marT="45720" marB="45720" anchor="ctr">
                     <a:lnL w="6350" cap="flat" cmpd="sng" algn="ctr">
                       <a:solidFill>
                         <a:srgbClr val="E0E8F0"/>
@@ -8241,7 +8191,7 @@
                     <a:bodyPr/>
                     <a:lstStyle/>
                     <a:p>
-                      <a:pPr marL="0" indent="0" algn="ctr">
+                      <a:pPr algn="ctr" indent="0" marL="0">
                         <a:buNone/>
                       </a:pPr>
                       <a:r>
@@ -8262,7 +8212,7 @@
                       </a:endParaRPr>
                     </a:p>
                   </a:txBody>
-                  <a:tcPr anchor="ctr">
+                  <a:tcPr marL="91440" marR="91440" marT="45720" marB="45720" anchor="ctr">
                     <a:lnL w="6350" cap="flat" cmpd="sng" algn="ctr">
                       <a:solidFill>
                         <a:srgbClr val="E0E8F0"/>
@@ -8306,7 +8256,7 @@
                     <a:bodyPr/>
                     <a:lstStyle/>
                     <a:p>
-                      <a:pPr marL="0" indent="0" algn="ctr">
+                      <a:pPr algn="ctr" indent="0" marL="0">
                         <a:buNone/>
                       </a:pPr>
                       <a:r>
@@ -8327,7 +8277,7 @@
                       </a:endParaRPr>
                     </a:p>
                   </a:txBody>
-                  <a:tcPr anchor="ctr">
+                  <a:tcPr marL="91440" marR="91440" marT="45720" marB="45720" anchor="ctr">
                     <a:lnL w="6350" cap="flat" cmpd="sng" algn="ctr">
                       <a:solidFill>
                         <a:srgbClr val="E0E8F0"/>
@@ -8366,11 +8316,6 @@
                     </a:lnB>
                   </a:tcPr>
                 </a:tc>
-                <a:extLst>
-                  <a:ext uri="{0D108BD9-81ED-4DB2-BD59-A6C34878D82A}">
-                    <a16:rowId xmlns:a16="http://schemas.microsoft.com/office/drawing/2014/main" val="10001"/>
-                  </a:ext>
-                </a:extLst>
               </a:tr>
               <a:tr h="155448">
                 <a:tc>
@@ -8378,7 +8323,7 @@
                     <a:bodyPr/>
                     <a:lstStyle/>
                     <a:p>
-                      <a:pPr marL="0" indent="0" algn="ctr">
+                      <a:pPr algn="ctr" indent="0" marL="0">
                         <a:buNone/>
                       </a:pPr>
                       <a:r>
@@ -8399,7 +8344,7 @@
                       </a:endParaRPr>
                     </a:p>
                   </a:txBody>
-                  <a:tcPr anchor="ctr">
+                  <a:tcPr marL="91440" marR="91440" marT="45720" marB="45720" anchor="ctr">
                     <a:lnL w="6350" cap="flat" cmpd="sng" algn="ctr">
                       <a:solidFill>
                         <a:srgbClr val="E0E8F0"/>
@@ -8443,7 +8388,7 @@
                     <a:bodyPr/>
                     <a:lstStyle/>
                     <a:p>
-                      <a:pPr marL="0" indent="0" algn="ctr">
+                      <a:pPr algn="ctr" indent="0" marL="0">
                         <a:buNone/>
                       </a:pPr>
                       <a:r>
@@ -8464,7 +8409,7 @@
                       </a:endParaRPr>
                     </a:p>
                   </a:txBody>
-                  <a:tcPr anchor="ctr">
+                  <a:tcPr marL="91440" marR="91440" marT="45720" marB="45720" anchor="ctr">
                     <a:lnL w="6350" cap="flat" cmpd="sng" algn="ctr">
                       <a:solidFill>
                         <a:srgbClr val="E0E8F0"/>
@@ -8508,7 +8453,7 @@
                     <a:bodyPr/>
                     <a:lstStyle/>
                     <a:p>
-                      <a:pPr marL="0" indent="0" algn="ctr">
+                      <a:pPr algn="ctr" indent="0" marL="0">
                         <a:buNone/>
                       </a:pPr>
                       <a:r>
@@ -8529,7 +8474,7 @@
                       </a:endParaRPr>
                     </a:p>
                   </a:txBody>
-                  <a:tcPr anchor="ctr">
+                  <a:tcPr marL="91440" marR="91440" marT="45720" marB="45720" anchor="ctr">
                     <a:lnL w="6350" cap="flat" cmpd="sng" algn="ctr">
                       <a:solidFill>
                         <a:srgbClr val="E0E8F0"/>
@@ -8573,7 +8518,7 @@
                     <a:bodyPr/>
                     <a:lstStyle/>
                     <a:p>
-                      <a:pPr marL="0" indent="0" algn="ctr">
+                      <a:pPr algn="ctr" indent="0" marL="0">
                         <a:buNone/>
                       </a:pPr>
                       <a:r>
@@ -8594,7 +8539,7 @@
                       </a:endParaRPr>
                     </a:p>
                   </a:txBody>
-                  <a:tcPr anchor="ctr">
+                  <a:tcPr marL="91440" marR="91440" marT="45720" marB="45720" anchor="ctr">
                     <a:lnL w="6350" cap="flat" cmpd="sng" algn="ctr">
                       <a:solidFill>
                         <a:srgbClr val="E0E8F0"/>
@@ -8638,7 +8583,7 @@
                     <a:bodyPr/>
                     <a:lstStyle/>
                     <a:p>
-                      <a:pPr marL="0" indent="0" algn="ctr">
+                      <a:pPr algn="ctr" indent="0" marL="0">
                         <a:buNone/>
                       </a:pPr>
                       <a:r>
@@ -8659,7 +8604,7 @@
                       </a:endParaRPr>
                     </a:p>
                   </a:txBody>
-                  <a:tcPr anchor="ctr">
+                  <a:tcPr marL="91440" marR="91440" marT="45720" marB="45720" anchor="ctr">
                     <a:lnL w="6350" cap="flat" cmpd="sng" algn="ctr">
                       <a:solidFill>
                         <a:srgbClr val="E0E8F0"/>
@@ -8698,11 +8643,6 @@
                     </a:lnB>
                   </a:tcPr>
                 </a:tc>
-                <a:extLst>
-                  <a:ext uri="{0D108BD9-81ED-4DB2-BD59-A6C34878D82A}">
-                    <a16:rowId xmlns:a16="http://schemas.microsoft.com/office/drawing/2014/main" val="10002"/>
-                  </a:ext>
-                </a:extLst>
               </a:tr>
               <a:tr h="155448">
                 <a:tc>
@@ -8710,7 +8650,7 @@
                     <a:bodyPr/>
                     <a:lstStyle/>
                     <a:p>
-                      <a:pPr marL="0" indent="0" algn="ctr">
+                      <a:pPr algn="ctr" indent="0" marL="0">
                         <a:buNone/>
                       </a:pPr>
                       <a:r>
@@ -8731,7 +8671,7 @@
                       </a:endParaRPr>
                     </a:p>
                   </a:txBody>
-                  <a:tcPr anchor="ctr">
+                  <a:tcPr marL="91440" marR="91440" marT="45720" marB="45720" anchor="ctr">
                     <a:lnL w="6350" cap="flat" cmpd="sng" algn="ctr">
                       <a:solidFill>
                         <a:srgbClr val="E0E8F0"/>
@@ -8775,7 +8715,7 @@
                     <a:bodyPr/>
                     <a:lstStyle/>
                     <a:p>
-                      <a:pPr marL="0" indent="0" algn="ctr">
+                      <a:pPr algn="ctr" indent="0" marL="0">
                         <a:buNone/>
                       </a:pPr>
                       <a:r>
@@ -8796,7 +8736,7 @@
                       </a:endParaRPr>
                     </a:p>
                   </a:txBody>
-                  <a:tcPr anchor="ctr">
+                  <a:tcPr marL="91440" marR="91440" marT="45720" marB="45720" anchor="ctr">
                     <a:lnL w="6350" cap="flat" cmpd="sng" algn="ctr">
                       <a:solidFill>
                         <a:srgbClr val="E0E8F0"/>
@@ -8840,7 +8780,7 @@
                     <a:bodyPr/>
                     <a:lstStyle/>
                     <a:p>
-                      <a:pPr marL="0" indent="0" algn="ctr">
+                      <a:pPr algn="ctr" indent="0" marL="0">
                         <a:buNone/>
                       </a:pPr>
                       <a:r>
@@ -8861,7 +8801,7 @@
                       </a:endParaRPr>
                     </a:p>
                   </a:txBody>
-                  <a:tcPr anchor="ctr">
+                  <a:tcPr marL="91440" marR="91440" marT="45720" marB="45720" anchor="ctr">
                     <a:lnL w="6350" cap="flat" cmpd="sng" algn="ctr">
                       <a:solidFill>
                         <a:srgbClr val="E0E8F0"/>
@@ -8905,7 +8845,7 @@
                     <a:bodyPr/>
                     <a:lstStyle/>
                     <a:p>
-                      <a:pPr marL="0" indent="0" algn="ctr">
+                      <a:pPr algn="ctr" indent="0" marL="0">
                         <a:buNone/>
                       </a:pPr>
                       <a:r>
@@ -8926,7 +8866,7 @@
                       </a:endParaRPr>
                     </a:p>
                   </a:txBody>
-                  <a:tcPr anchor="ctr">
+                  <a:tcPr marL="91440" marR="91440" marT="45720" marB="45720" anchor="ctr">
                     <a:lnL w="6350" cap="flat" cmpd="sng" algn="ctr">
                       <a:solidFill>
                         <a:srgbClr val="E0E8F0"/>
@@ -8970,7 +8910,7 @@
                     <a:bodyPr/>
                     <a:lstStyle/>
                     <a:p>
-                      <a:pPr marL="0" indent="0" algn="ctr">
+                      <a:pPr algn="ctr" indent="0" marL="0">
                         <a:buNone/>
                       </a:pPr>
                       <a:r>
@@ -8991,7 +8931,7 @@
                       </a:endParaRPr>
                     </a:p>
                   </a:txBody>
-                  <a:tcPr anchor="ctr">
+                  <a:tcPr marL="91440" marR="91440" marT="45720" marB="45720" anchor="ctr">
                     <a:lnL w="6350" cap="flat" cmpd="sng" algn="ctr">
                       <a:solidFill>
                         <a:srgbClr val="E0E8F0"/>
@@ -9030,11 +8970,6 @@
                     </a:lnB>
                   </a:tcPr>
                 </a:tc>
-                <a:extLst>
-                  <a:ext uri="{0D108BD9-81ED-4DB2-BD59-A6C34878D82A}">
-                    <a16:rowId xmlns:a16="http://schemas.microsoft.com/office/drawing/2014/main" val="10003"/>
-                  </a:ext>
-                </a:extLst>
               </a:tr>
               <a:tr h="155448">
                 <a:tc>
@@ -9042,7 +8977,7 @@
                     <a:bodyPr/>
                     <a:lstStyle/>
                     <a:p>
-                      <a:pPr marL="0" indent="0" algn="ctr">
+                      <a:pPr algn="ctr" indent="0" marL="0">
                         <a:buNone/>
                       </a:pPr>
                       <a:r>
@@ -9063,7 +8998,7 @@
                       </a:endParaRPr>
                     </a:p>
                   </a:txBody>
-                  <a:tcPr anchor="ctr">
+                  <a:tcPr marL="91440" marR="91440" marT="45720" marB="45720" anchor="ctr">
                     <a:lnL w="6350" cap="flat" cmpd="sng" algn="ctr">
                       <a:solidFill>
                         <a:srgbClr val="E0E8F0"/>
@@ -9107,7 +9042,7 @@
                     <a:bodyPr/>
                     <a:lstStyle/>
                     <a:p>
-                      <a:pPr marL="0" indent="0" algn="ctr">
+                      <a:pPr algn="ctr" indent="0" marL="0">
                         <a:buNone/>
                       </a:pPr>
                       <a:r>
@@ -9128,7 +9063,7 @@
                       </a:endParaRPr>
                     </a:p>
                   </a:txBody>
-                  <a:tcPr anchor="ctr">
+                  <a:tcPr marL="91440" marR="91440" marT="45720" marB="45720" anchor="ctr">
                     <a:lnL w="6350" cap="flat" cmpd="sng" algn="ctr">
                       <a:solidFill>
                         <a:srgbClr val="E0E8F0"/>
@@ -9172,7 +9107,7 @@
                     <a:bodyPr/>
                     <a:lstStyle/>
                     <a:p>
-                      <a:pPr marL="0" indent="0" algn="ctr">
+                      <a:pPr algn="ctr" indent="0" marL="0">
                         <a:buNone/>
                       </a:pPr>
                       <a:r>
@@ -9193,7 +9128,7 @@
                       </a:endParaRPr>
                     </a:p>
                   </a:txBody>
-                  <a:tcPr anchor="ctr">
+                  <a:tcPr marL="91440" marR="91440" marT="45720" marB="45720" anchor="ctr">
                     <a:lnL w="6350" cap="flat" cmpd="sng" algn="ctr">
                       <a:solidFill>
                         <a:srgbClr val="E0E8F0"/>
@@ -9237,7 +9172,7 @@
                     <a:bodyPr/>
                     <a:lstStyle/>
                     <a:p>
-                      <a:pPr marL="0" indent="0" algn="ctr">
+                      <a:pPr algn="ctr" indent="0" marL="0">
                         <a:buNone/>
                       </a:pPr>
                       <a:r>
@@ -9258,7 +9193,7 @@
                       </a:endParaRPr>
                     </a:p>
                   </a:txBody>
-                  <a:tcPr anchor="ctr">
+                  <a:tcPr marL="91440" marR="91440" marT="45720" marB="45720" anchor="ctr">
                     <a:lnL w="6350" cap="flat" cmpd="sng" algn="ctr">
                       <a:solidFill>
                         <a:srgbClr val="E0E8F0"/>
@@ -9302,7 +9237,7 @@
                     <a:bodyPr/>
                     <a:lstStyle/>
                     <a:p>
-                      <a:pPr marL="0" indent="0" algn="ctr">
+                      <a:pPr algn="ctr" indent="0" marL="0">
                         <a:buNone/>
                       </a:pPr>
                       <a:r>
@@ -9323,7 +9258,7 @@
                       </a:endParaRPr>
                     </a:p>
                   </a:txBody>
-                  <a:tcPr anchor="ctr">
+                  <a:tcPr marL="91440" marR="91440" marT="45720" marB="45720" anchor="ctr">
                     <a:lnL w="6350" cap="flat" cmpd="sng" algn="ctr">
                       <a:solidFill>
                         <a:srgbClr val="E0E8F0"/>
@@ -9362,11 +9297,6 @@
                     </a:lnB>
                   </a:tcPr>
                 </a:tc>
-                <a:extLst>
-                  <a:ext uri="{0D108BD9-81ED-4DB2-BD59-A6C34878D82A}">
-                    <a16:rowId xmlns:a16="http://schemas.microsoft.com/office/drawing/2014/main" val="10004"/>
-                  </a:ext>
-                </a:extLst>
               </a:tr>
             </a:tbl>
           </a:graphicData>
@@ -9391,13 +9321,6 @@
           </a:solidFill>
           <a:ln/>
         </p:spPr>
-        <p:txBody>
-          <a:bodyPr/>
-          <a:lstStyle/>
-          <a:p>
-            <a:endParaRPr lang="fr-FR"/>
-          </a:p>
-        </p:txBody>
       </p:sp>
       <p:sp>
         <p:nvSpPr>
@@ -9420,7 +9343,7 @@
           <a:bodyPr wrap="square" rtlCol="0" anchor="ctr"/>
           <a:lstStyle/>
           <a:p>
-            <a:pPr marL="0" indent="0" algn="r">
+            <a:pPr algn="r" indent="0" marL="0">
               <a:buNone/>
             </a:pPr>
             <a:r>
@@ -9454,7 +9377,6 @@
         <a:solidFill>
           <a:srgbClr val="0A1628"/>
         </a:solidFill>
-        <a:effectLst/>
       </p:bgPr>
     </p:bg>
     <p:spTree>
@@ -9492,7 +9414,7 @@
           <a:bodyPr wrap="square" rtlCol="0" anchor="ctr"/>
           <a:lstStyle/>
           <a:p>
-            <a:pPr marL="0" indent="0">
+            <a:pPr indent="0" marL="0">
               <a:buNone/>
             </a:pPr>
             <a:r>
@@ -9529,13 +9451,6 @@
           </a:solidFill>
           <a:ln/>
         </p:spPr>
-        <p:txBody>
-          <a:bodyPr/>
-          <a:lstStyle/>
-          <a:p>
-            <a:endParaRPr lang="fr-FR"/>
-          </a:p>
-        </p:txBody>
       </p:sp>
       <p:sp>
         <p:nvSpPr>
@@ -9561,13 +9476,6 @@
             <a:prstDash val="solid"/>
           </a:ln>
         </p:spPr>
-        <p:txBody>
-          <a:bodyPr/>
-          <a:lstStyle/>
-          <a:p>
-            <a:endParaRPr lang="fr-FR"/>
-          </a:p>
-        </p:txBody>
       </p:sp>
       <p:sp>
         <p:nvSpPr>
@@ -9590,7 +9498,7 @@
           <a:bodyPr wrap="square" rtlCol="0" anchor="ctr"/>
           <a:lstStyle/>
           <a:p>
-            <a:pPr marL="0" indent="0">
+            <a:pPr indent="0" marL="0">
               <a:buNone/>
             </a:pPr>
             <a:r>
@@ -9602,7 +9510,7 @@
                 <a:ea typeface="Calibri" pitchFamily="34" charset="-122"/>
                 <a:cs typeface="Calibri" pitchFamily="34" charset="-120"/>
               </a:rPr>
-              <a:t>Mode fichier CSV</a:t>
+              <a:t>📁 Mode fichier CSV</a:t>
             </a:r>
             <a:endParaRPr lang="en-US" sz="1400" dirty="0"/>
           </a:p>
@@ -9629,7 +9537,7 @@
           <a:bodyPr wrap="square" rtlCol="0" anchor="ctr"/>
           <a:lstStyle/>
           <a:p>
-            <a:pPr marL="0" indent="0">
+            <a:pPr indent="0" marL="0">
               <a:buNone/>
             </a:pPr>
             <a:r>
@@ -9668,7 +9576,7 @@
           <a:bodyPr wrap="square" rtlCol="0" anchor="t"/>
           <a:lstStyle/>
           <a:p>
-            <a:pPr marL="0" indent="0">
+            <a:pPr indent="0" marL="0">
               <a:buNone/>
             </a:pPr>
             <a:r>
@@ -9710,13 +9618,6 @@
             <a:prstDash val="solid"/>
           </a:ln>
         </p:spPr>
-        <p:txBody>
-          <a:bodyPr/>
-          <a:lstStyle/>
-          <a:p>
-            <a:endParaRPr lang="fr-FR"/>
-          </a:p>
-        </p:txBody>
       </p:sp>
       <p:sp>
         <p:nvSpPr>
@@ -9739,7 +9640,7 @@
           <a:bodyPr wrap="square" rtlCol="0" anchor="ctr"/>
           <a:lstStyle/>
           <a:p>
-            <a:pPr marL="0" indent="0">
+            <a:pPr indent="0" marL="0">
               <a:buNone/>
             </a:pPr>
             <a:r>
@@ -9751,7 +9652,7 @@
                 <a:ea typeface="Calibri" pitchFamily="34" charset="-122"/>
                 <a:cs typeface="Calibri" pitchFamily="34" charset="-120"/>
               </a:rPr>
-              <a:t>Mode manuel</a:t>
+              <a:t>⌨️ Mode manuel</a:t>
             </a:r>
             <a:endParaRPr lang="en-US" sz="1400" dirty="0"/>
           </a:p>
@@ -9778,7 +9679,7 @@
           <a:bodyPr wrap="square" rtlCol="0" anchor="ctr"/>
           <a:lstStyle/>
           <a:p>
-            <a:pPr marL="0" indent="0">
+            <a:pPr indent="0" marL="0">
               <a:buNone/>
             </a:pPr>
             <a:r>
@@ -9817,7 +9718,7 @@
           <a:bodyPr wrap="square" rtlCol="0" anchor="t"/>
           <a:lstStyle/>
           <a:p>
-            <a:pPr marL="0" indent="0">
+            <a:pPr indent="0" marL="0">
               <a:buNone/>
             </a:pPr>
             <a:r>
@@ -9856,7 +9757,7 @@
           <a:bodyPr wrap="square" rtlCol="0" anchor="ctr"/>
           <a:lstStyle/>
           <a:p>
-            <a:pPr marL="0" indent="0">
+            <a:pPr indent="0" marL="0">
               <a:buNone/>
             </a:pPr>
             <a:r>
@@ -9883,76 +9784,28 @@
           <p:nvPr>
             <p:extLst>
               <p:ext uri="{D42A27DB-BD31-4B8C-83A1-F6EECF244321}">
-                <p14:modId xmlns:p14="http://schemas.microsoft.com/office/powerpoint/2010/main" val="446778771"/>
+                <p14:modId xmlns:p14="http://schemas.microsoft.com/office/powerpoint/2010/main" val="1579011935"/>
               </p:ext>
             </p:extLst>
           </p:nvPr>
         </p:nvGraphicFramePr>
         <p:xfrm>
           <a:off x="274320" y="3383280"/>
-          <a:ext cx="8412480" cy="960120"/>
+          <a:ext cx="8595360" cy="960120"/>
         </p:xfrm>
         <a:graphic>
           <a:graphicData uri="http://schemas.openxmlformats.org/drawingml/2006/table">
             <a:tbl>
               <a:tblPr/>
               <a:tblGrid>
-                <a:gridCol w="1051560">
-                  <a:extLst>
-                    <a:ext uri="{9D8B030D-6E8A-4147-A177-3AD203B41FA5}">
-                      <a16:colId xmlns:a16="http://schemas.microsoft.com/office/drawing/2014/main" val="20000"/>
-                    </a:ext>
-                  </a:extLst>
-                </a:gridCol>
-                <a:gridCol w="1051560">
-                  <a:extLst>
-                    <a:ext uri="{9D8B030D-6E8A-4147-A177-3AD203B41FA5}">
-                      <a16:colId xmlns:a16="http://schemas.microsoft.com/office/drawing/2014/main" val="20001"/>
-                    </a:ext>
-                  </a:extLst>
-                </a:gridCol>
-                <a:gridCol w="1051560">
-                  <a:extLst>
-                    <a:ext uri="{9D8B030D-6E8A-4147-A177-3AD203B41FA5}">
-                      <a16:colId xmlns:a16="http://schemas.microsoft.com/office/drawing/2014/main" val="20002"/>
-                    </a:ext>
-                  </a:extLst>
-                </a:gridCol>
-                <a:gridCol w="1051560">
-                  <a:extLst>
-                    <a:ext uri="{9D8B030D-6E8A-4147-A177-3AD203B41FA5}">
-                      <a16:colId xmlns:a16="http://schemas.microsoft.com/office/drawing/2014/main" val="20003"/>
-                    </a:ext>
-                  </a:extLst>
-                </a:gridCol>
-                <a:gridCol w="1051560">
-                  <a:extLst>
-                    <a:ext uri="{9D8B030D-6E8A-4147-A177-3AD203B41FA5}">
-                      <a16:colId xmlns:a16="http://schemas.microsoft.com/office/drawing/2014/main" val="20004"/>
-                    </a:ext>
-                  </a:extLst>
-                </a:gridCol>
-                <a:gridCol w="1051560">
-                  <a:extLst>
-                    <a:ext uri="{9D8B030D-6E8A-4147-A177-3AD203B41FA5}">
-                      <a16:colId xmlns:a16="http://schemas.microsoft.com/office/drawing/2014/main" val="20005"/>
-                    </a:ext>
-                  </a:extLst>
-                </a:gridCol>
-                <a:gridCol w="1051560">
-                  <a:extLst>
-                    <a:ext uri="{9D8B030D-6E8A-4147-A177-3AD203B41FA5}">
-                      <a16:colId xmlns:a16="http://schemas.microsoft.com/office/drawing/2014/main" val="20006"/>
-                    </a:ext>
-                  </a:extLst>
-                </a:gridCol>
-                <a:gridCol w="1051560">
-                  <a:extLst>
-                    <a:ext uri="{9D8B030D-6E8A-4147-A177-3AD203B41FA5}">
-                      <a16:colId xmlns:a16="http://schemas.microsoft.com/office/drawing/2014/main" val="20007"/>
-                    </a:ext>
-                  </a:extLst>
-                </a:gridCol>
+                <a:gridCol w="1051560"/>
+                <a:gridCol w="1051560"/>
+                <a:gridCol w="1051560"/>
+                <a:gridCol w="1051560"/>
+                <a:gridCol w="1051560"/>
+                <a:gridCol w="1051560"/>
+                <a:gridCol w="1051560"/>
+                <a:gridCol w="1051560"/>
               </a:tblGrid>
               <a:tr h="240030">
                 <a:tc>
@@ -9960,7 +9813,7 @@
                     <a:bodyPr/>
                     <a:lstStyle/>
                     <a:p>
-                      <a:pPr marL="0" indent="0" algn="ctr">
+                      <a:pPr algn="ctr" indent="0" marL="0">
                         <a:buNone/>
                       </a:pPr>
                       <a:r>
@@ -9981,7 +9834,7 @@
                       </a:endParaRPr>
                     </a:p>
                   </a:txBody>
-                  <a:tcPr anchor="ctr">
+                  <a:tcPr marL="91440" marR="91440" marT="45720" marB="45720" anchor="ctr">
                     <a:lnL w="6350" cap="flat" cmpd="sng" algn="ctr">
                       <a:solidFill>
                         <a:srgbClr val="2A4A6B"/>
@@ -10028,7 +9881,7 @@
                     <a:bodyPr/>
                     <a:lstStyle/>
                     <a:p>
-                      <a:pPr marL="0" indent="0" algn="ctr">
+                      <a:pPr algn="ctr" indent="0" marL="0">
                         <a:buNone/>
                       </a:pPr>
                       <a:r>
@@ -10049,7 +9902,7 @@
                       </a:endParaRPr>
                     </a:p>
                   </a:txBody>
-                  <a:tcPr anchor="ctr">
+                  <a:tcPr marL="91440" marR="91440" marT="45720" marB="45720" anchor="ctr">
                     <a:lnL w="6350" cap="flat" cmpd="sng" algn="ctr">
                       <a:solidFill>
                         <a:srgbClr val="2A4A6B"/>
@@ -10096,7 +9949,7 @@
                     <a:bodyPr/>
                     <a:lstStyle/>
                     <a:p>
-                      <a:pPr marL="0" indent="0" algn="ctr">
+                      <a:pPr algn="ctr" indent="0" marL="0">
                         <a:buNone/>
                       </a:pPr>
                       <a:r>
@@ -10117,7 +9970,7 @@
                       </a:endParaRPr>
                     </a:p>
                   </a:txBody>
-                  <a:tcPr anchor="ctr">
+                  <a:tcPr marL="91440" marR="91440" marT="45720" marB="45720" anchor="ctr">
                     <a:lnL w="6350" cap="flat" cmpd="sng" algn="ctr">
                       <a:solidFill>
                         <a:srgbClr val="2A4A6B"/>
@@ -10164,7 +10017,7 @@
                     <a:bodyPr/>
                     <a:lstStyle/>
                     <a:p>
-                      <a:pPr marL="0" indent="0" algn="ctr">
+                      <a:pPr algn="ctr" indent="0" marL="0">
                         <a:buNone/>
                       </a:pPr>
                       <a:r>
@@ -10185,7 +10038,7 @@
                       </a:endParaRPr>
                     </a:p>
                   </a:txBody>
-                  <a:tcPr anchor="ctr">
+                  <a:tcPr marL="91440" marR="91440" marT="45720" marB="45720" anchor="ctr">
                     <a:lnL w="6350" cap="flat" cmpd="sng" algn="ctr">
                       <a:solidFill>
                         <a:srgbClr val="2A4A6B"/>
@@ -10232,7 +10085,7 @@
                     <a:bodyPr/>
                     <a:lstStyle/>
                     <a:p>
-                      <a:pPr marL="0" indent="0" algn="ctr">
+                      <a:pPr algn="ctr" indent="0" marL="0">
                         <a:buNone/>
                       </a:pPr>
                       <a:r>
@@ -10253,7 +10106,7 @@
                       </a:endParaRPr>
                     </a:p>
                   </a:txBody>
-                  <a:tcPr anchor="ctr">
+                  <a:tcPr marL="91440" marR="91440" marT="45720" marB="45720" anchor="ctr">
                     <a:lnL w="6350" cap="flat" cmpd="sng" algn="ctr">
                       <a:solidFill>
                         <a:srgbClr val="2A4A6B"/>
@@ -10300,7 +10153,7 @@
                     <a:bodyPr/>
                     <a:lstStyle/>
                     <a:p>
-                      <a:pPr marL="0" indent="0" algn="ctr">
+                      <a:pPr algn="ctr" indent="0" marL="0">
                         <a:buNone/>
                       </a:pPr>
                       <a:r>
@@ -10321,7 +10174,7 @@
                       </a:endParaRPr>
                     </a:p>
                   </a:txBody>
-                  <a:tcPr anchor="ctr">
+                  <a:tcPr marL="91440" marR="91440" marT="45720" marB="45720" anchor="ctr">
                     <a:lnL w="6350" cap="flat" cmpd="sng" algn="ctr">
                       <a:solidFill>
                         <a:srgbClr val="2A4A6B"/>
@@ -10368,7 +10221,7 @@
                     <a:bodyPr/>
                     <a:lstStyle/>
                     <a:p>
-                      <a:pPr marL="0" indent="0" algn="ctr">
+                      <a:pPr algn="ctr" indent="0" marL="0">
                         <a:buNone/>
                       </a:pPr>
                       <a:r>
@@ -10389,7 +10242,7 @@
                       </a:endParaRPr>
                     </a:p>
                   </a:txBody>
-                  <a:tcPr anchor="ctr">
+                  <a:tcPr marL="91440" marR="91440" marT="45720" marB="45720" anchor="ctr">
                     <a:lnL w="6350" cap="flat" cmpd="sng" algn="ctr">
                       <a:solidFill>
                         <a:srgbClr val="2A4A6B"/>
@@ -10436,7 +10289,7 @@
                     <a:bodyPr/>
                     <a:lstStyle/>
                     <a:p>
-                      <a:pPr marL="0" indent="0" algn="ctr">
+                      <a:pPr algn="ctr" indent="0" marL="0">
                         <a:buNone/>
                       </a:pPr>
                       <a:r>
@@ -10457,7 +10310,7 @@
                       </a:endParaRPr>
                     </a:p>
                   </a:txBody>
-                  <a:tcPr anchor="ctr">
+                  <a:tcPr marL="91440" marR="91440" marT="45720" marB="45720" anchor="ctr">
                     <a:lnL w="6350" cap="flat" cmpd="sng" algn="ctr">
                       <a:solidFill>
                         <a:srgbClr val="2A4A6B"/>
@@ -10499,11 +10352,6 @@
                     </a:solidFill>
                   </a:tcPr>
                 </a:tc>
-                <a:extLst>
-                  <a:ext uri="{0D108BD9-81ED-4DB2-BD59-A6C34878D82A}">
-                    <a16:rowId xmlns:a16="http://schemas.microsoft.com/office/drawing/2014/main" val="10000"/>
-                  </a:ext>
-                </a:extLst>
               </a:tr>
               <a:tr h="240030">
                 <a:tc>
@@ -10511,13 +10359,13 @@
                     <a:bodyPr/>
                     <a:lstStyle/>
                     <a:p>
-                      <a:pPr marL="0" indent="0" algn="ctr">
+                      <a:pPr algn="ctr" indent="0" marL="0">
                         <a:buNone/>
                       </a:pPr>
                       <a:r>
                         <a:rPr lang="en-US" sz="900" dirty="0">
                           <a:solidFill>
-                            <a:schemeClr val="bg2"/>
+                            <a:srgbClr val="000000"/>
                           </a:solidFill>
                           <a:latin typeface="Calibri" pitchFamily="34" charset="0"/>
                           <a:ea typeface="Calibri" pitchFamily="34" charset="-122"/>
@@ -10526,16 +10374,13 @@
                         <a:t>171.81</a:t>
                       </a:r>
                       <a:endParaRPr lang="en-US" sz="900" dirty="0">
-                        <a:solidFill>
-                          <a:schemeClr val="bg2"/>
-                        </a:solidFill>
                         <a:latin typeface="Calibri" charset="0"/>
                         <a:ea typeface="Calibri" charset="0"/>
                         <a:cs typeface="Calibri" charset="0"/>
                       </a:endParaRPr>
                     </a:p>
                   </a:txBody>
-                  <a:tcPr anchor="ctr">
+                  <a:tcPr marL="91440" marR="91440" marT="45720" marB="45720" anchor="ctr">
                     <a:lnL w="6350" cap="flat" cmpd="sng" algn="ctr">
                       <a:solidFill>
                         <a:srgbClr val="2A4A6B"/>
@@ -10579,13 +10424,13 @@
                     <a:bodyPr/>
                     <a:lstStyle/>
                     <a:p>
-                      <a:pPr marL="0" indent="0" algn="ctr">
+                      <a:pPr algn="ctr" indent="0" marL="0">
                         <a:buNone/>
                       </a:pPr>
                       <a:r>
                         <a:rPr lang="en-US" sz="900" dirty="0">
                           <a:solidFill>
-                            <a:schemeClr val="bg2"/>
+                            <a:srgbClr val="000000"/>
                           </a:solidFill>
                           <a:latin typeface="Calibri" pitchFamily="34" charset="0"/>
                           <a:ea typeface="Calibri" pitchFamily="34" charset="-122"/>
@@ -10594,16 +10439,13 @@
                         <a:t>104.86</a:t>
                       </a:r>
                       <a:endParaRPr lang="en-US" sz="900" dirty="0">
-                        <a:solidFill>
-                          <a:schemeClr val="bg2"/>
-                        </a:solidFill>
                         <a:latin typeface="Calibri" charset="0"/>
                         <a:ea typeface="Calibri" charset="0"/>
                         <a:cs typeface="Calibri" charset="0"/>
                       </a:endParaRPr>
                     </a:p>
                   </a:txBody>
-                  <a:tcPr anchor="ctr">
+                  <a:tcPr marL="91440" marR="91440" marT="45720" marB="45720" anchor="ctr">
                     <a:lnL w="6350" cap="flat" cmpd="sng" algn="ctr">
                       <a:solidFill>
                         <a:srgbClr val="2A4A6B"/>
@@ -10647,13 +10489,13 @@
                     <a:bodyPr/>
                     <a:lstStyle/>
                     <a:p>
-                      <a:pPr marL="0" indent="0" algn="ctr">
+                      <a:pPr algn="ctr" indent="0" marL="0">
                         <a:buNone/>
                       </a:pPr>
                       <a:r>
                         <a:rPr lang="en-US" sz="900" dirty="0">
                           <a:solidFill>
-                            <a:schemeClr val="bg2"/>
+                            <a:srgbClr val="000000"/>
                           </a:solidFill>
                           <a:latin typeface="Calibri" pitchFamily="34" charset="0"/>
                           <a:ea typeface="Calibri" pitchFamily="34" charset="-122"/>
@@ -10662,16 +10504,13 @@
                         <a:t>104.95</a:t>
                       </a:r>
                       <a:endParaRPr lang="en-US" sz="900" dirty="0">
-                        <a:solidFill>
-                          <a:schemeClr val="bg2"/>
-                        </a:solidFill>
                         <a:latin typeface="Calibri" charset="0"/>
                         <a:ea typeface="Calibri" charset="0"/>
                         <a:cs typeface="Calibri" charset="0"/>
                       </a:endParaRPr>
                     </a:p>
                   </a:txBody>
-                  <a:tcPr anchor="ctr">
+                  <a:tcPr marL="91440" marR="91440" marT="45720" marB="45720" anchor="ctr">
                     <a:lnL w="6350" cap="flat" cmpd="sng" algn="ctr">
                       <a:solidFill>
                         <a:srgbClr val="2A4A6B"/>
@@ -10715,13 +10554,13 @@
                     <a:bodyPr/>
                     <a:lstStyle/>
                     <a:p>
-                      <a:pPr marL="0" indent="0" algn="ctr">
+                      <a:pPr algn="ctr" indent="0" marL="0">
                         <a:buNone/>
                       </a:pPr>
                       <a:r>
                         <a:rPr lang="en-US" sz="900" dirty="0">
                           <a:solidFill>
-                            <a:schemeClr val="bg2"/>
+                            <a:srgbClr val="000000"/>
                           </a:solidFill>
                           <a:latin typeface="Calibri" pitchFamily="34" charset="0"/>
                           <a:ea typeface="Calibri" pitchFamily="34" charset="-122"/>
@@ -10730,16 +10569,13 @@
                         <a:t>4.52</a:t>
                       </a:r>
                       <a:endParaRPr lang="en-US" sz="900" dirty="0">
-                        <a:solidFill>
-                          <a:schemeClr val="bg2"/>
-                        </a:solidFill>
                         <a:latin typeface="Calibri" charset="0"/>
                         <a:ea typeface="Calibri" charset="0"/>
                         <a:cs typeface="Calibri" charset="0"/>
                       </a:endParaRPr>
                     </a:p>
                   </a:txBody>
-                  <a:tcPr anchor="ctr">
+                  <a:tcPr marL="91440" marR="91440" marT="45720" marB="45720" anchor="ctr">
                     <a:lnL w="6350" cap="flat" cmpd="sng" algn="ctr">
                       <a:solidFill>
                         <a:srgbClr val="2A4A6B"/>
@@ -10783,13 +10619,13 @@
                     <a:bodyPr/>
                     <a:lstStyle/>
                     <a:p>
-                      <a:pPr marL="0" indent="0" algn="ctr">
+                      <a:pPr algn="ctr" indent="0" marL="0">
                         <a:buNone/>
                       </a:pPr>
                       <a:r>
                         <a:rPr lang="en-US" sz="900" dirty="0">
                           <a:solidFill>
-                            <a:schemeClr val="bg2"/>
+                            <a:srgbClr val="000000"/>
                           </a:solidFill>
                           <a:latin typeface="Calibri" pitchFamily="34" charset="0"/>
                           <a:ea typeface="Calibri" pitchFamily="34" charset="-122"/>
@@ -10798,16 +10634,13 @@
                         <a:t>2.89</a:t>
                       </a:r>
                       <a:endParaRPr lang="en-US" sz="900" dirty="0">
-                        <a:solidFill>
-                          <a:schemeClr val="bg2"/>
-                        </a:solidFill>
                         <a:latin typeface="Calibri" charset="0"/>
                         <a:ea typeface="Calibri" charset="0"/>
                         <a:cs typeface="Calibri" charset="0"/>
                       </a:endParaRPr>
                     </a:p>
                   </a:txBody>
-                  <a:tcPr anchor="ctr">
+                  <a:tcPr marL="91440" marR="91440" marT="45720" marB="45720" anchor="ctr">
                     <a:lnL w="6350" cap="flat" cmpd="sng" algn="ctr">
                       <a:solidFill>
                         <a:srgbClr val="2A4A6B"/>
@@ -10851,13 +10684,13 @@
                     <a:bodyPr/>
                     <a:lstStyle/>
                     <a:p>
-                      <a:pPr marL="0" indent="0" algn="ctr">
+                      <a:pPr algn="ctr" indent="0" marL="0">
                         <a:buNone/>
                       </a:pPr>
                       <a:r>
                         <a:rPr lang="en-US" sz="900" dirty="0">
                           <a:solidFill>
-                            <a:schemeClr val="bg2"/>
+                            <a:srgbClr val="000000"/>
                           </a:solidFill>
                           <a:latin typeface="Calibri" pitchFamily="34" charset="0"/>
                           <a:ea typeface="Calibri" pitchFamily="34" charset="-122"/>
@@ -10866,16 +10699,13 @@
                         <a:t>112.83</a:t>
                       </a:r>
                       <a:endParaRPr lang="en-US" sz="900" dirty="0">
-                        <a:solidFill>
-                          <a:schemeClr val="bg2"/>
-                        </a:solidFill>
                         <a:latin typeface="Calibri" charset="0"/>
                         <a:ea typeface="Calibri" charset="0"/>
                         <a:cs typeface="Calibri" charset="0"/>
                       </a:endParaRPr>
                     </a:p>
                   </a:txBody>
-                  <a:tcPr anchor="ctr">
+                  <a:tcPr marL="91440" marR="91440" marT="45720" marB="45720" anchor="ctr">
                     <a:lnL w="6350" cap="flat" cmpd="sng" algn="ctr">
                       <a:solidFill>
                         <a:srgbClr val="2A4A6B"/>
@@ -10919,42 +10749,28 @@
                     <a:bodyPr/>
                     <a:lstStyle/>
                     <a:p>
-                      <a:pPr marL="0" indent="0" algn="ctr">
+                      <a:pPr algn="ctr" indent="0" marL="0">
                         <a:buNone/>
                       </a:pPr>
                       <a:r>
                         <a:rPr lang="en-US" sz="900" b="1" dirty="0">
                           <a:solidFill>
-                            <a:srgbClr val="92D050"/>
+                            <a:srgbClr val="2ECC71"/>
                           </a:solidFill>
                           <a:latin typeface="Calibri" pitchFamily="34" charset="0"/>
                           <a:ea typeface="Calibri" pitchFamily="34" charset="-122"/>
                           <a:cs typeface="Calibri" pitchFamily="34" charset="-120"/>
                         </a:rPr>
-                        <a:t>VRAI</a:t>
-                      </a:r>
-                      <a:r>
-                        <a:rPr lang="en-US" sz="900" b="1" dirty="0">
-                          <a:solidFill>
-                            <a:schemeClr val="bg2"/>
-                          </a:solidFill>
-                          <a:latin typeface="Calibri" pitchFamily="34" charset="0"/>
-                          <a:ea typeface="Calibri" pitchFamily="34" charset="-122"/>
-                          <a:cs typeface="Calibri" pitchFamily="34" charset="-120"/>
-                        </a:rPr>
-                        <a:t> </a:t>
+                        <a:t>VRAI ✓</a:t>
                       </a:r>
                       <a:endParaRPr lang="en-US" sz="900" dirty="0">
-                        <a:solidFill>
-                          <a:schemeClr val="bg2"/>
-                        </a:solidFill>
                         <a:latin typeface="Calibri" charset="0"/>
                         <a:ea typeface="Calibri" charset="0"/>
                         <a:cs typeface="Calibri" charset="0"/>
                       </a:endParaRPr>
                     </a:p>
                   </a:txBody>
-                  <a:tcPr anchor="ctr">
+                  <a:tcPr marL="91440" marR="91440" marT="45720" marB="45720" anchor="ctr">
                     <a:lnL w="6350" cap="flat" cmpd="sng" algn="ctr">
                       <a:solidFill>
                         <a:srgbClr val="2A4A6B"/>
@@ -10998,13 +10814,13 @@
                     <a:bodyPr/>
                     <a:lstStyle/>
                     <a:p>
-                      <a:pPr marL="0" indent="0" algn="ctr">
+                      <a:pPr algn="ctr" indent="0" marL="0">
                         <a:buNone/>
                       </a:pPr>
                       <a:r>
                         <a:rPr lang="en-US" sz="900" dirty="0">
                           <a:solidFill>
-                            <a:schemeClr val="bg2"/>
+                            <a:srgbClr val="000000"/>
                           </a:solidFill>
                           <a:latin typeface="Calibri" pitchFamily="34" charset="0"/>
                           <a:ea typeface="Calibri" pitchFamily="34" charset="-122"/>
@@ -11013,16 +10829,13 @@
                         <a:t>67.54%</a:t>
                       </a:r>
                       <a:endParaRPr lang="en-US" sz="900" dirty="0">
-                        <a:solidFill>
-                          <a:schemeClr val="bg2"/>
-                        </a:solidFill>
                         <a:latin typeface="Calibri" charset="0"/>
                         <a:ea typeface="Calibri" charset="0"/>
                         <a:cs typeface="Calibri" charset="0"/>
                       </a:endParaRPr>
                     </a:p>
                   </a:txBody>
-                  <a:tcPr anchor="ctr">
+                  <a:tcPr marL="91440" marR="91440" marT="45720" marB="45720" anchor="ctr">
                     <a:lnL w="6350" cap="flat" cmpd="sng" algn="ctr">
                       <a:solidFill>
                         <a:srgbClr val="2A4A6B"/>
@@ -11061,11 +10874,6 @@
                     </a:lnB>
                   </a:tcPr>
                 </a:tc>
-                <a:extLst>
-                  <a:ext uri="{0D108BD9-81ED-4DB2-BD59-A6C34878D82A}">
-                    <a16:rowId xmlns:a16="http://schemas.microsoft.com/office/drawing/2014/main" val="10001"/>
-                  </a:ext>
-                </a:extLst>
               </a:tr>
               <a:tr h="240030">
                 <a:tc>
@@ -11073,13 +10881,13 @@
                     <a:bodyPr/>
                     <a:lstStyle/>
                     <a:p>
-                      <a:pPr marL="0" indent="0" algn="ctr">
+                      <a:pPr algn="ctr" indent="0" marL="0">
                         <a:buNone/>
                       </a:pPr>
                       <a:r>
                         <a:rPr lang="en-US" sz="900" dirty="0">
                           <a:solidFill>
-                            <a:schemeClr val="bg2"/>
+                            <a:srgbClr val="000000"/>
                           </a:solidFill>
                           <a:latin typeface="Calibri" pitchFamily="34" charset="0"/>
                           <a:ea typeface="Calibri" pitchFamily="34" charset="-122"/>
@@ -11088,16 +10896,13 @@
                         <a:t>172.10</a:t>
                       </a:r>
                       <a:endParaRPr lang="en-US" sz="900" dirty="0">
-                        <a:solidFill>
-                          <a:schemeClr val="bg2"/>
-                        </a:solidFill>
                         <a:latin typeface="Calibri" charset="0"/>
                         <a:ea typeface="Calibri" charset="0"/>
                         <a:cs typeface="Calibri" charset="0"/>
                       </a:endParaRPr>
                     </a:p>
                   </a:txBody>
-                  <a:tcPr anchor="ctr">
+                  <a:tcPr marL="91440" marR="91440" marT="45720" marB="45720" anchor="ctr">
                     <a:lnL w="6350" cap="flat" cmpd="sng" algn="ctr">
                       <a:solidFill>
                         <a:srgbClr val="2A4A6B"/>
@@ -11141,13 +10946,13 @@
                     <a:bodyPr/>
                     <a:lstStyle/>
                     <a:p>
-                      <a:pPr marL="0" indent="0" algn="ctr">
+                      <a:pPr algn="ctr" indent="0" marL="0">
                         <a:buNone/>
                       </a:pPr>
                       <a:r>
                         <a:rPr lang="en-US" sz="900" dirty="0">
                           <a:solidFill>
-                            <a:schemeClr val="bg2"/>
+                            <a:srgbClr val="000000"/>
                           </a:solidFill>
                           <a:latin typeface="Calibri" pitchFamily="34" charset="0"/>
                           <a:ea typeface="Calibri" pitchFamily="34" charset="-122"/>
@@ -11156,16 +10961,13 @@
                         <a:t>104.20</a:t>
                       </a:r>
                       <a:endParaRPr lang="en-US" sz="900" dirty="0">
-                        <a:solidFill>
-                          <a:schemeClr val="bg2"/>
-                        </a:solidFill>
                         <a:latin typeface="Calibri" charset="0"/>
                         <a:ea typeface="Calibri" charset="0"/>
                         <a:cs typeface="Calibri" charset="0"/>
                       </a:endParaRPr>
                     </a:p>
                   </a:txBody>
-                  <a:tcPr anchor="ctr">
+                  <a:tcPr marL="91440" marR="91440" marT="45720" marB="45720" anchor="ctr">
                     <a:lnL w="6350" cap="flat" cmpd="sng" algn="ctr">
                       <a:solidFill>
                         <a:srgbClr val="2A4A6B"/>
@@ -11209,13 +11011,13 @@
                     <a:bodyPr/>
                     <a:lstStyle/>
                     <a:p>
-                      <a:pPr marL="0" indent="0" algn="ctr">
+                      <a:pPr algn="ctr" indent="0" marL="0">
                         <a:buNone/>
                       </a:pPr>
                       <a:r>
                         <a:rPr lang="en-US" sz="900" dirty="0">
                           <a:solidFill>
-                            <a:schemeClr val="bg2"/>
+                            <a:srgbClr val="000000"/>
                           </a:solidFill>
                           <a:latin typeface="Calibri" pitchFamily="34" charset="0"/>
                           <a:ea typeface="Calibri" pitchFamily="34" charset="-122"/>
@@ -11224,16 +11026,13 @@
                         <a:t>104.15</a:t>
                       </a:r>
                       <a:endParaRPr lang="en-US" sz="900" dirty="0">
-                        <a:solidFill>
-                          <a:schemeClr val="bg2"/>
-                        </a:solidFill>
                         <a:latin typeface="Calibri" charset="0"/>
                         <a:ea typeface="Calibri" charset="0"/>
                         <a:cs typeface="Calibri" charset="0"/>
                       </a:endParaRPr>
                     </a:p>
                   </a:txBody>
-                  <a:tcPr anchor="ctr">
+                  <a:tcPr marL="91440" marR="91440" marT="45720" marB="45720" anchor="ctr">
                     <a:lnL w="6350" cap="flat" cmpd="sng" algn="ctr">
                       <a:solidFill>
                         <a:srgbClr val="2A4A6B"/>
@@ -11277,13 +11076,13 @@
                     <a:bodyPr/>
                     <a:lstStyle/>
                     <a:p>
-                      <a:pPr marL="0" indent="0" algn="ctr">
+                      <a:pPr algn="ctr" indent="0" marL="0">
                         <a:buNone/>
                       </a:pPr>
                       <a:r>
                         <a:rPr lang="en-US" sz="900" dirty="0">
                           <a:solidFill>
-                            <a:schemeClr val="bg2"/>
+                            <a:srgbClr val="000000"/>
                           </a:solidFill>
                           <a:latin typeface="Calibri" pitchFamily="34" charset="0"/>
                           <a:ea typeface="Calibri" pitchFamily="34" charset="-122"/>
@@ -11292,16 +11091,13 @@
                         <a:t>5.20</a:t>
                       </a:r>
                       <a:endParaRPr lang="en-US" sz="900" dirty="0">
-                        <a:solidFill>
-                          <a:schemeClr val="bg2"/>
-                        </a:solidFill>
                         <a:latin typeface="Calibri" charset="0"/>
                         <a:ea typeface="Calibri" charset="0"/>
                         <a:cs typeface="Calibri" charset="0"/>
                       </a:endParaRPr>
                     </a:p>
                   </a:txBody>
-                  <a:tcPr anchor="ctr">
+                  <a:tcPr marL="91440" marR="91440" marT="45720" marB="45720" anchor="ctr">
                     <a:lnL w="6350" cap="flat" cmpd="sng" algn="ctr">
                       <a:solidFill>
                         <a:srgbClr val="2A4A6B"/>
@@ -11345,13 +11141,13 @@
                     <a:bodyPr/>
                     <a:lstStyle/>
                     <a:p>
-                      <a:pPr marL="0" indent="0" algn="ctr">
+                      <a:pPr algn="ctr" indent="0" marL="0">
                         <a:buNone/>
                       </a:pPr>
                       <a:r>
                         <a:rPr lang="en-US" sz="900" dirty="0">
                           <a:solidFill>
-                            <a:schemeClr val="bg2"/>
+                            <a:srgbClr val="000000"/>
                           </a:solidFill>
                           <a:latin typeface="Calibri" pitchFamily="34" charset="0"/>
                           <a:ea typeface="Calibri" pitchFamily="34" charset="-122"/>
@@ -11360,16 +11156,13 @@
                         <a:t>3.35</a:t>
                       </a:r>
                       <a:endParaRPr lang="en-US" sz="900" dirty="0">
-                        <a:solidFill>
-                          <a:schemeClr val="bg2"/>
-                        </a:solidFill>
                         <a:latin typeface="Calibri" charset="0"/>
                         <a:ea typeface="Calibri" charset="0"/>
                         <a:cs typeface="Calibri" charset="0"/>
                       </a:endParaRPr>
                     </a:p>
                   </a:txBody>
-                  <a:tcPr anchor="ctr">
+                  <a:tcPr marL="91440" marR="91440" marT="45720" marB="45720" anchor="ctr">
                     <a:lnL w="6350" cap="flat" cmpd="sng" algn="ctr">
                       <a:solidFill>
                         <a:srgbClr val="2A4A6B"/>
@@ -11413,13 +11206,13 @@
                     <a:bodyPr/>
                     <a:lstStyle/>
                     <a:p>
-                      <a:pPr marL="0" indent="0" algn="ctr">
+                      <a:pPr algn="ctr" indent="0" marL="0">
                         <a:buNone/>
                       </a:pPr>
                       <a:r>
                         <a:rPr lang="en-US" sz="900" dirty="0">
                           <a:solidFill>
-                            <a:schemeClr val="bg2"/>
+                            <a:srgbClr val="000000"/>
                           </a:solidFill>
                           <a:latin typeface="Calibri" pitchFamily="34" charset="0"/>
                           <a:ea typeface="Calibri" pitchFamily="34" charset="-122"/>
@@ -11428,16 +11221,13 @@
                         <a:t>111.60</a:t>
                       </a:r>
                       <a:endParaRPr lang="en-US" sz="900" dirty="0">
-                        <a:solidFill>
-                          <a:schemeClr val="bg2"/>
-                        </a:solidFill>
                         <a:latin typeface="Calibri" charset="0"/>
                         <a:ea typeface="Calibri" charset="0"/>
                         <a:cs typeface="Calibri" charset="0"/>
                       </a:endParaRPr>
                     </a:p>
                   </a:txBody>
-                  <a:tcPr anchor="ctr">
+                  <a:tcPr marL="91440" marR="91440" marT="45720" marB="45720" anchor="ctr">
                     <a:lnL w="6350" cap="flat" cmpd="sng" algn="ctr">
                       <a:solidFill>
                         <a:srgbClr val="2A4A6B"/>
@@ -11481,42 +11271,28 @@
                     <a:bodyPr/>
                     <a:lstStyle/>
                     <a:p>
-                      <a:pPr marL="0" indent="0" algn="ctr">
+                      <a:pPr algn="ctr" indent="0" marL="0">
                         <a:buNone/>
                       </a:pPr>
                       <a:r>
                         <a:rPr lang="en-US" sz="900" b="1" dirty="0">
                           <a:solidFill>
-                            <a:srgbClr val="FF0000"/>
+                            <a:srgbClr val="E74C3C"/>
                           </a:solidFill>
                           <a:latin typeface="Calibri" pitchFamily="34" charset="0"/>
                           <a:ea typeface="Calibri" pitchFamily="34" charset="-122"/>
                           <a:cs typeface="Calibri" pitchFamily="34" charset="-120"/>
                         </a:rPr>
-                        <a:t>FAUX</a:t>
-                      </a:r>
-                      <a:r>
-                        <a:rPr lang="en-US" sz="900" b="1" dirty="0">
-                          <a:solidFill>
-                            <a:schemeClr val="bg2"/>
-                          </a:solidFill>
-                          <a:latin typeface="Calibri" pitchFamily="34" charset="0"/>
-                          <a:ea typeface="Calibri" pitchFamily="34" charset="-122"/>
-                          <a:cs typeface="Calibri" pitchFamily="34" charset="-120"/>
-                        </a:rPr>
-                        <a:t> </a:t>
+                        <a:t>FAUX ✗</a:t>
                       </a:r>
                       <a:endParaRPr lang="en-US" sz="900" dirty="0">
-                        <a:solidFill>
-                          <a:schemeClr val="bg2"/>
-                        </a:solidFill>
                         <a:latin typeface="Calibri" charset="0"/>
                         <a:ea typeface="Calibri" charset="0"/>
                         <a:cs typeface="Calibri" charset="0"/>
                       </a:endParaRPr>
                     </a:p>
                   </a:txBody>
-                  <a:tcPr anchor="ctr">
+                  <a:tcPr marL="91440" marR="91440" marT="45720" marB="45720" anchor="ctr">
                     <a:lnL w="6350" cap="flat" cmpd="sng" algn="ctr">
                       <a:solidFill>
                         <a:srgbClr val="2A4A6B"/>
@@ -11560,13 +11336,13 @@
                     <a:bodyPr/>
                     <a:lstStyle/>
                     <a:p>
-                      <a:pPr marL="0" indent="0" algn="ctr">
+                      <a:pPr algn="ctr" indent="0" marL="0">
                         <a:buNone/>
                       </a:pPr>
                       <a:r>
                         <a:rPr lang="en-US" sz="900" dirty="0">
                           <a:solidFill>
-                            <a:schemeClr val="bg2"/>
+                            <a:srgbClr val="000000"/>
                           </a:solidFill>
                           <a:latin typeface="Calibri" pitchFamily="34" charset="0"/>
                           <a:ea typeface="Calibri" pitchFamily="34" charset="-122"/>
@@ -11575,16 +11351,13 @@
                         <a:t>99.96%</a:t>
                       </a:r>
                       <a:endParaRPr lang="en-US" sz="900" dirty="0">
-                        <a:solidFill>
-                          <a:schemeClr val="bg2"/>
-                        </a:solidFill>
                         <a:latin typeface="Calibri" charset="0"/>
                         <a:ea typeface="Calibri" charset="0"/>
                         <a:cs typeface="Calibri" charset="0"/>
                       </a:endParaRPr>
                     </a:p>
                   </a:txBody>
-                  <a:tcPr anchor="ctr">
+                  <a:tcPr marL="91440" marR="91440" marT="45720" marB="45720" anchor="ctr">
                     <a:lnL w="6350" cap="flat" cmpd="sng" algn="ctr">
                       <a:solidFill>
                         <a:srgbClr val="2A4A6B"/>
@@ -11623,11 +11396,6 @@
                     </a:lnB>
                   </a:tcPr>
                 </a:tc>
-                <a:extLst>
-                  <a:ext uri="{0D108BD9-81ED-4DB2-BD59-A6C34878D82A}">
-                    <a16:rowId xmlns:a16="http://schemas.microsoft.com/office/drawing/2014/main" val="10002"/>
-                  </a:ext>
-                </a:extLst>
               </a:tr>
               <a:tr h="240030">
                 <a:tc>
@@ -11635,13 +11403,13 @@
                     <a:bodyPr/>
                     <a:lstStyle/>
                     <a:p>
-                      <a:pPr marL="0" indent="0" algn="ctr">
+                      <a:pPr algn="ctr" indent="0" marL="0">
                         <a:buNone/>
                       </a:pPr>
                       <a:r>
                         <a:rPr lang="en-US" sz="900" dirty="0">
                           <a:solidFill>
-                            <a:schemeClr val="bg2"/>
+                            <a:srgbClr val="000000"/>
                           </a:solidFill>
                           <a:latin typeface="Calibri" pitchFamily="34" charset="0"/>
                           <a:ea typeface="Calibri" pitchFamily="34" charset="-122"/>
@@ -11650,16 +11418,13 @@
                         <a:t>170.50</a:t>
                       </a:r>
                       <a:endParaRPr lang="en-US" sz="900" dirty="0">
-                        <a:solidFill>
-                          <a:schemeClr val="bg2"/>
-                        </a:solidFill>
                         <a:latin typeface="Calibri" charset="0"/>
                         <a:ea typeface="Calibri" charset="0"/>
                         <a:cs typeface="Calibri" charset="0"/>
                       </a:endParaRPr>
                     </a:p>
                   </a:txBody>
-                  <a:tcPr anchor="ctr">
+                  <a:tcPr marL="91440" marR="91440" marT="45720" marB="45720" anchor="ctr">
                     <a:lnL w="6350" cap="flat" cmpd="sng" algn="ctr">
                       <a:solidFill>
                         <a:srgbClr val="2A4A6B"/>
@@ -11703,13 +11468,13 @@
                     <a:bodyPr/>
                     <a:lstStyle/>
                     <a:p>
-                      <a:pPr marL="0" indent="0" algn="ctr">
+                      <a:pPr algn="ctr" indent="0" marL="0">
                         <a:buNone/>
                       </a:pPr>
                       <a:r>
                         <a:rPr lang="en-US" sz="900" dirty="0">
                           <a:solidFill>
-                            <a:schemeClr val="bg2"/>
+                            <a:srgbClr val="000000"/>
                           </a:solidFill>
                           <a:latin typeface="Calibri" pitchFamily="34" charset="0"/>
                           <a:ea typeface="Calibri" pitchFamily="34" charset="-122"/>
@@ -11718,16 +11483,13 @@
                         <a:t>104.50</a:t>
                       </a:r>
                       <a:endParaRPr lang="en-US" sz="900" dirty="0">
-                        <a:solidFill>
-                          <a:schemeClr val="bg2"/>
-                        </a:solidFill>
                         <a:latin typeface="Calibri" charset="0"/>
                         <a:ea typeface="Calibri" charset="0"/>
                         <a:cs typeface="Calibri" charset="0"/>
                       </a:endParaRPr>
                     </a:p>
                   </a:txBody>
-                  <a:tcPr anchor="ctr">
+                  <a:tcPr marL="91440" marR="91440" marT="45720" marB="45720" anchor="ctr">
                     <a:lnL w="6350" cap="flat" cmpd="sng" algn="ctr">
                       <a:solidFill>
                         <a:srgbClr val="2A4A6B"/>
@@ -11771,13 +11533,13 @@
                     <a:bodyPr/>
                     <a:lstStyle/>
                     <a:p>
-                      <a:pPr marL="0" indent="0" algn="ctr">
+                      <a:pPr algn="ctr" indent="0" marL="0">
                         <a:buNone/>
                       </a:pPr>
                       <a:r>
                         <a:rPr lang="en-US" sz="900" dirty="0">
                           <a:solidFill>
-                            <a:schemeClr val="bg2"/>
+                            <a:srgbClr val="000000"/>
                           </a:solidFill>
                           <a:latin typeface="Calibri" pitchFamily="34" charset="0"/>
                           <a:ea typeface="Calibri" pitchFamily="34" charset="-122"/>
@@ -11786,16 +11548,13 @@
                         <a:t>104.40</a:t>
                       </a:r>
                       <a:endParaRPr lang="en-US" sz="900" dirty="0">
-                        <a:solidFill>
-                          <a:schemeClr val="bg2"/>
-                        </a:solidFill>
                         <a:latin typeface="Calibri" charset="0"/>
                         <a:ea typeface="Calibri" charset="0"/>
                         <a:cs typeface="Calibri" charset="0"/>
                       </a:endParaRPr>
                     </a:p>
                   </a:txBody>
-                  <a:tcPr anchor="ctr">
+                  <a:tcPr marL="91440" marR="91440" marT="45720" marB="45720" anchor="ctr">
                     <a:lnL w="6350" cap="flat" cmpd="sng" algn="ctr">
                       <a:solidFill>
                         <a:srgbClr val="2A4A6B"/>
@@ -11839,13 +11598,13 @@
                     <a:bodyPr/>
                     <a:lstStyle/>
                     <a:p>
-                      <a:pPr marL="0" indent="0" algn="ctr">
+                      <a:pPr algn="ctr" indent="0" marL="0">
                         <a:buNone/>
                       </a:pPr>
                       <a:r>
                         <a:rPr lang="en-US" sz="900" dirty="0">
                           <a:solidFill>
-                            <a:schemeClr val="bg2"/>
+                            <a:srgbClr val="000000"/>
                           </a:solidFill>
                           <a:latin typeface="Calibri" pitchFamily="34" charset="0"/>
                           <a:ea typeface="Calibri" pitchFamily="34" charset="-122"/>
@@ -11854,16 +11613,13 @@
                         <a:t>5.50</a:t>
                       </a:r>
                       <a:endParaRPr lang="en-US" sz="900" dirty="0">
-                        <a:solidFill>
-                          <a:schemeClr val="bg2"/>
-                        </a:solidFill>
                         <a:latin typeface="Calibri" charset="0"/>
                         <a:ea typeface="Calibri" charset="0"/>
                         <a:cs typeface="Calibri" charset="0"/>
                       </a:endParaRPr>
                     </a:p>
                   </a:txBody>
-                  <a:tcPr anchor="ctr">
+                  <a:tcPr marL="91440" marR="91440" marT="45720" marB="45720" anchor="ctr">
                     <a:lnL w="6350" cap="flat" cmpd="sng" algn="ctr">
                       <a:solidFill>
                         <a:srgbClr val="2A4A6B"/>
@@ -11907,13 +11663,13 @@
                     <a:bodyPr/>
                     <a:lstStyle/>
                     <a:p>
-                      <a:pPr marL="0" indent="0" algn="ctr">
+                      <a:pPr algn="ctr" indent="0" marL="0">
                         <a:buNone/>
                       </a:pPr>
                       <a:r>
                         <a:rPr lang="en-US" sz="900" dirty="0">
                           <a:solidFill>
-                            <a:schemeClr val="bg2"/>
+                            <a:srgbClr val="000000"/>
                           </a:solidFill>
                           <a:latin typeface="Calibri" pitchFamily="34" charset="0"/>
                           <a:ea typeface="Calibri" pitchFamily="34" charset="-122"/>
@@ -11922,16 +11678,13 @@
                         <a:t>3.40</a:t>
                       </a:r>
                       <a:endParaRPr lang="en-US" sz="900" dirty="0">
-                        <a:solidFill>
-                          <a:schemeClr val="bg2"/>
-                        </a:solidFill>
                         <a:latin typeface="Calibri" charset="0"/>
                         <a:ea typeface="Calibri" charset="0"/>
                         <a:cs typeface="Calibri" charset="0"/>
                       </a:endParaRPr>
                     </a:p>
                   </a:txBody>
-                  <a:tcPr anchor="ctr">
+                  <a:tcPr marL="91440" marR="91440" marT="45720" marB="45720" anchor="ctr">
                     <a:lnL w="6350" cap="flat" cmpd="sng" algn="ctr">
                       <a:solidFill>
                         <a:srgbClr val="2A4A6B"/>
@@ -11975,13 +11728,13 @@
                     <a:bodyPr/>
                     <a:lstStyle/>
                     <a:p>
-                      <a:pPr marL="0" indent="0" algn="ctr">
+                      <a:pPr algn="ctr" indent="0" marL="0">
                         <a:buNone/>
                       </a:pPr>
                       <a:r>
                         <a:rPr lang="en-US" sz="900" dirty="0">
                           <a:solidFill>
-                            <a:schemeClr val="bg2"/>
+                            <a:srgbClr val="000000"/>
                           </a:solidFill>
                           <a:latin typeface="Calibri" pitchFamily="34" charset="0"/>
                           <a:ea typeface="Calibri" pitchFamily="34" charset="-122"/>
@@ -11990,16 +11743,13 @@
                         <a:t>110.80</a:t>
                       </a:r>
                       <a:endParaRPr lang="en-US" sz="900" dirty="0">
-                        <a:solidFill>
-                          <a:schemeClr val="bg2"/>
-                        </a:solidFill>
                         <a:latin typeface="Calibri" charset="0"/>
                         <a:ea typeface="Calibri" charset="0"/>
                         <a:cs typeface="Calibri" charset="0"/>
                       </a:endParaRPr>
                     </a:p>
                   </a:txBody>
-                  <a:tcPr anchor="ctr">
+                  <a:tcPr marL="91440" marR="91440" marT="45720" marB="45720" anchor="ctr">
                     <a:lnL w="6350" cap="flat" cmpd="sng" algn="ctr">
                       <a:solidFill>
                         <a:srgbClr val="2A4A6B"/>
@@ -12043,42 +11793,28 @@
                     <a:bodyPr/>
                     <a:lstStyle/>
                     <a:p>
-                      <a:pPr marL="0" indent="0" algn="ctr">
+                      <a:pPr algn="ctr" indent="0" marL="0">
                         <a:buNone/>
                       </a:pPr>
                       <a:r>
                         <a:rPr lang="en-US" sz="900" b="1" dirty="0">
                           <a:solidFill>
-                            <a:srgbClr val="FF0000"/>
+                            <a:srgbClr val="E74C3C"/>
                           </a:solidFill>
                           <a:latin typeface="Calibri" pitchFamily="34" charset="0"/>
                           <a:ea typeface="Calibri" pitchFamily="34" charset="-122"/>
                           <a:cs typeface="Calibri" pitchFamily="34" charset="-120"/>
                         </a:rPr>
-                        <a:t>FAUX</a:t>
-                      </a:r>
-                      <a:r>
-                        <a:rPr lang="en-US" sz="900" b="1" dirty="0">
-                          <a:solidFill>
-                            <a:schemeClr val="bg2"/>
-                          </a:solidFill>
-                          <a:latin typeface="Calibri" pitchFamily="34" charset="0"/>
-                          <a:ea typeface="Calibri" pitchFamily="34" charset="-122"/>
-                          <a:cs typeface="Calibri" pitchFamily="34" charset="-120"/>
-                        </a:rPr>
-                        <a:t> </a:t>
+                        <a:t>FAUX ✗</a:t>
                       </a:r>
                       <a:endParaRPr lang="en-US" sz="900" dirty="0">
-                        <a:solidFill>
-                          <a:schemeClr val="bg2"/>
-                        </a:solidFill>
                         <a:latin typeface="Calibri" charset="0"/>
                         <a:ea typeface="Calibri" charset="0"/>
                         <a:cs typeface="Calibri" charset="0"/>
                       </a:endParaRPr>
                     </a:p>
                   </a:txBody>
-                  <a:tcPr anchor="ctr">
+                  <a:tcPr marL="91440" marR="91440" marT="45720" marB="45720" anchor="ctr">
                     <a:lnL w="6350" cap="flat" cmpd="sng" algn="ctr">
                       <a:solidFill>
                         <a:srgbClr val="2A4A6B"/>
@@ -12122,13 +11858,13 @@
                     <a:bodyPr/>
                     <a:lstStyle/>
                     <a:p>
-                      <a:pPr marL="0" indent="0" algn="ctr">
+                      <a:pPr algn="ctr" indent="0" marL="0">
                         <a:buNone/>
                       </a:pPr>
                       <a:r>
                         <a:rPr lang="en-US" sz="900" dirty="0">
                           <a:solidFill>
-                            <a:schemeClr val="bg2"/>
+                            <a:srgbClr val="000000"/>
                           </a:solidFill>
                           <a:latin typeface="Calibri" pitchFamily="34" charset="0"/>
                           <a:ea typeface="Calibri" pitchFamily="34" charset="-122"/>
@@ -12137,16 +11873,13 @@
                         <a:t>100.00%</a:t>
                       </a:r>
                       <a:endParaRPr lang="en-US" sz="900" dirty="0">
-                        <a:solidFill>
-                          <a:schemeClr val="bg2"/>
-                        </a:solidFill>
                         <a:latin typeface="Calibri" charset="0"/>
                         <a:ea typeface="Calibri" charset="0"/>
                         <a:cs typeface="Calibri" charset="0"/>
                       </a:endParaRPr>
                     </a:p>
                   </a:txBody>
-                  <a:tcPr anchor="ctr">
+                  <a:tcPr marL="91440" marR="91440" marT="45720" marB="45720" anchor="ctr">
                     <a:lnL w="6350" cap="flat" cmpd="sng" algn="ctr">
                       <a:solidFill>
                         <a:srgbClr val="2A4A6B"/>
@@ -12185,11 +11918,6 @@
                     </a:lnB>
                   </a:tcPr>
                 </a:tc>
-                <a:extLst>
-                  <a:ext uri="{0D108BD9-81ED-4DB2-BD59-A6C34878D82A}">
-                    <a16:rowId xmlns:a16="http://schemas.microsoft.com/office/drawing/2014/main" val="10003"/>
-                  </a:ext>
-                </a:extLst>
               </a:tr>
             </a:tbl>
           </a:graphicData>
@@ -12214,13 +11942,6 @@
           </a:solidFill>
           <a:ln/>
         </p:spPr>
-        <p:txBody>
-          <a:bodyPr/>
-          <a:lstStyle/>
-          <a:p>
-            <a:endParaRPr lang="fr-FR"/>
-          </a:p>
-        </p:txBody>
       </p:sp>
       <p:sp>
         <p:nvSpPr>
@@ -12243,7 +11964,7 @@
           <a:bodyPr wrap="square" rtlCol="0" anchor="ctr"/>
           <a:lstStyle/>
           <a:p>
-            <a:pPr marL="0" indent="0" algn="r">
+            <a:pPr algn="r" indent="0" marL="0">
               <a:buNone/>
             </a:pPr>
             <a:r>
@@ -12277,7 +11998,6 @@
         <a:solidFill>
           <a:srgbClr val="F0F4F8"/>
         </a:solidFill>
-        <a:effectLst/>
       </p:bgPr>
     </p:bg>
     <p:spTree>
@@ -12315,7 +12035,7 @@
           <a:bodyPr wrap="square" rtlCol="0" anchor="ctr"/>
           <a:lstStyle/>
           <a:p>
-            <a:pPr marL="0" indent="0">
+            <a:pPr indent="0" marL="0">
               <a:buNone/>
             </a:pPr>
             <a:r>
@@ -12352,13 +12072,6 @@
           </a:solidFill>
           <a:ln/>
         </p:spPr>
-        <p:txBody>
-          <a:bodyPr/>
-          <a:lstStyle/>
-          <a:p>
-            <a:endParaRPr lang="fr-FR"/>
-          </a:p>
-        </p:txBody>
       </p:sp>
       <p:sp>
         <p:nvSpPr>
@@ -12381,7 +12094,7 @@
           <a:bodyPr wrap="square" rtlCol="0" anchor="ctr"/>
           <a:lstStyle/>
           <a:p>
-            <a:pPr marL="0" indent="0">
+            <a:pPr indent="0" marL="0">
               <a:buNone/>
             </a:pPr>
             <a:r>
@@ -12401,14 +12114,14 @@
       </p:sp>
       <p:pic>
         <p:nvPicPr>
-          <p:cNvPr id="5" name="Image 0" descr="preencoded.png"/>
+          <p:cNvPr id="5" name="Image 0" descr="preencoded.png">    </p:cNvPr>
           <p:cNvPicPr>
             <a:picLocks noChangeAspect="1"/>
           </p:cNvPicPr>
           <p:nvPr/>
         </p:nvPicPr>
         <p:blipFill>
-          <a:blip r:embed="rId3"/>
+          <a:blip r:embed="rId1"/>
           <a:stretch>
             <a:fillRect/>
           </a:stretch>
@@ -12442,13 +12155,6 @@
           </a:solidFill>
           <a:ln/>
         </p:spPr>
-        <p:txBody>
-          <a:bodyPr/>
-          <a:lstStyle/>
-          <a:p>
-            <a:endParaRPr lang="fr-FR"/>
-          </a:p>
-        </p:txBody>
       </p:sp>
       <p:sp>
         <p:nvSpPr>
@@ -12471,7 +12177,7 @@
           <a:bodyPr wrap="square" rtlCol="0" anchor="ctr"/>
           <a:lstStyle/>
           <a:p>
-            <a:pPr marL="0" indent="0" algn="r">
+            <a:pPr algn="r" indent="0" marL="0">
               <a:buNone/>
             </a:pPr>
             <a:r>
@@ -12505,7 +12211,6 @@
         <a:solidFill>
           <a:srgbClr val="0A1628"/>
         </a:solidFill>
-        <a:effectLst/>
       </p:bgPr>
     </p:bg>
     <p:spTree>
@@ -12543,13 +12248,6 @@
           </a:solidFill>
           <a:ln/>
         </p:spPr>
-        <p:txBody>
-          <a:bodyPr/>
-          <a:lstStyle/>
-          <a:p>
-            <a:endParaRPr lang="fr-FR"/>
-          </a:p>
-        </p:txBody>
       </p:sp>
       <p:sp>
         <p:nvSpPr>
@@ -12572,13 +12270,6 @@
           </a:solidFill>
           <a:ln/>
         </p:spPr>
-        <p:txBody>
-          <a:bodyPr/>
-          <a:lstStyle/>
-          <a:p>
-            <a:endParaRPr lang="fr-FR"/>
-          </a:p>
-        </p:txBody>
       </p:sp>
       <p:sp>
         <p:nvSpPr>
@@ -12601,7 +12292,7 @@
           <a:bodyPr wrap="square" rtlCol="0" anchor="ctr"/>
           <a:lstStyle/>
           <a:p>
-            <a:pPr marL="0" indent="0">
+            <a:pPr indent="0" marL="0">
               <a:buNone/>
             </a:pPr>
             <a:r>
@@ -12638,13 +12329,6 @@
           </a:solidFill>
           <a:ln/>
         </p:spPr>
-        <p:txBody>
-          <a:bodyPr/>
-          <a:lstStyle/>
-          <a:p>
-            <a:endParaRPr lang="fr-FR"/>
-          </a:p>
-        </p:txBody>
       </p:sp>
       <p:sp>
         <p:nvSpPr>
@@ -12665,13 +12349,6 @@
           </a:solidFill>
           <a:ln/>
         </p:spPr>
-        <p:txBody>
-          <a:bodyPr/>
-          <a:lstStyle/>
-          <a:p>
-            <a:endParaRPr lang="fr-FR"/>
-          </a:p>
-        </p:txBody>
       </p:sp>
       <p:sp>
         <p:nvSpPr>
@@ -12694,9 +12371,20 @@
           <a:bodyPr wrap="square" lIns="0" tIns="0" rIns="0" bIns="0" rtlCol="0" anchor="ctr"/>
           <a:lstStyle/>
           <a:p>
-            <a:pPr marL="0" indent="0" algn="ctr">
+            <a:pPr algn="ctr" indent="0" marL="0">
               <a:buNone/>
             </a:pPr>
+            <a:r>
+              <a:rPr lang="en-US" sz="1600" dirty="0">
+                <a:solidFill>
+                  <a:srgbClr val="FFFFFF"/>
+                </a:solidFill>
+                <a:latin typeface="Calibri" pitchFamily="34" charset="0"/>
+                <a:ea typeface="Calibri" pitchFamily="34" charset="-122"/>
+                <a:cs typeface="Calibri" pitchFamily="34" charset="-120"/>
+              </a:rPr>
+              <a:t>✅</a:t>
+            </a:r>
             <a:endParaRPr lang="en-US" sz="1600" dirty="0"/>
           </a:p>
         </p:txBody>
@@ -12722,7 +12410,7 @@
           <a:bodyPr wrap="square" rtlCol="0" anchor="ctr"/>
           <a:lstStyle/>
           <a:p>
-            <a:pPr marL="0" indent="0">
+            <a:pPr indent="0" marL="0">
               <a:buNone/>
             </a:pPr>
             <a:r>
@@ -12759,13 +12447,6 @@
           </a:solidFill>
           <a:ln/>
         </p:spPr>
-        <p:txBody>
-          <a:bodyPr/>
-          <a:lstStyle/>
-          <a:p>
-            <a:endParaRPr lang="fr-FR"/>
-          </a:p>
-        </p:txBody>
       </p:sp>
       <p:sp>
         <p:nvSpPr>
@@ -12788,9 +12469,20 @@
           <a:bodyPr wrap="square" lIns="0" tIns="0" rIns="0" bIns="0" rtlCol="0" anchor="ctr"/>
           <a:lstStyle/>
           <a:p>
-            <a:pPr marL="0" indent="0" algn="ctr">
+            <a:pPr algn="ctr" indent="0" marL="0">
               <a:buNone/>
             </a:pPr>
+            <a:r>
+              <a:rPr lang="en-US" sz="1600" dirty="0">
+                <a:solidFill>
+                  <a:srgbClr val="FFFFFF"/>
+                </a:solidFill>
+                <a:latin typeface="Calibri" pitchFamily="34" charset="0"/>
+                <a:ea typeface="Calibri" pitchFamily="34" charset="-122"/>
+                <a:cs typeface="Calibri" pitchFamily="34" charset="-120"/>
+              </a:rPr>
+              <a:t>🏆</a:t>
+            </a:r>
             <a:endParaRPr lang="en-US" sz="1600" dirty="0"/>
           </a:p>
         </p:txBody>
@@ -12816,7 +12508,7 @@
           <a:bodyPr wrap="square" rtlCol="0" anchor="ctr"/>
           <a:lstStyle/>
           <a:p>
-            <a:pPr marL="0" indent="0">
+            <a:pPr indent="0" marL="0">
               <a:buNone/>
             </a:pPr>
             <a:r>
@@ -12853,13 +12545,6 @@
           </a:solidFill>
           <a:ln/>
         </p:spPr>
-        <p:txBody>
-          <a:bodyPr/>
-          <a:lstStyle/>
-          <a:p>
-            <a:endParaRPr lang="fr-FR"/>
-          </a:p>
-        </p:txBody>
       </p:sp>
       <p:sp>
         <p:nvSpPr>
@@ -12882,9 +12567,20 @@
           <a:bodyPr wrap="square" lIns="0" tIns="0" rIns="0" bIns="0" rtlCol="0" anchor="ctr"/>
           <a:lstStyle/>
           <a:p>
-            <a:pPr marL="0" indent="0" algn="ctr">
+            <a:pPr algn="ctr" indent="0" marL="0">
               <a:buNone/>
             </a:pPr>
+            <a:r>
+              <a:rPr lang="en-US" sz="1600" dirty="0">
+                <a:solidFill>
+                  <a:srgbClr val="FFFFFF"/>
+                </a:solidFill>
+                <a:latin typeface="Calibri" pitchFamily="34" charset="0"/>
+                <a:ea typeface="Calibri" pitchFamily="34" charset="-122"/>
+                <a:cs typeface="Calibri" pitchFamily="34" charset="-120"/>
+              </a:rPr>
+              <a:t>🔍</a:t>
+            </a:r>
             <a:endParaRPr lang="en-US" sz="1600" dirty="0"/>
           </a:p>
         </p:txBody>
@@ -12910,7 +12606,7 @@
           <a:bodyPr wrap="square" rtlCol="0" anchor="ctr"/>
           <a:lstStyle/>
           <a:p>
-            <a:pPr marL="0" indent="0">
+            <a:pPr indent="0" marL="0">
               <a:buNone/>
             </a:pPr>
             <a:r>
@@ -12947,13 +12643,6 @@
           </a:solidFill>
           <a:ln/>
         </p:spPr>
-        <p:txBody>
-          <a:bodyPr/>
-          <a:lstStyle/>
-          <a:p>
-            <a:endParaRPr lang="fr-FR"/>
-          </a:p>
-        </p:txBody>
       </p:sp>
       <p:sp>
         <p:nvSpPr>
@@ -12976,9 +12665,20 @@
           <a:bodyPr wrap="square" lIns="0" tIns="0" rIns="0" bIns="0" rtlCol="0" anchor="ctr"/>
           <a:lstStyle/>
           <a:p>
-            <a:pPr marL="0" indent="0" algn="ctr">
+            <a:pPr algn="ctr" indent="0" marL="0">
               <a:buNone/>
             </a:pPr>
+            <a:r>
+              <a:rPr lang="en-US" sz="1600" dirty="0">
+                <a:solidFill>
+                  <a:srgbClr val="FFFFFF"/>
+                </a:solidFill>
+                <a:latin typeface="Calibri" pitchFamily="34" charset="0"/>
+                <a:ea typeface="Calibri" pitchFamily="34" charset="-122"/>
+                <a:cs typeface="Calibri" pitchFamily="34" charset="-120"/>
+              </a:rPr>
+              <a:t>🚀</a:t>
+            </a:r>
             <a:endParaRPr lang="en-US" sz="1600" dirty="0"/>
           </a:p>
         </p:txBody>
@@ -13004,7 +12704,7 @@
           <a:bodyPr wrap="square" rtlCol="0" anchor="ctr"/>
           <a:lstStyle/>
           <a:p>
-            <a:pPr marL="0" indent="0">
+            <a:pPr indent="0" marL="0">
               <a:buNone/>
             </a:pPr>
             <a:r>
@@ -13043,13 +12743,6 @@
           </a:solidFill>
           <a:ln/>
         </p:spPr>
-        <p:txBody>
-          <a:bodyPr/>
-          <a:lstStyle/>
-          <a:p>
-            <a:endParaRPr lang="fr-FR"/>
-          </a:p>
-        </p:txBody>
       </p:sp>
       <p:sp>
         <p:nvSpPr>
@@ -13072,7 +12765,7 @@
           <a:bodyPr wrap="square" rtlCol="0" anchor="ctr"/>
           <a:lstStyle/>
           <a:p>
-            <a:pPr marL="0" indent="0" algn="ctr">
+            <a:pPr algn="ctr" indent="0" marL="0">
               <a:buNone/>
             </a:pPr>
             <a:r>
@@ -13084,7 +12777,7 @@
                 <a:ea typeface="Calibri" pitchFamily="34" charset="-122"/>
                 <a:cs typeface="Calibri" pitchFamily="34" charset="-120"/>
               </a:rPr>
-              <a:t>Merci pour votre attention </a:t>
+              <a:t>Merci pour votre attention 🙏</a:t>
             </a:r>
             <a:endParaRPr lang="en-US" sz="1800" dirty="0"/>
           </a:p>
@@ -13109,13 +12802,6 @@
           </a:solidFill>
           <a:ln/>
         </p:spPr>
-        <p:txBody>
-          <a:bodyPr/>
-          <a:lstStyle/>
-          <a:p>
-            <a:endParaRPr lang="fr-FR"/>
-          </a:p>
-        </p:txBody>
       </p:sp>
     </p:spTree>
   </p:cSld>
@@ -13133,7 +12819,6 @@
         <a:solidFill>
           <a:srgbClr val="0A1628"/>
         </a:solidFill>
-        <a:effectLst/>
       </p:bgPr>
     </p:bg>
     <p:spTree>
@@ -13171,7 +12856,7 @@
           <a:bodyPr wrap="square" rtlCol="0" anchor="ctr"/>
           <a:lstStyle/>
           <a:p>
-            <a:pPr marL="0" indent="0">
+            <a:pPr indent="0" marL="0">
               <a:buNone/>
             </a:pPr>
             <a:r>
@@ -13208,13 +12893,6 @@
           </a:solidFill>
           <a:ln/>
         </p:spPr>
-        <p:txBody>
-          <a:bodyPr/>
-          <a:lstStyle/>
-          <a:p>
-            <a:endParaRPr lang="fr-FR"/>
-          </a:p>
-        </p:txBody>
       </p:sp>
       <p:sp>
         <p:nvSpPr>
@@ -13235,13 +12913,6 @@
           </a:solidFill>
           <a:ln/>
         </p:spPr>
-        <p:txBody>
-          <a:bodyPr/>
-          <a:lstStyle/>
-          <a:p>
-            <a:endParaRPr lang="fr-FR"/>
-          </a:p>
-        </p:txBody>
       </p:sp>
       <p:sp>
         <p:nvSpPr>
@@ -13264,7 +12935,7 @@
           <a:bodyPr wrap="square" lIns="0" tIns="0" rIns="0" bIns="0" rtlCol="0" anchor="ctr"/>
           <a:lstStyle/>
           <a:p>
-            <a:pPr marL="0" indent="0" algn="ctr">
+            <a:pPr algn="ctr" indent="0" marL="0">
               <a:buNone/>
             </a:pPr>
             <a:r>
@@ -13303,7 +12974,7 @@
           <a:bodyPr wrap="square" rtlCol="0" anchor="ctr"/>
           <a:lstStyle/>
           <a:p>
-            <a:pPr marL="0" indent="0">
+            <a:pPr indent="0" marL="0">
               <a:buNone/>
             </a:pPr>
             <a:r>
@@ -13340,13 +13011,6 @@
           </a:solidFill>
           <a:ln/>
         </p:spPr>
-        <p:txBody>
-          <a:bodyPr/>
-          <a:lstStyle/>
-          <a:p>
-            <a:endParaRPr lang="fr-FR"/>
-          </a:p>
-        </p:txBody>
       </p:sp>
       <p:sp>
         <p:nvSpPr>
@@ -13369,7 +13033,7 @@
           <a:bodyPr wrap="square" lIns="0" tIns="0" rIns="0" bIns="0" rtlCol="0" anchor="ctr"/>
           <a:lstStyle/>
           <a:p>
-            <a:pPr marL="0" indent="0" algn="ctr">
+            <a:pPr algn="ctr" indent="0" marL="0">
               <a:buNone/>
             </a:pPr>
             <a:r>
@@ -13408,7 +13072,7 @@
           <a:bodyPr wrap="square" rtlCol="0" anchor="ctr"/>
           <a:lstStyle/>
           <a:p>
-            <a:pPr marL="0" indent="0">
+            <a:pPr indent="0" marL="0">
               <a:buNone/>
             </a:pPr>
             <a:r>
@@ -13445,13 +13109,6 @@
           </a:solidFill>
           <a:ln/>
         </p:spPr>
-        <p:txBody>
-          <a:bodyPr/>
-          <a:lstStyle/>
-          <a:p>
-            <a:endParaRPr lang="fr-FR"/>
-          </a:p>
-        </p:txBody>
       </p:sp>
       <p:sp>
         <p:nvSpPr>
@@ -13474,7 +13131,7 @@
           <a:bodyPr wrap="square" lIns="0" tIns="0" rIns="0" bIns="0" rtlCol="0" anchor="ctr"/>
           <a:lstStyle/>
           <a:p>
-            <a:pPr marL="0" indent="0" algn="ctr">
+            <a:pPr algn="ctr" indent="0" marL="0">
               <a:buNone/>
             </a:pPr>
             <a:r>
@@ -13513,7 +13170,7 @@
           <a:bodyPr wrap="square" rtlCol="0" anchor="ctr"/>
           <a:lstStyle/>
           <a:p>
-            <a:pPr marL="0" indent="0">
+            <a:pPr indent="0" marL="0">
               <a:buNone/>
             </a:pPr>
             <a:r>
@@ -13550,13 +13207,6 @@
           </a:solidFill>
           <a:ln/>
         </p:spPr>
-        <p:txBody>
-          <a:bodyPr/>
-          <a:lstStyle/>
-          <a:p>
-            <a:endParaRPr lang="fr-FR"/>
-          </a:p>
-        </p:txBody>
       </p:sp>
       <p:sp>
         <p:nvSpPr>
@@ -13579,7 +13229,7 @@
           <a:bodyPr wrap="square" lIns="0" tIns="0" rIns="0" bIns="0" rtlCol="0" anchor="ctr"/>
           <a:lstStyle/>
           <a:p>
-            <a:pPr marL="0" indent="0" algn="ctr">
+            <a:pPr algn="ctr" indent="0" marL="0">
               <a:buNone/>
             </a:pPr>
             <a:r>
@@ -13618,7 +13268,7 @@
           <a:bodyPr wrap="square" rtlCol="0" anchor="ctr"/>
           <a:lstStyle/>
           <a:p>
-            <a:pPr marL="0" indent="0">
+            <a:pPr indent="0" marL="0">
               <a:buNone/>
             </a:pPr>
             <a:r>
@@ -13655,13 +13305,6 @@
           </a:solidFill>
           <a:ln/>
         </p:spPr>
-        <p:txBody>
-          <a:bodyPr/>
-          <a:lstStyle/>
-          <a:p>
-            <a:endParaRPr lang="fr-FR"/>
-          </a:p>
-        </p:txBody>
       </p:sp>
       <p:sp>
         <p:nvSpPr>
@@ -13684,7 +13327,7 @@
           <a:bodyPr wrap="square" lIns="0" tIns="0" rIns="0" bIns="0" rtlCol="0" anchor="ctr"/>
           <a:lstStyle/>
           <a:p>
-            <a:pPr marL="0" indent="0" algn="ctr">
+            <a:pPr algn="ctr" indent="0" marL="0">
               <a:buNone/>
             </a:pPr>
             <a:r>
@@ -13723,7 +13366,7 @@
           <a:bodyPr wrap="square" rtlCol="0" anchor="ctr"/>
           <a:lstStyle/>
           <a:p>
-            <a:pPr marL="0" indent="0">
+            <a:pPr indent="0" marL="0">
               <a:buNone/>
             </a:pPr>
             <a:r>
@@ -13760,13 +13403,6 @@
           </a:solidFill>
           <a:ln/>
         </p:spPr>
-        <p:txBody>
-          <a:bodyPr/>
-          <a:lstStyle/>
-          <a:p>
-            <a:endParaRPr lang="fr-FR"/>
-          </a:p>
-        </p:txBody>
       </p:sp>
       <p:sp>
         <p:nvSpPr>
@@ -13789,7 +13425,7 @@
           <a:bodyPr wrap="square" lIns="0" tIns="0" rIns="0" bIns="0" rtlCol="0" anchor="ctr"/>
           <a:lstStyle/>
           <a:p>
-            <a:pPr marL="0" indent="0" algn="ctr">
+            <a:pPr algn="ctr" indent="0" marL="0">
               <a:buNone/>
             </a:pPr>
             <a:r>
@@ -13828,7 +13464,7 @@
           <a:bodyPr wrap="square" rtlCol="0" anchor="ctr"/>
           <a:lstStyle/>
           <a:p>
-            <a:pPr marL="0" indent="0">
+            <a:pPr indent="0" marL="0">
               <a:buNone/>
             </a:pPr>
             <a:r>
@@ -13865,13 +13501,6 @@
           </a:solidFill>
           <a:ln/>
         </p:spPr>
-        <p:txBody>
-          <a:bodyPr/>
-          <a:lstStyle/>
-          <a:p>
-            <a:endParaRPr lang="fr-FR"/>
-          </a:p>
-        </p:txBody>
       </p:sp>
       <p:sp>
         <p:nvSpPr>
@@ -13894,7 +13523,7 @@
           <a:bodyPr wrap="square" lIns="0" tIns="0" rIns="0" bIns="0" rtlCol="0" anchor="ctr"/>
           <a:lstStyle/>
           <a:p>
-            <a:pPr marL="0" indent="0" algn="ctr">
+            <a:pPr algn="ctr" indent="0" marL="0">
               <a:buNone/>
             </a:pPr>
             <a:r>
@@ -13933,7 +13562,7 @@
           <a:bodyPr wrap="square" rtlCol="0" anchor="ctr"/>
           <a:lstStyle/>
           <a:p>
-            <a:pPr marL="0" indent="0">
+            <a:pPr indent="0" marL="0">
               <a:buNone/>
             </a:pPr>
             <a:r>
@@ -13970,13 +13599,6 @@
           </a:solidFill>
           <a:ln/>
         </p:spPr>
-        <p:txBody>
-          <a:bodyPr/>
-          <a:lstStyle/>
-          <a:p>
-            <a:endParaRPr lang="fr-FR"/>
-          </a:p>
-        </p:txBody>
       </p:sp>
       <p:sp>
         <p:nvSpPr>
@@ -13999,7 +13621,7 @@
           <a:bodyPr wrap="square" rtlCol="0" anchor="ctr"/>
           <a:lstStyle/>
           <a:p>
-            <a:pPr marL="0" indent="0" algn="r">
+            <a:pPr algn="r" indent="0" marL="0">
               <a:buNone/>
             </a:pPr>
             <a:r>
@@ -14033,7 +13655,6 @@
         <a:solidFill>
           <a:srgbClr val="0A1628"/>
         </a:solidFill>
-        <a:effectLst/>
       </p:bgPr>
     </p:bg>
     <p:spTree>
@@ -14069,13 +13690,6 @@
           </a:solidFill>
           <a:ln/>
         </p:spPr>
-        <p:txBody>
-          <a:bodyPr/>
-          <a:lstStyle/>
-          <a:p>
-            <a:endParaRPr lang="fr-FR"/>
-          </a:p>
-        </p:txBody>
       </p:sp>
       <p:sp>
         <p:nvSpPr>
@@ -14098,7 +13712,7 @@
           <a:bodyPr wrap="square" rtlCol="0" anchor="t"/>
           <a:lstStyle/>
           <a:p>
-            <a:pPr marL="0" indent="0">
+            <a:pPr indent="0" marL="0">
               <a:buNone/>
             </a:pPr>
             <a:r>
@@ -14140,13 +13754,6 @@
             <a:prstDash val="solid"/>
           </a:ln>
         </p:spPr>
-        <p:txBody>
-          <a:bodyPr/>
-          <a:lstStyle/>
-          <a:p>
-            <a:endParaRPr lang="fr-FR"/>
-          </a:p>
-        </p:txBody>
       </p:sp>
       <p:sp>
         <p:nvSpPr>
@@ -14169,11 +13776,11 @@
           <a:bodyPr wrap="square" rtlCol="0" anchor="ctr"/>
           <a:lstStyle/>
           <a:p>
-            <a:pPr marL="0" indent="0">
+            <a:pPr indent="0" marL="0">
               <a:buNone/>
             </a:pPr>
             <a:r>
-              <a:rPr lang="en-US" sz="1500" b="1" dirty="0" err="1">
+              <a:rPr lang="en-US" sz="1500" b="1" dirty="0">
                 <a:solidFill>
                   <a:srgbClr val="00B4D8"/>
                 </a:solidFill>
@@ -14181,7 +13788,7 @@
                 <a:ea typeface="Calibri" pitchFamily="34" charset="-122"/>
                 <a:cs typeface="Calibri" pitchFamily="34" charset="-120"/>
               </a:rPr>
-              <a:t>Contexte</a:t>
+              <a:t>🏦 Contexte</a:t>
             </a:r>
             <a:endParaRPr lang="en-US" sz="1500" dirty="0"/>
           </a:p>
@@ -14208,7 +13815,7 @@
           <a:bodyPr wrap="square" rtlCol="0" anchor="t"/>
           <a:lstStyle/>
           <a:p>
-            <a:pPr marL="0" indent="0">
+            <a:pPr indent="0" marL="0">
               <a:buNone/>
             </a:pPr>
             <a:r>
@@ -14250,13 +13857,6 @@
             <a:prstDash val="solid"/>
           </a:ln>
         </p:spPr>
-        <p:txBody>
-          <a:bodyPr/>
-          <a:lstStyle/>
-          <a:p>
-            <a:endParaRPr lang="fr-FR"/>
-          </a:p>
-        </p:txBody>
       </p:sp>
       <p:sp>
         <p:nvSpPr>
@@ -14279,11 +13879,11 @@
           <a:bodyPr wrap="square" rtlCol="0" anchor="ctr"/>
           <a:lstStyle/>
           <a:p>
-            <a:pPr marL="0" indent="0">
+            <a:pPr indent="0" marL="0">
               <a:buNone/>
             </a:pPr>
             <a:r>
-              <a:rPr lang="en-US" sz="1500" b="1" dirty="0" err="1">
+              <a:rPr lang="en-US" sz="1500" b="1" dirty="0">
                 <a:solidFill>
                   <a:srgbClr val="2ECC71"/>
                 </a:solidFill>
@@ -14291,7 +13891,7 @@
                 <a:ea typeface="Calibri" pitchFamily="34" charset="-122"/>
                 <a:cs typeface="Calibri" pitchFamily="34" charset="-120"/>
               </a:rPr>
-              <a:t>Objectifs</a:t>
+              <a:t>🎯 Objectifs</a:t>
             </a:r>
             <a:endParaRPr lang="en-US" sz="1500" dirty="0"/>
           </a:p>
@@ -14392,13 +13992,6 @@
           </a:solidFill>
           <a:ln/>
         </p:spPr>
-        <p:txBody>
-          <a:bodyPr/>
-          <a:lstStyle/>
-          <a:p>
-            <a:endParaRPr lang="fr-FR"/>
-          </a:p>
-        </p:txBody>
       </p:sp>
       <p:sp>
         <p:nvSpPr>
@@ -14421,7 +14014,7 @@
           <a:bodyPr wrap="square" rtlCol="0" anchor="ctr"/>
           <a:lstStyle/>
           <a:p>
-            <a:pPr marL="0" indent="0" algn="r">
+            <a:pPr algn="r" indent="0" marL="0">
               <a:buNone/>
             </a:pPr>
             <a:r>
@@ -14455,7 +14048,6 @@
         <a:solidFill>
           <a:srgbClr val="F0F4F8"/>
         </a:solidFill>
-        <a:effectLst/>
       </p:bgPr>
     </p:bg>
     <p:spTree>
@@ -14493,7 +14085,7 @@
           <a:bodyPr wrap="square" rtlCol="0" anchor="ctr"/>
           <a:lstStyle/>
           <a:p>
-            <a:pPr marL="0" indent="0">
+            <a:pPr indent="0" marL="0">
               <a:buNone/>
             </a:pPr>
             <a:r>
@@ -14530,13 +14122,6 @@
           </a:solidFill>
           <a:ln/>
         </p:spPr>
-        <p:txBody>
-          <a:bodyPr/>
-          <a:lstStyle/>
-          <a:p>
-            <a:endParaRPr lang="fr-FR"/>
-          </a:p>
-        </p:txBody>
       </p:sp>
       <p:sp>
         <p:nvSpPr>
@@ -14562,13 +14147,6 @@
             <a:prstDash val="solid"/>
           </a:ln>
         </p:spPr>
-        <p:txBody>
-          <a:bodyPr/>
-          <a:lstStyle/>
-          <a:p>
-            <a:endParaRPr lang="fr-FR"/>
-          </a:p>
-        </p:txBody>
       </p:sp>
       <p:sp>
         <p:nvSpPr>
@@ -14589,13 +14167,6 @@
           </a:solidFill>
           <a:ln/>
         </p:spPr>
-        <p:txBody>
-          <a:bodyPr/>
-          <a:lstStyle/>
-          <a:p>
-            <a:endParaRPr lang="fr-FR"/>
-          </a:p>
-        </p:txBody>
       </p:sp>
       <p:sp>
         <p:nvSpPr>
@@ -14618,7 +14189,7 @@
           <a:bodyPr wrap="square" rtlCol="0" anchor="ctr"/>
           <a:lstStyle/>
           <a:p>
-            <a:pPr marL="0" indent="0" algn="ctr">
+            <a:pPr algn="ctr" indent="0" marL="0">
               <a:buNone/>
             </a:pPr>
             <a:r>
@@ -14657,7 +14228,7 @@
           <a:bodyPr wrap="square" rtlCol="0" anchor="t"/>
           <a:lstStyle/>
           <a:p>
-            <a:pPr marL="0" indent="0" algn="ctr">
+            <a:pPr algn="ctr" indent="0" marL="0">
               <a:buNone/>
             </a:pPr>
             <a:r>
@@ -14674,7 +14245,7 @@
             <a:endParaRPr lang="en-US" sz="1000" dirty="0"/>
           </a:p>
           <a:p>
-            <a:pPr marL="0" indent="0" algn="ctr">
+            <a:pPr algn="ctr" indent="0" marL="0">
               <a:buNone/>
             </a:pPr>
             <a:r>
@@ -14716,13 +14287,6 @@
             <a:prstDash val="solid"/>
           </a:ln>
         </p:spPr>
-        <p:txBody>
-          <a:bodyPr/>
-          <a:lstStyle/>
-          <a:p>
-            <a:endParaRPr lang="fr-FR"/>
-          </a:p>
-        </p:txBody>
       </p:sp>
       <p:sp>
         <p:nvSpPr>
@@ -14743,13 +14307,6 @@
           </a:solidFill>
           <a:ln/>
         </p:spPr>
-        <p:txBody>
-          <a:bodyPr/>
-          <a:lstStyle/>
-          <a:p>
-            <a:endParaRPr lang="fr-FR"/>
-          </a:p>
-        </p:txBody>
       </p:sp>
       <p:sp>
         <p:nvSpPr>
@@ -14772,7 +14329,7 @@
           <a:bodyPr wrap="square" rtlCol="0" anchor="ctr"/>
           <a:lstStyle/>
           <a:p>
-            <a:pPr marL="0" indent="0" algn="ctr">
+            <a:pPr algn="ctr" indent="0" marL="0">
               <a:buNone/>
             </a:pPr>
             <a:r>
@@ -14811,7 +14368,7 @@
           <a:bodyPr wrap="square" rtlCol="0" anchor="t"/>
           <a:lstStyle/>
           <a:p>
-            <a:pPr marL="0" indent="0" algn="ctr">
+            <a:pPr algn="ctr" indent="0" marL="0">
               <a:buNone/>
             </a:pPr>
             <a:r>
@@ -14828,7 +14385,7 @@
             <a:endParaRPr lang="en-US" sz="1000" dirty="0"/>
           </a:p>
           <a:p>
-            <a:pPr marL="0" indent="0" algn="ctr">
+            <a:pPr algn="ctr" indent="0" marL="0">
               <a:buNone/>
             </a:pPr>
             <a:r>
@@ -14870,13 +14427,6 @@
             <a:prstDash val="solid"/>
           </a:ln>
         </p:spPr>
-        <p:txBody>
-          <a:bodyPr/>
-          <a:lstStyle/>
-          <a:p>
-            <a:endParaRPr lang="fr-FR"/>
-          </a:p>
-        </p:txBody>
       </p:sp>
       <p:sp>
         <p:nvSpPr>
@@ -14897,13 +14447,6 @@
           </a:solidFill>
           <a:ln/>
         </p:spPr>
-        <p:txBody>
-          <a:bodyPr/>
-          <a:lstStyle/>
-          <a:p>
-            <a:endParaRPr lang="fr-FR"/>
-          </a:p>
-        </p:txBody>
       </p:sp>
       <p:sp>
         <p:nvSpPr>
@@ -14926,7 +14469,7 @@
           <a:bodyPr wrap="square" rtlCol="0" anchor="ctr"/>
           <a:lstStyle/>
           <a:p>
-            <a:pPr marL="0" indent="0" algn="ctr">
+            <a:pPr algn="ctr" indent="0" marL="0">
               <a:buNone/>
             </a:pPr>
             <a:r>
@@ -14965,7 +14508,7 @@
           <a:bodyPr wrap="square" rtlCol="0" anchor="t"/>
           <a:lstStyle/>
           <a:p>
-            <a:pPr marL="0" indent="0" algn="ctr">
+            <a:pPr algn="ctr" indent="0" marL="0">
               <a:buNone/>
             </a:pPr>
             <a:r>
@@ -14982,7 +14525,7 @@
             <a:endParaRPr lang="en-US" sz="1000" dirty="0"/>
           </a:p>
           <a:p>
-            <a:pPr marL="0" indent="0" algn="ctr">
+            <a:pPr algn="ctr" indent="0" marL="0">
               <a:buNone/>
             </a:pPr>
             <a:r>
@@ -15024,13 +14567,6 @@
             <a:prstDash val="solid"/>
           </a:ln>
         </p:spPr>
-        <p:txBody>
-          <a:bodyPr/>
-          <a:lstStyle/>
-          <a:p>
-            <a:endParaRPr lang="fr-FR"/>
-          </a:p>
-        </p:txBody>
       </p:sp>
       <p:sp>
         <p:nvSpPr>
@@ -15051,13 +14587,6 @@
           </a:solidFill>
           <a:ln/>
         </p:spPr>
-        <p:txBody>
-          <a:bodyPr/>
-          <a:lstStyle/>
-          <a:p>
-            <a:endParaRPr lang="fr-FR"/>
-          </a:p>
-        </p:txBody>
       </p:sp>
       <p:sp>
         <p:nvSpPr>
@@ -15080,7 +14609,7 @@
           <a:bodyPr wrap="square" rtlCol="0" anchor="ctr"/>
           <a:lstStyle/>
           <a:p>
-            <a:pPr marL="0" indent="0" algn="ctr">
+            <a:pPr algn="ctr" indent="0" marL="0">
               <a:buNone/>
             </a:pPr>
             <a:r>
@@ -15119,7 +14648,7 @@
           <a:bodyPr wrap="square" rtlCol="0" anchor="t"/>
           <a:lstStyle/>
           <a:p>
-            <a:pPr marL="0" indent="0" algn="ctr">
+            <a:pPr algn="ctr" indent="0" marL="0">
               <a:buNone/>
             </a:pPr>
             <a:r>
@@ -15136,7 +14665,7 @@
             <a:endParaRPr lang="en-US" sz="1000" dirty="0"/>
           </a:p>
           <a:p>
-            <a:pPr marL="0" indent="0" algn="ctr">
+            <a:pPr algn="ctr" indent="0" marL="0">
               <a:buNone/>
             </a:pPr>
             <a:r>
@@ -15175,7 +14704,7 @@
           <a:bodyPr wrap="square" rtlCol="0" anchor="ctr"/>
           <a:lstStyle/>
           <a:p>
-            <a:pPr marL="0" indent="0">
+            <a:pPr indent="0" marL="0">
               <a:buNone/>
             </a:pPr>
             <a:r>
@@ -15212,13 +14741,6 @@
           </a:solidFill>
           <a:ln/>
         </p:spPr>
-        <p:txBody>
-          <a:bodyPr/>
-          <a:lstStyle/>
-          <a:p>
-            <a:endParaRPr lang="fr-FR"/>
-          </a:p>
-        </p:txBody>
       </p:sp>
       <p:sp>
         <p:nvSpPr>
@@ -15241,7 +14763,7 @@
           <a:bodyPr wrap="square" rtlCol="0" anchor="ctr"/>
           <a:lstStyle/>
           <a:p>
-            <a:pPr marL="0" indent="0">
+            <a:pPr indent="0" marL="0">
               <a:buNone/>
             </a:pPr>
             <a:r>
@@ -15280,7 +14802,7 @@
           <a:bodyPr wrap="square" rtlCol="0" anchor="ctr"/>
           <a:lstStyle/>
           <a:p>
-            <a:pPr marL="0" indent="0">
+            <a:pPr indent="0" marL="0">
               <a:buNone/>
             </a:pPr>
             <a:r>
@@ -15317,13 +14839,6 @@
           </a:solidFill>
           <a:ln/>
         </p:spPr>
-        <p:txBody>
-          <a:bodyPr/>
-          <a:lstStyle/>
-          <a:p>
-            <a:endParaRPr lang="fr-FR"/>
-          </a:p>
-        </p:txBody>
       </p:sp>
       <p:sp>
         <p:nvSpPr>
@@ -15346,7 +14861,7 @@
           <a:bodyPr wrap="square" rtlCol="0" anchor="ctr"/>
           <a:lstStyle/>
           <a:p>
-            <a:pPr marL="0" indent="0">
+            <a:pPr indent="0" marL="0">
               <a:buNone/>
             </a:pPr>
             <a:r>
@@ -15385,7 +14900,7 @@
           <a:bodyPr wrap="square" rtlCol="0" anchor="ctr"/>
           <a:lstStyle/>
           <a:p>
-            <a:pPr marL="0" indent="0">
+            <a:pPr indent="0" marL="0">
               <a:buNone/>
             </a:pPr>
             <a:r>
@@ -15422,13 +14937,6 @@
           </a:solidFill>
           <a:ln/>
         </p:spPr>
-        <p:txBody>
-          <a:bodyPr/>
-          <a:lstStyle/>
-          <a:p>
-            <a:endParaRPr lang="fr-FR"/>
-          </a:p>
-        </p:txBody>
       </p:sp>
       <p:sp>
         <p:nvSpPr>
@@ -15451,7 +14959,7 @@
           <a:bodyPr wrap="square" rtlCol="0" anchor="ctr"/>
           <a:lstStyle/>
           <a:p>
-            <a:pPr marL="0" indent="0">
+            <a:pPr indent="0" marL="0">
               <a:buNone/>
             </a:pPr>
             <a:r>
@@ -15490,7 +14998,7 @@
           <a:bodyPr wrap="square" rtlCol="0" anchor="ctr"/>
           <a:lstStyle/>
           <a:p>
-            <a:pPr marL="0" indent="0">
+            <a:pPr indent="0" marL="0">
               <a:buNone/>
             </a:pPr>
             <a:r>
@@ -15527,13 +15035,6 @@
           </a:solidFill>
           <a:ln/>
         </p:spPr>
-        <p:txBody>
-          <a:bodyPr/>
-          <a:lstStyle/>
-          <a:p>
-            <a:endParaRPr lang="fr-FR"/>
-          </a:p>
-        </p:txBody>
       </p:sp>
       <p:sp>
         <p:nvSpPr>
@@ -15556,7 +15057,7 @@
           <a:bodyPr wrap="square" rtlCol="0" anchor="ctr"/>
           <a:lstStyle/>
           <a:p>
-            <a:pPr marL="0" indent="0">
+            <a:pPr indent="0" marL="0">
               <a:buNone/>
             </a:pPr>
             <a:r>
@@ -15595,7 +15096,7 @@
           <a:bodyPr wrap="square" rtlCol="0" anchor="ctr"/>
           <a:lstStyle/>
           <a:p>
-            <a:pPr marL="0" indent="0">
+            <a:pPr indent="0" marL="0">
               <a:buNone/>
             </a:pPr>
             <a:r>
@@ -15632,13 +15133,6 @@
           </a:solidFill>
           <a:ln/>
         </p:spPr>
-        <p:txBody>
-          <a:bodyPr/>
-          <a:lstStyle/>
-          <a:p>
-            <a:endParaRPr lang="fr-FR"/>
-          </a:p>
-        </p:txBody>
       </p:sp>
       <p:sp>
         <p:nvSpPr>
@@ -15661,7 +15155,7 @@
           <a:bodyPr wrap="square" rtlCol="0" anchor="ctr"/>
           <a:lstStyle/>
           <a:p>
-            <a:pPr marL="0" indent="0">
+            <a:pPr indent="0" marL="0">
               <a:buNone/>
             </a:pPr>
             <a:r>
@@ -15700,7 +15194,7 @@
           <a:bodyPr wrap="square" rtlCol="0" anchor="ctr"/>
           <a:lstStyle/>
           <a:p>
-            <a:pPr marL="0" indent="0">
+            <a:pPr indent="0" marL="0">
               <a:buNone/>
             </a:pPr>
             <a:r>
@@ -15737,13 +15231,6 @@
           </a:solidFill>
           <a:ln/>
         </p:spPr>
-        <p:txBody>
-          <a:bodyPr/>
-          <a:lstStyle/>
-          <a:p>
-            <a:endParaRPr lang="fr-FR"/>
-          </a:p>
-        </p:txBody>
       </p:sp>
       <p:sp>
         <p:nvSpPr>
@@ -15766,7 +15253,7 @@
           <a:bodyPr wrap="square" rtlCol="0" anchor="ctr"/>
           <a:lstStyle/>
           <a:p>
-            <a:pPr marL="0" indent="0">
+            <a:pPr indent="0" marL="0">
               <a:buNone/>
             </a:pPr>
             <a:r>
@@ -15805,7 +15292,7 @@
           <a:bodyPr wrap="square" rtlCol="0" anchor="ctr"/>
           <a:lstStyle/>
           <a:p>
-            <a:pPr marL="0" indent="0">
+            <a:pPr indent="0" marL="0">
               <a:buNone/>
             </a:pPr>
             <a:r>
@@ -15842,13 +15329,6 @@
           </a:solidFill>
           <a:ln/>
         </p:spPr>
-        <p:txBody>
-          <a:bodyPr/>
-          <a:lstStyle/>
-          <a:p>
-            <a:endParaRPr lang="fr-FR"/>
-          </a:p>
-        </p:txBody>
       </p:sp>
       <p:sp>
         <p:nvSpPr>
@@ -15871,7 +15351,7 @@
           <a:bodyPr wrap="square" rtlCol="0" anchor="ctr"/>
           <a:lstStyle/>
           <a:p>
-            <a:pPr marL="0" indent="0" algn="r">
+            <a:pPr algn="r" indent="0" marL="0">
               <a:buNone/>
             </a:pPr>
             <a:r>
@@ -15905,7 +15385,6 @@
         <a:solidFill>
           <a:srgbClr val="F0F4F8"/>
         </a:solidFill>
-        <a:effectLst/>
       </p:bgPr>
     </p:bg>
     <p:spTree>
@@ -15943,7 +15422,7 @@
           <a:bodyPr wrap="square" rtlCol="0" anchor="ctr"/>
           <a:lstStyle/>
           <a:p>
-            <a:pPr marL="0" indent="0">
+            <a:pPr indent="0" marL="0">
               <a:buNone/>
             </a:pPr>
             <a:r>
@@ -15980,24 +15459,17 @@
           </a:solidFill>
           <a:ln/>
         </p:spPr>
-        <p:txBody>
-          <a:bodyPr/>
-          <a:lstStyle/>
-          <a:p>
-            <a:endParaRPr lang="fr-FR"/>
-          </a:p>
-        </p:txBody>
       </p:sp>
       <p:pic>
         <p:nvPicPr>
-          <p:cNvPr id="4" name="Image 0" descr="preencoded.png"/>
+          <p:cNvPr id="4" name="Image 0" descr="preencoded.png">    </p:cNvPr>
           <p:cNvPicPr>
             <a:picLocks noChangeAspect="1"/>
           </p:cNvPicPr>
           <p:nvPr/>
         </p:nvPicPr>
         <p:blipFill>
-          <a:blip r:embed="rId3"/>
+          <a:blip r:embed="rId1"/>
           <a:stretch>
             <a:fillRect/>
           </a:stretch>
@@ -16036,13 +15508,6 @@
             <a:prstDash val="solid"/>
           </a:ln>
         </p:spPr>
-        <p:txBody>
-          <a:bodyPr/>
-          <a:lstStyle/>
-          <a:p>
-            <a:endParaRPr lang="fr-FR"/>
-          </a:p>
-        </p:txBody>
       </p:sp>
       <p:sp>
         <p:nvSpPr>
@@ -16065,20 +15530,9 @@
           <a:bodyPr wrap="square" rtlCol="0" anchor="ctr"/>
           <a:lstStyle/>
           <a:p>
-            <a:pPr marL="0" indent="0">
+            <a:pPr indent="0" marL="0">
               <a:buNone/>
             </a:pPr>
-            <a:r>
-              <a:rPr lang="en-US" sz="1500" b="1" dirty="0" err="1">
-                <a:solidFill>
-                  <a:srgbClr val="2ECC71"/>
-                </a:solidFill>
-                <a:latin typeface="Calibri" pitchFamily="34" charset="0"/>
-                <a:ea typeface="Calibri" pitchFamily="34" charset="-122"/>
-                <a:cs typeface="Calibri" pitchFamily="34" charset="-120"/>
-              </a:rPr>
-              <a:t>Vrais</a:t>
-            </a:r>
             <a:r>
               <a:rPr lang="en-US" sz="1500" b="1" dirty="0">
                 <a:solidFill>
@@ -16088,7 +15542,7 @@
                 <a:ea typeface="Calibri" pitchFamily="34" charset="-122"/>
                 <a:cs typeface="Calibri" pitchFamily="34" charset="-120"/>
               </a:rPr>
-              <a:t> billets</a:t>
+              <a:t>✅ Vrais billets</a:t>
             </a:r>
             <a:endParaRPr lang="en-US" sz="1500" dirty="0"/>
           </a:p>
@@ -16115,7 +15569,7 @@
           <a:bodyPr wrap="square" rtlCol="0" anchor="t"/>
           <a:lstStyle/>
           <a:p>
-            <a:pPr marL="0" indent="0">
+            <a:pPr indent="0" marL="0">
               <a:buNone/>
             </a:pPr>
             <a:r>
@@ -16132,7 +15586,7 @@
             <a:endParaRPr lang="en-US" sz="1150" dirty="0"/>
           </a:p>
           <a:p>
-            <a:pPr marL="0" indent="0">
+            <a:pPr indent="0" marL="0">
               <a:buNone/>
             </a:pPr>
             <a:r>
@@ -16149,7 +15603,7 @@
             <a:endParaRPr lang="en-US" sz="1150" dirty="0"/>
           </a:p>
           <a:p>
-            <a:pPr marL="0" indent="0">
+            <a:pPr indent="0" marL="0">
               <a:buNone/>
             </a:pPr>
             <a:r>
@@ -16191,13 +15645,6 @@
             <a:prstDash val="solid"/>
           </a:ln>
         </p:spPr>
-        <p:txBody>
-          <a:bodyPr/>
-          <a:lstStyle/>
-          <a:p>
-            <a:endParaRPr lang="fr-FR"/>
-          </a:p>
-        </p:txBody>
       </p:sp>
       <p:sp>
         <p:nvSpPr>
@@ -16220,7 +15667,7 @@
           <a:bodyPr wrap="square" rtlCol="0" anchor="ctr"/>
           <a:lstStyle/>
           <a:p>
-            <a:pPr marL="0" indent="0">
+            <a:pPr indent="0" marL="0">
               <a:buNone/>
             </a:pPr>
             <a:r>
@@ -16232,7 +15679,7 @@
                 <a:ea typeface="Calibri" pitchFamily="34" charset="-122"/>
                 <a:cs typeface="Calibri" pitchFamily="34" charset="-120"/>
               </a:rPr>
-              <a:t>Faux billets</a:t>
+              <a:t>❌ Faux billets</a:t>
             </a:r>
             <a:endParaRPr lang="en-US" sz="1500" dirty="0"/>
           </a:p>
@@ -16259,7 +15706,7 @@
           <a:bodyPr wrap="square" rtlCol="0" anchor="t"/>
           <a:lstStyle/>
           <a:p>
-            <a:pPr marL="0" indent="0">
+            <a:pPr indent="0" marL="0">
               <a:buNone/>
             </a:pPr>
             <a:r>
@@ -16276,7 +15723,7 @@
             <a:endParaRPr lang="en-US" sz="1150" dirty="0"/>
           </a:p>
           <a:p>
-            <a:pPr marL="0" indent="0">
+            <a:pPr indent="0" marL="0">
               <a:buNone/>
             </a:pPr>
             <a:r>
@@ -16293,7 +15740,7 @@
             <a:endParaRPr lang="en-US" sz="1150" dirty="0"/>
           </a:p>
           <a:p>
-            <a:pPr marL="0" indent="0">
+            <a:pPr indent="0" marL="0">
               <a:buNone/>
             </a:pPr>
             <a:r>
@@ -16330,13 +15777,6 @@
           </a:solidFill>
           <a:ln/>
         </p:spPr>
-        <p:txBody>
-          <a:bodyPr/>
-          <a:lstStyle/>
-          <a:p>
-            <a:endParaRPr lang="fr-FR"/>
-          </a:p>
-        </p:txBody>
       </p:sp>
       <p:sp>
         <p:nvSpPr>
@@ -16359,7 +15799,7 @@
           <a:bodyPr wrap="square" rtlCol="0" anchor="ctr"/>
           <a:lstStyle/>
           <a:p>
-            <a:pPr marL="0" indent="0" algn="r">
+            <a:pPr algn="r" indent="0" marL="0">
               <a:buNone/>
             </a:pPr>
             <a:r>
@@ -16393,7 +15833,6 @@
         <a:solidFill>
           <a:srgbClr val="F0F4F8"/>
         </a:solidFill>
-        <a:effectLst/>
       </p:bgPr>
     </p:bg>
     <p:spTree>
@@ -16431,7 +15870,7 @@
           <a:bodyPr wrap="square" rtlCol="0" anchor="ctr"/>
           <a:lstStyle/>
           <a:p>
-            <a:pPr marL="0" indent="0">
+            <a:pPr indent="0" marL="0">
               <a:buNone/>
             </a:pPr>
             <a:r>
@@ -16468,13 +15907,6 @@
           </a:solidFill>
           <a:ln/>
         </p:spPr>
-        <p:txBody>
-          <a:bodyPr/>
-          <a:lstStyle/>
-          <a:p>
-            <a:endParaRPr lang="fr-FR"/>
-          </a:p>
-        </p:txBody>
       </p:sp>
       <p:sp>
         <p:nvSpPr>
@@ -16497,7 +15929,7 @@
           <a:bodyPr wrap="square" rtlCol="0" anchor="ctr"/>
           <a:lstStyle/>
           <a:p>
-            <a:pPr marL="0" indent="0">
+            <a:pPr indent="0" marL="0">
               <a:buNone/>
             </a:pPr>
             <a:r>
@@ -16517,14 +15949,14 @@
       </p:sp>
       <p:pic>
         <p:nvPicPr>
-          <p:cNvPr id="5" name="Image 0" descr="preencoded.png"/>
+          <p:cNvPr id="5" name="Image 0" descr="preencoded.png">    </p:cNvPr>
           <p:cNvPicPr>
             <a:picLocks noChangeAspect="1"/>
           </p:cNvPicPr>
           <p:nvPr/>
         </p:nvPicPr>
         <p:blipFill>
-          <a:blip r:embed="rId3"/>
+          <a:blip r:embed="rId1"/>
           <a:stretch>
             <a:fillRect/>
           </a:stretch>
@@ -16558,13 +15990,6 @@
           </a:solidFill>
           <a:ln/>
         </p:spPr>
-        <p:txBody>
-          <a:bodyPr/>
-          <a:lstStyle/>
-          <a:p>
-            <a:endParaRPr lang="fr-FR"/>
-          </a:p>
-        </p:txBody>
       </p:sp>
       <p:sp>
         <p:nvSpPr>
@@ -16587,7 +16012,7 @@
           <a:bodyPr wrap="square" rtlCol="0" anchor="ctr"/>
           <a:lstStyle/>
           <a:p>
-            <a:pPr marL="0" indent="0" algn="r">
+            <a:pPr algn="r" indent="0" marL="0">
               <a:buNone/>
             </a:pPr>
             <a:r>
@@ -16621,7 +16046,6 @@
         <a:solidFill>
           <a:srgbClr val="F0F4F8"/>
         </a:solidFill>
-        <a:effectLst/>
       </p:bgPr>
     </p:bg>
     <p:spTree>
@@ -16659,7 +16083,7 @@
           <a:bodyPr wrap="square" rtlCol="0" anchor="ctr"/>
           <a:lstStyle/>
           <a:p>
-            <a:pPr marL="0" indent="0">
+            <a:pPr indent="0" marL="0">
               <a:buNone/>
             </a:pPr>
             <a:r>
@@ -16696,13 +16120,6 @@
           </a:solidFill>
           <a:ln/>
         </p:spPr>
-        <p:txBody>
-          <a:bodyPr/>
-          <a:lstStyle/>
-          <a:p>
-            <a:endParaRPr lang="fr-FR"/>
-          </a:p>
-        </p:txBody>
       </p:sp>
       <p:sp>
         <p:nvSpPr>
@@ -16725,7 +16142,7 @@
           <a:bodyPr wrap="square" rtlCol="0" anchor="ctr"/>
           <a:lstStyle/>
           <a:p>
-            <a:pPr marL="0" indent="0">
+            <a:pPr indent="0" marL="0">
               <a:buNone/>
             </a:pPr>
             <a:r>
@@ -16745,14 +16162,14 @@
       </p:sp>
       <p:pic>
         <p:nvPicPr>
-          <p:cNvPr id="5" name="Image 0" descr="preencoded.png"/>
+          <p:cNvPr id="5" name="Image 0" descr="preencoded.png">    </p:cNvPr>
           <p:cNvPicPr>
             <a:picLocks noChangeAspect="1"/>
           </p:cNvPicPr>
           <p:nvPr/>
         </p:nvPicPr>
         <p:blipFill>
-          <a:blip r:embed="rId3"/>
+          <a:blip r:embed="rId1"/>
           <a:stretch>
             <a:fillRect/>
           </a:stretch>
@@ -16786,13 +16203,6 @@
           </a:solidFill>
           <a:ln/>
         </p:spPr>
-        <p:txBody>
-          <a:bodyPr/>
-          <a:lstStyle/>
-          <a:p>
-            <a:endParaRPr lang="fr-FR"/>
-          </a:p>
-        </p:txBody>
       </p:sp>
       <p:sp>
         <p:nvSpPr>
@@ -16815,7 +16225,7 @@
           <a:bodyPr wrap="square" rtlCol="0" anchor="ctr"/>
           <a:lstStyle/>
           <a:p>
-            <a:pPr marL="0" indent="0" algn="r">
+            <a:pPr algn="r" indent="0" marL="0">
               <a:buNone/>
             </a:pPr>
             <a:r>
@@ -16849,7 +16259,6 @@
         <a:solidFill>
           <a:srgbClr val="0A1628"/>
         </a:solidFill>
-        <a:effectLst/>
       </p:bgPr>
     </p:bg>
     <p:spTree>
@@ -16885,13 +16294,6 @@
           </a:solidFill>
           <a:ln/>
         </p:spPr>
-        <p:txBody>
-          <a:bodyPr/>
-          <a:lstStyle/>
-          <a:p>
-            <a:endParaRPr lang="fr-FR"/>
-          </a:p>
-        </p:txBody>
       </p:sp>
       <p:sp>
         <p:nvSpPr>
@@ -16914,7 +16316,7 @@
           <a:bodyPr wrap="square" rtlCol="0" anchor="t"/>
           <a:lstStyle/>
           <a:p>
-            <a:pPr marL="0" indent="0">
+            <a:pPr indent="0" marL="0">
               <a:buNone/>
             </a:pPr>
             <a:r>
@@ -16953,7 +16355,7 @@
           <a:bodyPr wrap="square" rtlCol="0" anchor="t"/>
           <a:lstStyle/>
           <a:p>
-            <a:pPr marL="0" indent="0">
+            <a:pPr indent="0" marL="0">
               <a:buNone/>
             </a:pPr>
             <a:r>
@@ -16995,13 +16397,6 @@
             <a:prstDash val="solid"/>
           </a:ln>
         </p:spPr>
-        <p:txBody>
-          <a:bodyPr/>
-          <a:lstStyle/>
-          <a:p>
-            <a:endParaRPr lang="fr-FR"/>
-          </a:p>
-        </p:txBody>
       </p:sp>
       <p:sp>
         <p:nvSpPr>
@@ -17024,11 +16419,11 @@
           <a:bodyPr wrap="square" rtlCol="0" anchor="ctr"/>
           <a:lstStyle/>
           <a:p>
-            <a:pPr marL="0" indent="0">
+            <a:pPr indent="0" marL="0">
               <a:buNone/>
             </a:pPr>
             <a:r>
-              <a:rPr lang="en-US" sz="1400" b="1" dirty="0" err="1">
+              <a:rPr lang="en-US" sz="1400" b="1" dirty="0">
                 <a:solidFill>
                   <a:srgbClr val="E74C3C"/>
                 </a:solidFill>
@@ -17036,7 +16431,7 @@
                 <a:ea typeface="Calibri" pitchFamily="34" charset="-122"/>
                 <a:cs typeface="Calibri" pitchFamily="34" charset="-120"/>
               </a:rPr>
-              <a:t>Problème</a:t>
+              <a:t>⚠️ Problème</a:t>
             </a:r>
             <a:endParaRPr lang="en-US" sz="1400" dirty="0"/>
           </a:p>
@@ -17063,7 +16458,7 @@
           <a:bodyPr wrap="square" rtlCol="0" anchor="t"/>
           <a:lstStyle/>
           <a:p>
-            <a:pPr marL="0" indent="0">
+            <a:pPr indent="0" marL="0">
               <a:buNone/>
             </a:pPr>
             <a:r>
@@ -17102,7 +16497,7 @@
           <a:bodyPr wrap="square" rtlCol="0" anchor="ctr"/>
           <a:lstStyle/>
           <a:p>
-            <a:pPr marL="0" indent="0" algn="ctr">
+            <a:pPr algn="ctr" indent="0" marL="0">
               <a:buNone/>
             </a:pPr>
             <a:r>
@@ -17144,13 +16539,6 @@
             <a:prstDash val="solid"/>
           </a:ln>
         </p:spPr>
-        <p:txBody>
-          <a:bodyPr/>
-          <a:lstStyle/>
-          <a:p>
-            <a:endParaRPr lang="fr-FR"/>
-          </a:p>
-        </p:txBody>
       </p:sp>
       <p:sp>
         <p:nvSpPr>
@@ -17173,11 +16561,11 @@
           <a:bodyPr wrap="square" rtlCol="0" anchor="ctr"/>
           <a:lstStyle/>
           <a:p>
-            <a:pPr marL="0" indent="0">
+            <a:pPr indent="0" marL="0">
               <a:buNone/>
             </a:pPr>
             <a:r>
-              <a:rPr lang="en-US" sz="1400" b="1" dirty="0" err="1">
+              <a:rPr lang="en-US" sz="1400" b="1" dirty="0">
                 <a:solidFill>
                   <a:srgbClr val="F39C12"/>
                 </a:solidFill>
@@ -17185,7 +16573,7 @@
                 <a:ea typeface="Calibri" pitchFamily="34" charset="-122"/>
                 <a:cs typeface="Calibri" pitchFamily="34" charset="-120"/>
               </a:rPr>
-              <a:t>Méthode</a:t>
+              <a:t>🔧 Méthode</a:t>
             </a:r>
             <a:endParaRPr lang="en-US" sz="1400" dirty="0"/>
           </a:p>
@@ -17212,7 +16600,7 @@
           <a:bodyPr wrap="square" rtlCol="0" anchor="t"/>
           <a:lstStyle/>
           <a:p>
-            <a:pPr marL="0" indent="0">
+            <a:pPr indent="0" marL="0">
               <a:buNone/>
             </a:pPr>
             <a:r>
@@ -17254,13 +16642,6 @@
             <a:prstDash val="solid"/>
           </a:ln>
         </p:spPr>
-        <p:txBody>
-          <a:bodyPr/>
-          <a:lstStyle/>
-          <a:p>
-            <a:endParaRPr lang="fr-FR"/>
-          </a:p>
-        </p:txBody>
       </p:sp>
       <p:sp>
         <p:nvSpPr>
@@ -17283,11 +16664,11 @@
           <a:bodyPr wrap="square" rtlCol="0" anchor="ctr"/>
           <a:lstStyle/>
           <a:p>
-            <a:pPr marL="0" indent="0">
+            <a:pPr indent="0" marL="0">
               <a:buNone/>
             </a:pPr>
             <a:r>
-              <a:rPr lang="en-US" sz="1400" b="1" dirty="0" err="1">
+              <a:rPr lang="en-US" sz="1400" b="1" dirty="0">
                 <a:solidFill>
                   <a:srgbClr val="2ECC71"/>
                 </a:solidFill>
@@ -17295,7 +16676,7 @@
                 <a:ea typeface="Calibri" pitchFamily="34" charset="-122"/>
                 <a:cs typeface="Calibri" pitchFamily="34" charset="-120"/>
               </a:rPr>
-              <a:t>Résultat</a:t>
+              <a:t>✅ Résultat</a:t>
             </a:r>
             <a:endParaRPr lang="en-US" sz="1400" dirty="0"/>
           </a:p>
@@ -17322,7 +16703,7 @@
           <a:bodyPr wrap="square" rtlCol="0" anchor="t"/>
           <a:lstStyle/>
           <a:p>
-            <a:pPr marL="0" indent="0">
+            <a:pPr indent="0" marL="0">
               <a:buNone/>
             </a:pPr>
             <a:r>
@@ -17339,7 +16720,7 @@
             <a:endParaRPr lang="en-US" sz="1100" dirty="0"/>
           </a:p>
           <a:p>
-            <a:pPr marL="0" indent="0">
+            <a:pPr indent="0" marL="0">
               <a:buNone/>
             </a:pPr>
             <a:r>
@@ -17376,13 +16757,6 @@
           </a:solidFill>
           <a:ln/>
         </p:spPr>
-        <p:txBody>
-          <a:bodyPr/>
-          <a:lstStyle/>
-          <a:p>
-            <a:endParaRPr lang="fr-FR"/>
-          </a:p>
-        </p:txBody>
       </p:sp>
       <p:sp>
         <p:nvSpPr>
@@ -17405,7 +16779,7 @@
           <a:bodyPr wrap="square" rtlCol="0" anchor="ctr"/>
           <a:lstStyle/>
           <a:p>
-            <a:pPr marL="0" indent="0" algn="r">
+            <a:pPr algn="r" indent="0" marL="0">
               <a:buNone/>
             </a:pPr>
             <a:r>
@@ -17439,7 +16813,6 @@
         <a:solidFill>
           <a:srgbClr val="0A1628"/>
         </a:solidFill>
-        <a:effectLst/>
       </p:bgPr>
     </p:bg>
     <p:spTree>
@@ -17477,13 +16850,6 @@
           </a:solidFill>
           <a:ln/>
         </p:spPr>
-        <p:txBody>
-          <a:bodyPr/>
-          <a:lstStyle/>
-          <a:p>
-            <a:endParaRPr lang="fr-FR"/>
-          </a:p>
-        </p:txBody>
       </p:sp>
       <p:sp>
         <p:nvSpPr>
@@ -17506,13 +16872,6 @@
           </a:solidFill>
           <a:ln/>
         </p:spPr>
-        <p:txBody>
-          <a:bodyPr/>
-          <a:lstStyle/>
-          <a:p>
-            <a:endParaRPr lang="fr-FR"/>
-          </a:p>
-        </p:txBody>
       </p:sp>
       <p:sp>
         <p:nvSpPr>
@@ -17535,7 +16894,7 @@
           <a:bodyPr wrap="square" rtlCol="0" anchor="ctr"/>
           <a:lstStyle/>
           <a:p>
-            <a:pPr marL="0" indent="0">
+            <a:pPr indent="0" marL="0">
               <a:buNone/>
             </a:pPr>
             <a:r>
@@ -17572,13 +16931,6 @@
           </a:solidFill>
           <a:ln/>
         </p:spPr>
-        <p:txBody>
-          <a:bodyPr/>
-          <a:lstStyle/>
-          <a:p>
-            <a:endParaRPr lang="fr-FR"/>
-          </a:p>
-        </p:txBody>
       </p:sp>
       <p:sp>
         <p:nvSpPr>
@@ -17601,7 +16953,7 @@
           <a:bodyPr wrap="square" rtlCol="0" anchor="ctr"/>
           <a:lstStyle/>
           <a:p>
-            <a:pPr marL="0" indent="0">
+            <a:pPr indent="0" marL="0">
               <a:buNone/>
             </a:pPr>
             <a:r>
@@ -17645,13 +16997,6 @@
             <a:prstDash val="solid"/>
           </a:ln>
         </p:spPr>
-        <p:txBody>
-          <a:bodyPr/>
-          <a:lstStyle/>
-          <a:p>
-            <a:endParaRPr lang="fr-FR"/>
-          </a:p>
-        </p:txBody>
       </p:sp>
       <p:sp>
         <p:nvSpPr>
@@ -17674,7 +17019,7 @@
           <a:bodyPr wrap="square" rtlCol="0" anchor="ctr"/>
           <a:lstStyle/>
           <a:p>
-            <a:pPr marL="0" indent="0" algn="ctr">
+            <a:pPr algn="ctr" indent="0" marL="0">
               <a:buNone/>
             </a:pPr>
             <a:r>
@@ -17691,7 +17036,7 @@
             <a:endParaRPr lang="en-US" sz="1500" dirty="0"/>
           </a:p>
           <a:p>
-            <a:pPr marL="0" indent="0" algn="ctr">
+            <a:pPr algn="ctr" indent="0" marL="0">
               <a:buNone/>
             </a:pPr>
             <a:r>
@@ -17735,13 +17080,6 @@
             <a:prstDash val="solid"/>
           </a:ln>
         </p:spPr>
-        <p:txBody>
-          <a:bodyPr/>
-          <a:lstStyle/>
-          <a:p>
-            <a:endParaRPr lang="fr-FR"/>
-          </a:p>
-        </p:txBody>
       </p:sp>
       <p:sp>
         <p:nvSpPr>
@@ -17764,7 +17102,7 @@
           <a:bodyPr wrap="square" rtlCol="0" anchor="ctr"/>
           <a:lstStyle/>
           <a:p>
-            <a:pPr marL="0" indent="0" algn="ctr">
+            <a:pPr algn="ctr" indent="0" marL="0">
               <a:buNone/>
             </a:pPr>
             <a:r>
@@ -17808,13 +17146,6 @@
             <a:prstDash val="solid"/>
           </a:ln>
         </p:spPr>
-        <p:txBody>
-          <a:bodyPr/>
-          <a:lstStyle/>
-          <a:p>
-            <a:endParaRPr lang="fr-FR"/>
-          </a:p>
-        </p:txBody>
       </p:sp>
       <p:sp>
         <p:nvSpPr>
@@ -17837,7 +17168,7 @@
           <a:bodyPr wrap="square" rtlCol="0" anchor="ctr"/>
           <a:lstStyle/>
           <a:p>
-            <a:pPr marL="0" indent="0" algn="ctr">
+            <a:pPr algn="ctr" indent="0" marL="0">
               <a:buNone/>
             </a:pPr>
             <a:r>
@@ -17881,13 +17212,6 @@
             <a:prstDash val="solid"/>
           </a:ln>
         </p:spPr>
-        <p:txBody>
-          <a:bodyPr/>
-          <a:lstStyle/>
-          <a:p>
-            <a:endParaRPr lang="fr-FR"/>
-          </a:p>
-        </p:txBody>
       </p:sp>
       <p:sp>
         <p:nvSpPr>
@@ -17910,7 +17234,7 @@
           <a:bodyPr wrap="square" rtlCol="0" anchor="ctr"/>
           <a:lstStyle/>
           <a:p>
-            <a:pPr marL="0" indent="0" algn="ctr">
+            <a:pPr algn="ctr" indent="0" marL="0">
               <a:buNone/>
             </a:pPr>
             <a:r>
@@ -17927,7 +17251,7 @@
             <a:endParaRPr lang="en-US" sz="1500" dirty="0"/>
           </a:p>
           <a:p>
-            <a:pPr marL="0" indent="0" algn="ctr">
+            <a:pPr algn="ctr" indent="0" marL="0">
               <a:buNone/>
             </a:pPr>
             <a:r>
@@ -17964,13 +17288,6 @@
           </a:solidFill>
           <a:ln/>
         </p:spPr>
-        <p:txBody>
-          <a:bodyPr/>
-          <a:lstStyle/>
-          <a:p>
-            <a:endParaRPr lang="fr-FR"/>
-          </a:p>
-        </p:txBody>
       </p:sp>
       <p:sp>
         <p:nvSpPr>
@@ -17993,7 +17310,7 @@
           <a:bodyPr wrap="square" rtlCol="0" anchor="ctr"/>
           <a:lstStyle/>
           <a:p>
-            <a:pPr marL="0" indent="0" algn="r">
+            <a:pPr algn="r" indent="0" marL="0">
               <a:buNone/>
             </a:pPr>
             <a:r>
@@ -18312,319 +17629,4 @@
     </a:ext>
   </a:extLst>
 </a:theme>
-</file>
-
-<file path=ppt/theme/theme2.xml><?xml version="1.0" encoding="utf-8"?>
-<a:theme xmlns:a="http://schemas.openxmlformats.org/drawingml/2006/main" name="Office Theme">
-  <a:themeElements>
-    <a:clrScheme name="Office">
-      <a:dk1>
-        <a:sysClr val="windowText" lastClr="000000"/>
-      </a:dk1>
-      <a:lt1>
-        <a:sysClr val="window" lastClr="FFFFFF"/>
-      </a:lt1>
-      <a:dk2>
-        <a:srgbClr val="0E2841"/>
-      </a:dk2>
-      <a:lt2>
-        <a:srgbClr val="E8E8E8"/>
-      </a:lt2>
-      <a:accent1>
-        <a:srgbClr val="156082"/>
-      </a:accent1>
-      <a:accent2>
-        <a:srgbClr val="E97132"/>
-      </a:accent2>
-      <a:accent3>
-        <a:srgbClr val="196B24"/>
-      </a:accent3>
-      <a:accent4>
-        <a:srgbClr val="0F9ED5"/>
-      </a:accent4>
-      <a:accent5>
-        <a:srgbClr val="A02B93"/>
-      </a:accent5>
-      <a:accent6>
-        <a:srgbClr val="4EA72E"/>
-      </a:accent6>
-      <a:hlink>
-        <a:srgbClr val="467886"/>
-      </a:hlink>
-      <a:folHlink>
-        <a:srgbClr val="96607D"/>
-      </a:folHlink>
-    </a:clrScheme>
-    <a:fontScheme name="Office">
-      <a:majorFont>
-        <a:latin typeface="Aptos Display" panose="02110004020202020204"/>
-        <a:ea typeface=""/>
-        <a:cs typeface=""/>
-        <a:font script="Jpan" typeface="游ゴシック Light"/>
-        <a:font script="Hang" typeface="맑은 고딕"/>
-        <a:font script="Hans" typeface="等线 Light"/>
-        <a:font script="Hant" typeface="新細明體"/>
-        <a:font script="Arab" typeface="Times New Roman"/>
-        <a:font script="Hebr" typeface="Times New Roman"/>
-        <a:font script="Thai" typeface="Angsana New"/>
-        <a:font script="Ethi" typeface="Nyala"/>
-        <a:font script="Beng" typeface="Vrinda"/>
-        <a:font script="Gujr" typeface="Shruti"/>
-        <a:font script="Khmr" typeface="MoolBoran"/>
-        <a:font script="Knda" typeface="Tunga"/>
-        <a:font script="Guru" typeface="Raavi"/>
-        <a:font script="Cans" typeface="Euphemia"/>
-        <a:font script="Cher" typeface="Plantagenet Cherokee"/>
-        <a:font script="Yiii" typeface="Microsoft Yi Baiti"/>
-        <a:font script="Tibt" typeface="Microsoft Himalaya"/>
-        <a:font script="Thaa" typeface="MV Boli"/>
-        <a:font script="Deva" typeface="Mangal"/>
-        <a:font script="Telu" typeface="Gautami"/>
-        <a:font script="Taml" typeface="Latha"/>
-        <a:font script="Syrc" typeface="Estrangelo Edessa"/>
-        <a:font script="Orya" typeface="Kalinga"/>
-        <a:font script="Mlym" typeface="Kartika"/>
-        <a:font script="Laoo" typeface="DokChampa"/>
-        <a:font script="Sinh" typeface="Iskoola Pota"/>
-        <a:font script="Mong" typeface="Mongolian Baiti"/>
-        <a:font script="Viet" typeface="Times New Roman"/>
-        <a:font script="Uigh" typeface="Microsoft Uighur"/>
-        <a:font script="Geor" typeface="Sylfaen"/>
-        <a:font script="Armn" typeface="Arial"/>
-        <a:font script="Bugi" typeface="Leelawadee UI"/>
-        <a:font script="Bopo" typeface="Microsoft JhengHei"/>
-        <a:font script="Java" typeface="Javanese Text"/>
-        <a:font script="Lisu" typeface="Segoe UI"/>
-        <a:font script="Mymr" typeface="Myanmar Text"/>
-        <a:font script="Nkoo" typeface="Ebrima"/>
-        <a:font script="Olck" typeface="Nirmala UI"/>
-        <a:font script="Osma" typeface="Ebrima"/>
-        <a:font script="Phag" typeface="Phagspa"/>
-        <a:font script="Syrn" typeface="Estrangelo Edessa"/>
-        <a:font script="Syrj" typeface="Estrangelo Edessa"/>
-        <a:font script="Syre" typeface="Estrangelo Edessa"/>
-        <a:font script="Sora" typeface="Nirmala UI"/>
-        <a:font script="Tale" typeface="Microsoft Tai Le"/>
-        <a:font script="Talu" typeface="Microsoft New Tai Lue"/>
-        <a:font script="Tfng" typeface="Ebrima"/>
-      </a:majorFont>
-      <a:minorFont>
-        <a:latin typeface="Aptos" panose="02110004020202020204"/>
-        <a:ea typeface=""/>
-        <a:cs typeface=""/>
-        <a:font script="Jpan" typeface="游ゴシック"/>
-        <a:font script="Hang" typeface="맑은 고딕"/>
-        <a:font script="Hans" typeface="等线"/>
-        <a:font script="Hant" typeface="新細明體"/>
-        <a:font script="Arab" typeface="Arial"/>
-        <a:font script="Hebr" typeface="Arial"/>
-        <a:font script="Thai" typeface="Cordia New"/>
-        <a:font script="Ethi" typeface="Nyala"/>
-        <a:font script="Beng" typeface="Vrinda"/>
-        <a:font script="Gujr" typeface="Shruti"/>
-        <a:font script="Khmr" typeface="DaunPenh"/>
-        <a:font script="Knda" typeface="Tunga"/>
-        <a:font script="Guru" typeface="Raavi"/>
-        <a:font script="Cans" typeface="Euphemia"/>
-        <a:font script="Cher" typeface="Plantagenet Cherokee"/>
-        <a:font script="Yiii" typeface="Microsoft Yi Baiti"/>
-        <a:font script="Tibt" typeface="Microsoft Himalaya"/>
-        <a:font script="Thaa" typeface="MV Boli"/>
-        <a:font script="Deva" typeface="Mangal"/>
-        <a:font script="Telu" typeface="Gautami"/>
-        <a:font script="Taml" typeface="Latha"/>
-        <a:font script="Syrc" typeface="Estrangelo Edessa"/>
-        <a:font script="Orya" typeface="Kalinga"/>
-        <a:font script="Mlym" typeface="Kartika"/>
-        <a:font script="Laoo" typeface="DokChampa"/>
-        <a:font script="Sinh" typeface="Iskoola Pota"/>
-        <a:font script="Mong" typeface="Mongolian Baiti"/>
-        <a:font script="Viet" typeface="Arial"/>
-        <a:font script="Uigh" typeface="Microsoft Uighur"/>
-        <a:font script="Geor" typeface="Sylfaen"/>
-        <a:font script="Armn" typeface="Arial"/>
-        <a:font script="Bugi" typeface="Leelawadee UI"/>
-        <a:font script="Bopo" typeface="Microsoft JhengHei"/>
-        <a:font script="Java" typeface="Javanese Text"/>
-        <a:font script="Lisu" typeface="Segoe UI"/>
-        <a:font script="Mymr" typeface="Myanmar Text"/>
-        <a:font script="Nkoo" typeface="Ebrima"/>
-        <a:font script="Olck" typeface="Nirmala UI"/>
-        <a:font script="Osma" typeface="Ebrima"/>
-        <a:font script="Phag" typeface="Phagspa"/>
-        <a:font script="Syrn" typeface="Estrangelo Edessa"/>
-        <a:font script="Syrj" typeface="Estrangelo Edessa"/>
-        <a:font script="Syre" typeface="Estrangelo Edessa"/>
-        <a:font script="Sora" typeface="Nirmala UI"/>
-        <a:font script="Tale" typeface="Microsoft Tai Le"/>
-        <a:font script="Talu" typeface="Microsoft New Tai Lue"/>
-        <a:font script="Tfng" typeface="Ebrima"/>
-      </a:minorFont>
-    </a:fontScheme>
-    <a:fmtScheme name="Office">
-      <a:fillStyleLst>
-        <a:solidFill>
-          <a:schemeClr val="phClr"/>
-        </a:solidFill>
-        <a:gradFill rotWithShape="1">
-          <a:gsLst>
-            <a:gs pos="0">
-              <a:schemeClr val="phClr">
-                <a:lumMod val="110000"/>
-                <a:satMod val="105000"/>
-                <a:tint val="67000"/>
-              </a:schemeClr>
-            </a:gs>
-            <a:gs pos="50000">
-              <a:schemeClr val="phClr">
-                <a:lumMod val="105000"/>
-                <a:satMod val="103000"/>
-                <a:tint val="73000"/>
-              </a:schemeClr>
-            </a:gs>
-            <a:gs pos="100000">
-              <a:schemeClr val="phClr">
-                <a:lumMod val="105000"/>
-                <a:satMod val="109000"/>
-                <a:tint val="81000"/>
-              </a:schemeClr>
-            </a:gs>
-          </a:gsLst>
-          <a:lin ang="5400000" scaled="0"/>
-        </a:gradFill>
-        <a:gradFill rotWithShape="1">
-          <a:gsLst>
-            <a:gs pos="0">
-              <a:schemeClr val="phClr">
-                <a:satMod val="103000"/>
-                <a:lumMod val="102000"/>
-                <a:tint val="94000"/>
-              </a:schemeClr>
-            </a:gs>
-            <a:gs pos="50000">
-              <a:schemeClr val="phClr">
-                <a:satMod val="110000"/>
-                <a:lumMod val="100000"/>
-                <a:shade val="100000"/>
-              </a:schemeClr>
-            </a:gs>
-            <a:gs pos="100000">
-              <a:schemeClr val="phClr">
-                <a:lumMod val="99000"/>
-                <a:satMod val="120000"/>
-                <a:shade val="78000"/>
-              </a:schemeClr>
-            </a:gs>
-          </a:gsLst>
-          <a:lin ang="5400000" scaled="0"/>
-        </a:gradFill>
-      </a:fillStyleLst>
-      <a:lnStyleLst>
-        <a:ln w="12700" cap="flat" cmpd="sng" algn="ctr">
-          <a:solidFill>
-            <a:schemeClr val="phClr"/>
-          </a:solidFill>
-          <a:prstDash val="solid"/>
-          <a:miter lim="800000"/>
-        </a:ln>
-        <a:ln w="19050" cap="flat" cmpd="sng" algn="ctr">
-          <a:solidFill>
-            <a:schemeClr val="phClr"/>
-          </a:solidFill>
-          <a:prstDash val="solid"/>
-          <a:miter lim="800000"/>
-        </a:ln>
-        <a:ln w="25400" cap="flat" cmpd="sng" algn="ctr">
-          <a:solidFill>
-            <a:schemeClr val="phClr"/>
-          </a:solidFill>
-          <a:prstDash val="solid"/>
-          <a:miter lim="800000"/>
-        </a:ln>
-      </a:lnStyleLst>
-      <a:effectStyleLst>
-        <a:effectStyle>
-          <a:effectLst/>
-        </a:effectStyle>
-        <a:effectStyle>
-          <a:effectLst/>
-        </a:effectStyle>
-        <a:effectStyle>
-          <a:effectLst>
-            <a:outerShdw blurRad="57150" dist="19050" dir="5400000" algn="ctr" rotWithShape="0">
-              <a:srgbClr val="000000">
-                <a:alpha val="63000"/>
-              </a:srgbClr>
-            </a:outerShdw>
-          </a:effectLst>
-        </a:effectStyle>
-      </a:effectStyleLst>
-      <a:bgFillStyleLst>
-        <a:solidFill>
-          <a:schemeClr val="phClr"/>
-        </a:solidFill>
-        <a:solidFill>
-          <a:schemeClr val="phClr">
-            <a:tint val="95000"/>
-            <a:satMod val="170000"/>
-          </a:schemeClr>
-        </a:solidFill>
-        <a:gradFill rotWithShape="1">
-          <a:gsLst>
-            <a:gs pos="0">
-              <a:schemeClr val="phClr">
-                <a:tint val="93000"/>
-                <a:satMod val="150000"/>
-                <a:shade val="98000"/>
-                <a:lumMod val="102000"/>
-              </a:schemeClr>
-            </a:gs>
-            <a:gs pos="50000">
-              <a:schemeClr val="phClr">
-                <a:tint val="98000"/>
-                <a:satMod val="130000"/>
-                <a:shade val="90000"/>
-                <a:lumMod val="103000"/>
-              </a:schemeClr>
-            </a:gs>
-            <a:gs pos="100000">
-              <a:schemeClr val="phClr">
-                <a:shade val="63000"/>
-                <a:satMod val="120000"/>
-              </a:schemeClr>
-            </a:gs>
-          </a:gsLst>
-          <a:lin ang="5400000" scaled="0"/>
-        </a:gradFill>
-      </a:bgFillStyleLst>
-    </a:fmtScheme>
-  </a:themeElements>
-  <a:objectDefaults>
-    <a:lnDef>
-      <a:spPr/>
-      <a:bodyPr/>
-      <a:lstStyle/>
-      <a:style>
-        <a:lnRef idx="2">
-          <a:schemeClr val="accent1"/>
-        </a:lnRef>
-        <a:fillRef idx="0">
-          <a:schemeClr val="accent1"/>
-        </a:fillRef>
-        <a:effectRef idx="1">
-          <a:schemeClr val="accent1"/>
-        </a:effectRef>
-        <a:fontRef idx="minor">
-          <a:schemeClr val="tx1"/>
-        </a:fontRef>
-      </a:style>
-    </a:lnDef>
-  </a:objectDefaults>
-  <a:extraClrSchemeLst/>
-  <a:extLst>
-    <a:ext uri="{05A4C25C-085E-4340-85A3-A5531E510DB2}">
-      <thm15:themeFamily xmlns:thm15="http://schemas.microsoft.com/office/thememl/2012/main" name="Office Theme" id="{2E142A2C-CD16-42D6-873A-C26D2A0506FA}" vid="{1BDDFF52-6CD6-40A5-AB3C-68EB2F1E4D0A}"/>
-    </a:ext>
-  </a:extLst>
-</a:theme>
 </file>